--- a/icbb-website/materials/research-methods/unit-02-slides.pptx
+++ b/icbb-website/materials/research-methods/unit-02-slides.pptx
@@ -1055,7 +1055,7 @@
           <a:p>
             <a:r>
               <a:rPr lang="en-US" dirty="0"/>
-              <a:t>Take-away: The test of a finished question is that it dictates the analysis. If two people would analyse your data differently, the question is not specific yet.</a:t>
+              <a:t>The point: The test of a finished question is that it dictates the analysis. If two people would analyse your data differently, the question is not specific yet.</a:t>
             </a:r>
             <a:endParaRPr lang="en-US" dirty="0"/>
           </a:p>
@@ -1143,7 +1143,7 @@
           <a:p>
             <a:r>
               <a:rPr lang="en-US" dirty="0"/>
-              <a:t>Take-away: Map every objective to the specific analysis that will answer it before submitting the proposal. An unanswerable objective costs nothing to fix now and a chapter of trouble later.</a:t>
+              <a:t>The point: Map every objective to the specific analysis that will answer it before submitting the proposal. An unanswerable objective costs nothing to fix now and a chapter of trouble later.</a:t>
             </a:r>
             <a:endParaRPr lang="en-US" dirty="0"/>
           </a:p>
@@ -1495,7 +1495,7 @@
           <a:p>
             <a:r>
               <a:rPr lang="en-US" dirty="0"/>
-              <a:t>Read these out at the start and return to them at the end of the unit.</a:t>
+              <a:t>Read these at the start, and return to them at the end of the unit.</a:t>
             </a:r>
             <a:endParaRPr lang="en-US" dirty="0"/>
           </a:p>
@@ -2215,14 +2215,14 @@
         </p:nvSpPr>
         <p:spPr>
           <a:xfrm>
-            <a:off x="0" y="0"/>
-            <a:ext cx="118872" cy="5148072"/>
+            <a:off x="566928" y="4590288"/>
+            <a:ext cx="8010144" cy="10973"/>
           </a:xfrm>
           <a:prstGeom prst="rect">
             <a:avLst/>
           </a:prstGeom>
           <a:solidFill>
-            <a:srgbClr val="0066CC"/>
+            <a:srgbClr val="D8D3CB"/>
           </a:solidFill>
           <a:ln/>
         </p:spPr>
@@ -2237,7 +2237,7 @@
         </p:nvPicPr>
         <p:blipFill>
           <a:blip r:embed="rId1">
-            <a:alphaModFix amt="18000"/>
+            <a:alphaModFix amt="38000"/>
           </a:blip>
           <a:stretch>
             <a:fillRect/>
@@ -2245,8 +2245,8 @@
         </p:blipFill>
         <p:spPr>
           <a:xfrm>
-            <a:off x="6903720" y="3977640"/>
-            <a:ext cx="1920240" cy="1280160"/>
+            <a:off x="7973568" y="4709160"/>
+            <a:ext cx="566928" cy="374904"/>
           </a:xfrm>
           <a:prstGeom prst="rect">
             <a:avLst/>
@@ -2265,8 +2265,8 @@
         </p:nvSpPr>
         <p:spPr>
           <a:xfrm>
-            <a:off x="8503920" y="4709160"/>
-            <a:ext cx="800000" cy="300000"/>
+            <a:off x="566928" y="4700016"/>
+            <a:ext cx="914400" cy="274320"/>
           </a:xfrm>
           <a:prstGeom prst="rect">
             <a:avLst/>
@@ -2281,10 +2281,13 @@
           <a:bodyPr/>
           <a:lstStyle>
             <a:lvl1pPr>
-              <a:defRPr sz="1000">
-                <a:solidFill>
-                  <a:srgbClr val="6B7280"/>
-                </a:solidFill>
+              <a:defRPr sz="900">
+                <a:solidFill>
+                  <a:srgbClr val="5F6B76"/>
+                </a:solidFill>
+                <a:latin typeface="Corbel"/>
+                <a:ea typeface="Corbel"/>
+                <a:cs typeface="Corbel"/>
               </a:defRPr>
             </a:lvl1pPr>
           </a:lstStyle>
@@ -2312,7 +2315,7 @@
     <p:bg>
       <p:bgPr>
         <a:solidFill>
-          <a:srgbClr val="004D99"/>
+          <a:srgbClr val="132330"/>
         </a:solidFill>
       </p:bgPr>
     </p:bg>
@@ -2338,14 +2341,14 @@
         </p:nvSpPr>
         <p:spPr>
           <a:xfrm>
-            <a:off x="0" y="4526280"/>
-            <a:ext cx="9144000" cy="621792"/>
+            <a:off x="685800" y="1481328"/>
+            <a:ext cx="1051560" cy="25603"/>
           </a:xfrm>
           <a:prstGeom prst="rect">
             <a:avLst/>
           </a:prstGeom>
           <a:solidFill>
-            <a:srgbClr val="00A86B"/>
+            <a:srgbClr val="9A6A3C"/>
           </a:solidFill>
           <a:ln/>
         </p:spPr>
@@ -2360,7 +2363,7 @@
         </p:nvPicPr>
         <p:blipFill>
           <a:blip r:embed="rId1">
-            <a:alphaModFix amt="75000"/>
+            <a:alphaModFix amt="45000"/>
           </a:blip>
           <a:stretch>
             <a:fillRect/>
@@ -2368,8 +2371,8 @@
         </p:blipFill>
         <p:spPr>
           <a:xfrm>
-            <a:off x="7452360" y="384048"/>
-            <a:ext cx="1371600" cy="914400"/>
+            <a:off x="7863840" y="4315968"/>
+            <a:ext cx="676656" cy="448056"/>
           </a:xfrm>
           <a:prstGeom prst="rect">
             <a:avLst/>
@@ -2413,8 +2416,8 @@
         </p:nvSpPr>
         <p:spPr>
           <a:xfrm>
-            <a:off x="8503920" y="4709160"/>
-            <a:ext cx="800000" cy="300000"/>
+            <a:off x="566928" y="4700016"/>
+            <a:ext cx="914400" cy="274320"/>
           </a:xfrm>
           <a:prstGeom prst="rect">
             <a:avLst/>
@@ -2429,10 +2432,13 @@
           <a:bodyPr/>
           <a:lstStyle>
             <a:lvl1pPr>
-              <a:defRPr sz="1000">
-                <a:solidFill>
-                  <a:srgbClr val="6B7280"/>
-                </a:solidFill>
+              <a:defRPr sz="900">
+                <a:solidFill>
+                  <a:srgbClr val="5F6B76"/>
+                </a:solidFill>
+                <a:latin typeface="Corbel"/>
+                <a:ea typeface="Corbel"/>
+                <a:cs typeface="Corbel"/>
               </a:defRPr>
             </a:lvl1pPr>
           </a:lstStyle>
@@ -2733,8 +2739,8 @@
         </p:nvSpPr>
         <p:spPr>
           <a:xfrm>
-            <a:off x="548640" y="1005840"/>
-            <a:ext cx="6675120" cy="274320"/>
+            <a:off x="685800" y="1024128"/>
+            <a:ext cx="6766560" cy="292608"/>
           </a:xfrm>
           <a:prstGeom prst="rect">
             <a:avLst/>
@@ -2750,14 +2756,17 @@
               <a:buNone/>
             </a:pPr>
             <a:r>
-              <a:rPr lang="en-US" sz="1200" b="1" spc="200" kern="0" dirty="0">
-                <a:solidFill>
-                  <a:srgbClr val="00A86B"/>
-                </a:solidFill>
+              <a:rPr lang="en-US" sz="1150" spc="240" kern="0" dirty="0">
+                <a:solidFill>
+                  <a:srgbClr val="C8A67B"/>
+                </a:solidFill>
+                <a:latin typeface="Corbel" pitchFamily="34" charset="0"/>
+                <a:ea typeface="Corbel" pitchFamily="34" charset="-122"/>
+                <a:cs typeface="Corbel" pitchFamily="34" charset="-120"/>
               </a:rPr>
-              <a:t>ICBB-RM101  ·  UNIT 2 OF 10</a:t>
-            </a:r>
-            <a:endParaRPr lang="en-US" sz="1200" dirty="0"/>
+              <a:t>ICBB-RM101   ·   Unit 2 of 10</a:t>
+            </a:r>
+            <a:endParaRPr lang="en-US" sz="1150" dirty="0"/>
           </a:p>
         </p:txBody>
       </p:sp>
@@ -2769,8 +2778,8 @@
         </p:nvSpPr>
         <p:spPr>
           <a:xfrm>
-            <a:off x="548640" y="1371600"/>
-            <a:ext cx="6766560" cy="1371600"/>
+            <a:off x="685800" y="1700784"/>
+            <a:ext cx="6858000" cy="1417320"/>
           </a:xfrm>
           <a:prstGeom prst="rect">
             <a:avLst/>
@@ -2780,95 +2789,107 @@
         </p:spPr>
         <p:txBody>
           <a:bodyPr wrap="square" rtlCol="0" anchor="t"/>
+          <a:lstStyle/>
+          <a:p>
+            <a:pPr indent="0" marL="0">
+              <a:lnSpc>
+                <a:spcPct val="102000"/>
+              </a:lnSpc>
+              <a:buNone/>
+            </a:pPr>
+            <a:r>
+              <a:rPr lang="en-US" sz="3300" dirty="0">
+                <a:solidFill>
+                  <a:srgbClr val="FFFFFF"/>
+                </a:solidFill>
+                <a:latin typeface="Constantia" pitchFamily="34" charset="0"/>
+                <a:ea typeface="Constantia" pitchFamily="34" charset="-122"/>
+                <a:cs typeface="Constantia" pitchFamily="34" charset="-120"/>
+              </a:rPr>
+              <a:t>The Research Problem, Questions and Objectives</a:t>
+            </a:r>
+            <a:endParaRPr lang="en-US" sz="3300" dirty="0"/>
+          </a:p>
+        </p:txBody>
+      </p:sp>
+      <p:sp>
+        <p:nvSpPr>
+          <p:cNvPr id="4" name="Text 2"/>
+          <p:cNvSpPr/>
+          <p:nvPr/>
+        </p:nvSpPr>
+        <p:spPr>
+          <a:xfrm>
+            <a:off x="685800" y="3127248"/>
+            <a:ext cx="6309360" cy="1051560"/>
+          </a:xfrm>
+          <a:prstGeom prst="rect">
+            <a:avLst/>
+          </a:prstGeom>
+          <a:noFill/>
+          <a:ln/>
+        </p:spPr>
+        <p:txBody>
+          <a:bodyPr wrap="square" rtlCol="0" anchor="t"/>
+          <a:lstStyle/>
+          <a:p>
+            <a:pPr indent="0" marL="0">
+              <a:lnSpc>
+                <a:spcPct val="128000"/>
+              </a:lnSpc>
+              <a:buNone/>
+            </a:pPr>
+            <a:r>
+              <a:rPr lang="en-US" sz="1350" dirty="0">
+                <a:solidFill>
+                  <a:srgbClr val="B9C2CB"/>
+                </a:solidFill>
+                <a:latin typeface="Corbel" pitchFamily="34" charset="0"/>
+                <a:ea typeface="Corbel" pitchFamily="34" charset="-122"/>
+                <a:cs typeface="Corbel" pitchFamily="34" charset="-120"/>
+              </a:rPr>
+              <a:t>How to move from a broad interest to a question that is specific enough to answer, and how aims, objectives, hypotheses and conceptual frameworks fit together.</a:t>
+            </a:r>
+            <a:endParaRPr lang="en-US" sz="1350" dirty="0"/>
+          </a:p>
+        </p:txBody>
+      </p:sp>
+      <p:sp>
+        <p:nvSpPr>
+          <p:cNvPr id="5" name="Text 3"/>
+          <p:cNvSpPr/>
+          <p:nvPr/>
+        </p:nvSpPr>
+        <p:spPr>
+          <a:xfrm>
+            <a:off x="685800" y="4407408"/>
+            <a:ext cx="4572000" cy="274320"/>
+          </a:xfrm>
+          <a:prstGeom prst="rect">
+            <a:avLst/>
+          </a:prstGeom>
+          <a:noFill/>
+          <a:ln/>
+        </p:spPr>
+        <p:txBody>
+          <a:bodyPr wrap="square" rtlCol="0" anchor="ctr"/>
           <a:lstStyle/>
           <a:p>
             <a:pPr indent="0" marL="0">
               <a:buNone/>
             </a:pPr>
             <a:r>
-              <a:rPr lang="en-US" sz="3400" b="1" dirty="0">
-                <a:solidFill>
-                  <a:srgbClr val="FFFFFF"/>
-                </a:solidFill>
+              <a:rPr lang="en-US" sz="1050" spc="120" kern="0" dirty="0">
+                <a:solidFill>
+                  <a:srgbClr val="8894A0"/>
+                </a:solidFill>
+                <a:latin typeface="Corbel" pitchFamily="34" charset="0"/>
+                <a:ea typeface="Corbel" pitchFamily="34" charset="-122"/>
+                <a:cs typeface="Corbel" pitchFamily="34" charset="-120"/>
               </a:rPr>
-              <a:t>The Research Problem, Questions and Objectives</a:t>
-            </a:r>
-            <a:endParaRPr lang="en-US" sz="3400" dirty="0"/>
-          </a:p>
-        </p:txBody>
-      </p:sp>
-      <p:sp>
-        <p:nvSpPr>
-          <p:cNvPr id="4" name="Text 2"/>
-          <p:cNvSpPr/>
-          <p:nvPr/>
-        </p:nvSpPr>
-        <p:spPr>
-          <a:xfrm>
-            <a:off x="548640" y="2788920"/>
-            <a:ext cx="6766560" cy="1188720"/>
-          </a:xfrm>
-          <a:prstGeom prst="rect">
-            <a:avLst/>
-          </a:prstGeom>
-          <a:noFill/>
-          <a:ln/>
-        </p:spPr>
-        <p:txBody>
-          <a:bodyPr wrap="square" rtlCol="0" anchor="t"/>
-          <a:lstStyle/>
-          <a:p>
-            <a:pPr indent="0" marL="0">
-              <a:lnSpc>
-                <a:spcPct val="120000"/>
-              </a:lnSpc>
-              <a:buNone/>
-            </a:pPr>
-            <a:r>
-              <a:rPr lang="en-US" sz="1400" dirty="0">
-                <a:solidFill>
-                  <a:srgbClr val="DCE7F5"/>
-                </a:solidFill>
-              </a:rPr>
-              <a:t>How to move from a broad interest to a question that is specific enough to answer, and how aims, objectives, hypotheses and conceptual frameworks fit together.</a:t>
-            </a:r>
-            <a:endParaRPr lang="en-US" sz="1400" dirty="0"/>
-          </a:p>
-        </p:txBody>
-      </p:sp>
-      <p:sp>
-        <p:nvSpPr>
-          <p:cNvPr id="5" name="Text 3"/>
-          <p:cNvSpPr/>
-          <p:nvPr/>
-        </p:nvSpPr>
-        <p:spPr>
-          <a:xfrm>
-            <a:off x="548640" y="4645152"/>
-            <a:ext cx="5486400" cy="365760"/>
-          </a:xfrm>
-          <a:prstGeom prst="rect">
-            <a:avLst/>
-          </a:prstGeom>
-          <a:noFill/>
-          <a:ln/>
-        </p:spPr>
-        <p:txBody>
-          <a:bodyPr wrap="square" rtlCol="0" anchor="ctr"/>
-          <a:lstStyle/>
-          <a:p>
-            <a:pPr indent="0" marL="0">
-              <a:buNone/>
-            </a:pPr>
-            <a:r>
-              <a:rPr lang="en-US" sz="1200" b="1" dirty="0">
-                <a:solidFill>
-                  <a:srgbClr val="FFFFFF"/>
-                </a:solidFill>
-              </a:rPr>
-              <a:t>Jesse Anak  ·  ICBB</a:t>
-            </a:r>
-            <a:endParaRPr lang="en-US" sz="1200" dirty="0"/>
+              <a:t>Jesse Anak   ·   ICBB</a:t>
+            </a:r>
+            <a:endParaRPr lang="en-US" sz="1050" dirty="0"/>
           </a:p>
         </p:txBody>
       </p:sp>
@@ -2905,8 +2926,8 @@
         </p:nvSpPr>
         <p:spPr>
           <a:xfrm>
-            <a:off x="502920" y="292608"/>
-            <a:ext cx="8046720" cy="228600"/>
+            <a:off x="566928" y="384048"/>
+            <a:ext cx="7772400" cy="237744"/>
           </a:xfrm>
           <a:prstGeom prst="rect">
             <a:avLst/>
@@ -2922,14 +2943,17 @@
               <a:buNone/>
             </a:pPr>
             <a:r>
-              <a:rPr lang="en-US" sz="1100" b="1" spc="150" kern="0" dirty="0">
-                <a:solidFill>
-                  <a:srgbClr val="0066CC"/>
-                </a:solidFill>
+              <a:rPr lang="en-US" sz="1000" spc="200" kern="0" dirty="0">
+                <a:solidFill>
+                  <a:srgbClr val="9A6A3C"/>
+                </a:solidFill>
+                <a:latin typeface="Corbel" pitchFamily="34" charset="0"/>
+                <a:ea typeface="Corbel" pitchFamily="34" charset="-122"/>
+                <a:cs typeface="Corbel" pitchFamily="34" charset="-120"/>
               </a:rPr>
               <a:t>UNIT 2</a:t>
             </a:r>
-            <a:endParaRPr lang="en-US" sz="1100" dirty="0"/>
+            <a:endParaRPr lang="en-US" sz="1000" dirty="0"/>
           </a:p>
         </p:txBody>
       </p:sp>
@@ -2941,8 +2965,8 @@
         </p:nvSpPr>
         <p:spPr>
           <a:xfrm>
-            <a:off x="502920" y="548640"/>
-            <a:ext cx="8046720" cy="640080"/>
+            <a:off x="566928" y="658368"/>
+            <a:ext cx="7772400" cy="658368"/>
           </a:xfrm>
           <a:prstGeom prst="rect">
             <a:avLst/>
@@ -2955,30 +2979,56 @@
           <a:lstStyle/>
           <a:p>
             <a:pPr indent="0" marL="0">
+              <a:lnSpc>
+                <a:spcPct val="100000"/>
+              </a:lnSpc>
               <a:buNone/>
             </a:pPr>
             <a:r>
-              <a:rPr lang="en-US" sz="2400" b="1" dirty="0">
-                <a:solidFill>
-                  <a:srgbClr val="111827"/>
-                </a:solidFill>
+              <a:rPr lang="en-US" sz="2500" dirty="0">
+                <a:solidFill>
+                  <a:srgbClr val="1C3140"/>
+                </a:solidFill>
+                <a:latin typeface="Constantia" pitchFamily="34" charset="0"/>
+                <a:ea typeface="Constantia" pitchFamily="34" charset="-122"/>
+                <a:cs typeface="Constantia" pitchFamily="34" charset="-120"/>
               </a:rPr>
               <a:t>Aims, objectives and hypotheses (1/2)</a:t>
             </a:r>
-            <a:endParaRPr lang="en-US" sz="2400" dirty="0"/>
-          </a:p>
-        </p:txBody>
-      </p:sp>
-      <p:sp>
-        <p:nvSpPr>
-          <p:cNvPr id="4" name="Text 2"/>
+            <a:endParaRPr lang="en-US" sz="2500" dirty="0"/>
+          </a:p>
+        </p:txBody>
+      </p:sp>
+      <p:sp>
+        <p:nvSpPr>
+          <p:cNvPr id="4" name="Shape 2"/>
           <p:cNvSpPr/>
           <p:nvPr/>
         </p:nvSpPr>
         <p:spPr>
           <a:xfrm>
-            <a:off x="685800" y="1325880"/>
-            <a:ext cx="7772400" cy="3200400"/>
+            <a:off x="566928" y="1335024"/>
+            <a:ext cx="566928" cy="20117"/>
+          </a:xfrm>
+          <a:prstGeom prst="rect">
+            <a:avLst/>
+          </a:prstGeom>
+          <a:solidFill>
+            <a:srgbClr val="9A6A3C"/>
+          </a:solidFill>
+          <a:ln/>
+        </p:spPr>
+      </p:sp>
+      <p:sp>
+        <p:nvSpPr>
+          <p:cNvPr id="5" name="Text 3"/>
+          <p:cNvSpPr/>
+          <p:nvPr/>
+        </p:nvSpPr>
+        <p:spPr>
+          <a:xfrm>
+            <a:off x="713232" y="1664208"/>
+            <a:ext cx="7498080" cy="2788920"/>
           </a:xfrm>
           <a:prstGeom prst="rect">
             <a:avLst/>
@@ -2992,19 +3042,22 @@
           <a:p>
             <a:pPr marL="342900" indent="-342900">
               <a:lnSpc>
-                <a:spcPct val="125000"/>
+                <a:spcPct val="130000"/>
               </a:lnSpc>
               <a:spcAft>
-                <a:spcPts val="800"/>
+                <a:spcPts val="1100"/>
               </a:spcAft>
               <a:buSzPct val="100000"/>
-              <a:buChar char="•"/>
+              <a:buChar char="–"/>
             </a:pPr>
             <a:r>
               <a:rPr lang="en-US" sz="1500" dirty="0">
                 <a:solidFill>
-                  <a:srgbClr val="374151"/>
-                </a:solidFill>
+                  <a:srgbClr val="23282E"/>
+                </a:solidFill>
+                <a:latin typeface="Corbel" pitchFamily="34" charset="0"/>
+                <a:ea typeface="Corbel" pitchFamily="34" charset="-122"/>
+                <a:cs typeface="Corbel" pitchFamily="34" charset="-120"/>
               </a:rPr>
               <a:t>The aim is one sentence stating the overall purpose — usually beginning "To determine…", "To explore…", "To evaluate…"</a:t>
             </a:r>
@@ -3013,19 +3066,22 @@
           <a:p>
             <a:pPr marL="342900" indent="-342900">
               <a:lnSpc>
-                <a:spcPct val="125000"/>
+                <a:spcPct val="130000"/>
               </a:lnSpc>
               <a:spcAft>
-                <a:spcPts val="800"/>
+                <a:spcPts val="1100"/>
               </a:spcAft>
               <a:buSzPct val="100000"/>
-              <a:buChar char="•"/>
+              <a:buChar char="–"/>
             </a:pPr>
             <a:r>
               <a:rPr lang="en-US" sz="1500" dirty="0">
                 <a:solidFill>
-                  <a:srgbClr val="374151"/>
-                </a:solidFill>
+                  <a:srgbClr val="23282E"/>
+                </a:solidFill>
+                <a:latin typeface="Corbel" pitchFamily="34" charset="0"/>
+                <a:ea typeface="Corbel" pitchFamily="34" charset="-122"/>
+                <a:cs typeface="Corbel" pitchFamily="34" charset="-120"/>
               </a:rPr>
               <a:t>Objectives break the aim into specific, ordered, measurable steps, each starting with an action verb</a:t>
             </a:r>
@@ -3034,19 +3090,22 @@
           <a:p>
             <a:pPr marL="342900" indent="-342900">
               <a:lnSpc>
-                <a:spcPct val="125000"/>
+                <a:spcPct val="130000"/>
               </a:lnSpc>
               <a:spcAft>
-                <a:spcPts val="800"/>
+                <a:spcPts val="1100"/>
               </a:spcAft>
               <a:buSzPct val="100000"/>
-              <a:buChar char="•"/>
+              <a:buChar char="–"/>
             </a:pPr>
             <a:r>
               <a:rPr lang="en-US" sz="1500" dirty="0">
                 <a:solidFill>
-                  <a:srgbClr val="374151"/>
-                </a:solidFill>
+                  <a:srgbClr val="23282E"/>
+                </a:solidFill>
+                <a:latin typeface="Corbel" pitchFamily="34" charset="0"/>
+                <a:ea typeface="Corbel" pitchFamily="34" charset="-122"/>
+                <a:cs typeface="Corbel" pitchFamily="34" charset="-120"/>
               </a:rPr>
               <a:t>Three to five objectives is usual; more than six normally signals an unfocused study</a:t>
             </a:r>
@@ -3055,19 +3114,22 @@
           <a:p>
             <a:pPr marL="342900" indent="-342900">
               <a:lnSpc>
-                <a:spcPct val="125000"/>
+                <a:spcPct val="130000"/>
               </a:lnSpc>
               <a:spcAft>
-                <a:spcPts val="800"/>
+                <a:spcPts val="1100"/>
               </a:spcAft>
               <a:buSzPct val="100000"/>
-              <a:buChar char="•"/>
+              <a:buChar char="–"/>
             </a:pPr>
             <a:r>
               <a:rPr lang="en-US" sz="1500" dirty="0">
                 <a:solidFill>
-                  <a:srgbClr val="374151"/>
-                </a:solidFill>
+                  <a:srgbClr val="23282E"/>
+                </a:solidFill>
+                <a:latin typeface="Corbel" pitchFamily="34" charset="0"/>
+                <a:ea typeface="Corbel" pitchFamily="34" charset="-122"/>
+                <a:cs typeface="Corbel" pitchFamily="34" charset="-120"/>
               </a:rPr>
               <a:t>A hypothesis is a testable statement of an expected relationship, stated for quantitative work only</a:t>
             </a:r>
@@ -3087,8 +3149,8 @@
         </p:nvSpPr>
         <p:spPr>
           <a:xfrm>
-            <a:off x="8503920" y="4709160"/>
-            <a:ext cx="800000" cy="300000"/>
+            <a:off x="566928" y="4700016"/>
+            <a:ext cx="914400" cy="274320"/>
           </a:xfrm>
           <a:prstGeom prst="rect">
             <a:avLst/>
@@ -3103,10 +3165,13 @@
           <a:bodyPr/>
           <a:lstStyle>
             <a:lvl1pPr>
-              <a:defRPr sz="1000">
-                <a:solidFill>
-                  <a:srgbClr val="6B7280"/>
-                </a:solidFill>
+              <a:defRPr sz="900">
+                <a:solidFill>
+                  <a:srgbClr val="5F6B76"/>
+                </a:solidFill>
+                <a:latin typeface="Corbel"/>
+                <a:ea typeface="Corbel"/>
+                <a:cs typeface="Corbel"/>
               </a:defRPr>
             </a:lvl1pPr>
           </a:lstStyle>
@@ -3153,8 +3218,8 @@
         </p:nvSpPr>
         <p:spPr>
           <a:xfrm>
-            <a:off x="502920" y="292608"/>
-            <a:ext cx="8046720" cy="228600"/>
+            <a:off x="566928" y="384048"/>
+            <a:ext cx="7772400" cy="237744"/>
           </a:xfrm>
           <a:prstGeom prst="rect">
             <a:avLst/>
@@ -3170,14 +3235,17 @@
               <a:buNone/>
             </a:pPr>
             <a:r>
-              <a:rPr lang="en-US" sz="1100" b="1" spc="150" kern="0" dirty="0">
-                <a:solidFill>
-                  <a:srgbClr val="0066CC"/>
-                </a:solidFill>
+              <a:rPr lang="en-US" sz="1000" spc="200" kern="0" dirty="0">
+                <a:solidFill>
+                  <a:srgbClr val="9A6A3C"/>
+                </a:solidFill>
+                <a:latin typeface="Corbel" pitchFamily="34" charset="0"/>
+                <a:ea typeface="Corbel" pitchFamily="34" charset="-122"/>
+                <a:cs typeface="Corbel" pitchFamily="34" charset="-120"/>
               </a:rPr>
               <a:t>UNIT 2</a:t>
             </a:r>
-            <a:endParaRPr lang="en-US" sz="1100" dirty="0"/>
+            <a:endParaRPr lang="en-US" sz="1000" dirty="0"/>
           </a:p>
         </p:txBody>
       </p:sp>
@@ -3189,8 +3257,8 @@
         </p:nvSpPr>
         <p:spPr>
           <a:xfrm>
-            <a:off x="502920" y="548640"/>
-            <a:ext cx="8046720" cy="640080"/>
+            <a:off x="566928" y="658368"/>
+            <a:ext cx="7772400" cy="658368"/>
           </a:xfrm>
           <a:prstGeom prst="rect">
             <a:avLst/>
@@ -3203,30 +3271,56 @@
           <a:lstStyle/>
           <a:p>
             <a:pPr indent="0" marL="0">
+              <a:lnSpc>
+                <a:spcPct val="100000"/>
+              </a:lnSpc>
               <a:buNone/>
             </a:pPr>
             <a:r>
-              <a:rPr lang="en-US" sz="2400" b="1" dirty="0">
-                <a:solidFill>
-                  <a:srgbClr val="111827"/>
-                </a:solidFill>
+              <a:rPr lang="en-US" sz="2500" dirty="0">
+                <a:solidFill>
+                  <a:srgbClr val="1C3140"/>
+                </a:solidFill>
+                <a:latin typeface="Constantia" pitchFamily="34" charset="0"/>
+                <a:ea typeface="Constantia" pitchFamily="34" charset="-122"/>
+                <a:cs typeface="Constantia" pitchFamily="34" charset="-120"/>
               </a:rPr>
               <a:t>Aims, objectives and hypotheses (2/2)</a:t>
             </a:r>
-            <a:endParaRPr lang="en-US" sz="2400" dirty="0"/>
-          </a:p>
-        </p:txBody>
-      </p:sp>
-      <p:sp>
-        <p:nvSpPr>
-          <p:cNvPr id="4" name="Text 2"/>
+            <a:endParaRPr lang="en-US" sz="2500" dirty="0"/>
+          </a:p>
+        </p:txBody>
+      </p:sp>
+      <p:sp>
+        <p:nvSpPr>
+          <p:cNvPr id="4" name="Shape 2"/>
           <p:cNvSpPr/>
           <p:nvPr/>
         </p:nvSpPr>
         <p:spPr>
           <a:xfrm>
-            <a:off x="685800" y="1325880"/>
-            <a:ext cx="7772400" cy="3200400"/>
+            <a:off x="566928" y="1335024"/>
+            <a:ext cx="566928" cy="20117"/>
+          </a:xfrm>
+          <a:prstGeom prst="rect">
+            <a:avLst/>
+          </a:prstGeom>
+          <a:solidFill>
+            <a:srgbClr val="9A6A3C"/>
+          </a:solidFill>
+          <a:ln/>
+        </p:spPr>
+      </p:sp>
+      <p:sp>
+        <p:nvSpPr>
+          <p:cNvPr id="5" name="Text 3"/>
+          <p:cNvSpPr/>
+          <p:nvPr/>
+        </p:nvSpPr>
+        <p:spPr>
+          <a:xfrm>
+            <a:off x="713232" y="1664208"/>
+            <a:ext cx="7498080" cy="2788920"/>
           </a:xfrm>
           <a:prstGeom prst="rect">
             <a:avLst/>
@@ -3240,19 +3334,22 @@
           <a:p>
             <a:pPr marL="342900" indent="-342900">
               <a:lnSpc>
-                <a:spcPct val="125000"/>
+                <a:spcPct val="130000"/>
               </a:lnSpc>
               <a:spcAft>
-                <a:spcPts val="800"/>
+                <a:spcPts val="1100"/>
               </a:spcAft>
               <a:buSzPct val="100000"/>
-              <a:buChar char="•"/>
+              <a:buChar char="–"/>
             </a:pPr>
             <a:r>
               <a:rPr lang="en-US" sz="1500" dirty="0">
                 <a:solidFill>
-                  <a:srgbClr val="374151"/>
-                </a:solidFill>
+                  <a:srgbClr val="23282E"/>
+                </a:solidFill>
+                <a:latin typeface="Corbel" pitchFamily="34" charset="0"/>
+                <a:ea typeface="Corbel" pitchFamily="34" charset="-122"/>
+                <a:cs typeface="Corbel" pitchFamily="34" charset="-120"/>
               </a:rPr>
               <a:t>The null hypothesis states no difference or no association; the alternative states the expected effect</a:t>
             </a:r>
@@ -3261,19 +3358,22 @@
           <a:p>
             <a:pPr marL="342900" indent="-342900">
               <a:lnSpc>
-                <a:spcPct val="125000"/>
+                <a:spcPct val="130000"/>
               </a:lnSpc>
               <a:spcAft>
-                <a:spcPts val="800"/>
+                <a:spcPts val="1100"/>
               </a:spcAft>
               <a:buSzPct val="100000"/>
-              <a:buChar char="•"/>
+              <a:buChar char="–"/>
             </a:pPr>
             <a:r>
               <a:rPr lang="en-US" sz="1500" dirty="0">
                 <a:solidFill>
-                  <a:srgbClr val="374151"/>
-                </a:solidFill>
+                  <a:srgbClr val="23282E"/>
+                </a:solidFill>
+                <a:latin typeface="Corbel" pitchFamily="34" charset="0"/>
+                <a:ea typeface="Corbel" pitchFamily="34" charset="-122"/>
+                <a:cs typeface="Corbel" pitchFamily="34" charset="-120"/>
               </a:rPr>
               <a:t>Qualitative studies state research questions rather than hypotheses, because they do not set out to test a prediction</a:t>
             </a:r>
@@ -3293,8 +3393,8 @@
         </p:nvSpPr>
         <p:spPr>
           <a:xfrm>
-            <a:off x="8503920" y="4709160"/>
-            <a:ext cx="800000" cy="300000"/>
+            <a:off x="566928" y="4700016"/>
+            <a:ext cx="914400" cy="274320"/>
           </a:xfrm>
           <a:prstGeom prst="rect">
             <a:avLst/>
@@ -3309,10 +3409,13 @@
           <a:bodyPr/>
           <a:lstStyle>
             <a:lvl1pPr>
-              <a:defRPr sz="1000">
-                <a:solidFill>
-                  <a:srgbClr val="6B7280"/>
-                </a:solidFill>
+              <a:defRPr sz="900">
+                <a:solidFill>
+                  <a:srgbClr val="5F6B76"/>
+                </a:solidFill>
+                <a:latin typeface="Corbel"/>
+                <a:ea typeface="Corbel"/>
+                <a:cs typeface="Corbel"/>
               </a:defRPr>
             </a:lvl1pPr>
           </a:lstStyle>
@@ -3359,8 +3462,8 @@
         </p:nvSpPr>
         <p:spPr>
           <a:xfrm>
-            <a:off x="502920" y="292608"/>
-            <a:ext cx="8046720" cy="228600"/>
+            <a:off x="566928" y="384048"/>
+            <a:ext cx="7772400" cy="237744"/>
           </a:xfrm>
           <a:prstGeom prst="rect">
             <a:avLst/>
@@ -3376,14 +3479,17 @@
               <a:buNone/>
             </a:pPr>
             <a:r>
-              <a:rPr lang="en-US" sz="1100" b="1" spc="150" kern="0" dirty="0">
-                <a:solidFill>
-                  <a:srgbClr val="00A86B"/>
-                </a:solidFill>
+              <a:rPr lang="en-US" sz="1000" spc="200" kern="0" dirty="0">
+                <a:solidFill>
+                  <a:srgbClr val="9A6A3C"/>
+                </a:solidFill>
+                <a:latin typeface="Corbel" pitchFamily="34" charset="0"/>
+                <a:ea typeface="Corbel" pitchFamily="34" charset="-122"/>
+                <a:cs typeface="Corbel" pitchFamily="34" charset="-120"/>
               </a:rPr>
               <a:t>UNIT 2</a:t>
             </a:r>
-            <a:endParaRPr lang="en-US" sz="1100" dirty="0"/>
+            <a:endParaRPr lang="en-US" sz="1000" dirty="0"/>
           </a:p>
         </p:txBody>
       </p:sp>
@@ -3395,8 +3501,8 @@
         </p:nvSpPr>
         <p:spPr>
           <a:xfrm>
-            <a:off x="502920" y="548640"/>
-            <a:ext cx="8046720" cy="548640"/>
+            <a:off x="566928" y="658368"/>
+            <a:ext cx="7772400" cy="658368"/>
           </a:xfrm>
           <a:prstGeom prst="rect">
             <a:avLst/>
@@ -3405,21 +3511,27 @@
           <a:ln/>
         </p:spPr>
         <p:txBody>
-          <a:bodyPr wrap="square" rtlCol="0" anchor="ctr"/>
+          <a:bodyPr wrap="square" rtlCol="0" anchor="t"/>
           <a:lstStyle/>
           <a:p>
             <a:pPr indent="0" marL="0">
+              <a:lnSpc>
+                <a:spcPct val="100000"/>
+              </a:lnSpc>
               <a:buNone/>
             </a:pPr>
             <a:r>
-              <a:rPr lang="en-US" sz="2400" b="1" dirty="0">
-                <a:solidFill>
-                  <a:srgbClr val="111827"/>
-                </a:solidFill>
+              <a:rPr lang="en-US" sz="2500" dirty="0">
+                <a:solidFill>
+                  <a:srgbClr val="1C3140"/>
+                </a:solidFill>
+                <a:latin typeface="Constantia" pitchFamily="34" charset="0"/>
+                <a:ea typeface="Constantia" pitchFamily="34" charset="-122"/>
+                <a:cs typeface="Constantia" pitchFamily="34" charset="-120"/>
               </a:rPr>
               <a:t>In practice</a:t>
             </a:r>
-            <a:endParaRPr lang="en-US" sz="2400" dirty="0"/>
+            <a:endParaRPr lang="en-US" sz="2500" dirty="0"/>
           </a:p>
         </p:txBody>
       </p:sp>
@@ -3431,28 +3543,48 @@
         </p:nvSpPr>
         <p:spPr>
           <a:xfrm>
-            <a:off x="502920" y="1280160"/>
-            <a:ext cx="54864" cy="2377440"/>
+            <a:off x="566928" y="1335024"/>
+            <a:ext cx="566928" cy="20117"/>
           </a:xfrm>
           <a:prstGeom prst="rect">
             <a:avLst/>
           </a:prstGeom>
           <a:solidFill>
-            <a:srgbClr val="00A86B"/>
+            <a:srgbClr val="9A6A3C"/>
           </a:solidFill>
           <a:ln/>
         </p:spPr>
       </p:sp>
       <p:sp>
         <p:nvSpPr>
-          <p:cNvPr id="5" name="Text 3"/>
+          <p:cNvPr id="5" name="Shape 3"/>
           <p:cNvSpPr/>
           <p:nvPr/>
         </p:nvSpPr>
         <p:spPr>
           <a:xfrm>
-            <a:off x="777240" y="1280160"/>
-            <a:ext cx="7589520" cy="2377440"/>
+            <a:off x="566928" y="1664208"/>
+            <a:ext cx="8010144" cy="2395728"/>
+          </a:xfrm>
+          <a:prstGeom prst="rect">
+            <a:avLst/>
+          </a:prstGeom>
+          <a:solidFill>
+            <a:srgbClr val="F6F4F0"/>
+          </a:solidFill>
+          <a:ln/>
+        </p:spPr>
+      </p:sp>
+      <p:sp>
+        <p:nvSpPr>
+          <p:cNvPr id="6" name="Text 4"/>
+          <p:cNvSpPr/>
+          <p:nvPr/>
+        </p:nvSpPr>
+        <p:spPr>
+          <a:xfrm>
+            <a:off x="932688" y="1847088"/>
+            <a:ext cx="7278624" cy="2029968"/>
           </a:xfrm>
           <a:prstGeom prst="rect">
             <a:avLst/>
@@ -3466,15 +3598,18 @@
           <a:p>
             <a:pPr indent="0" marL="0">
               <a:lnSpc>
-                <a:spcPct val="130000"/>
+                <a:spcPct val="132000"/>
               </a:lnSpc>
               <a:buNone/>
             </a:pPr>
             <a:r>
-              <a:rPr lang="en-US" sz="1600" dirty="0">
-                <a:solidFill>
-                  <a:srgbClr val="374151"/>
-                </a:solidFill>
+              <a:rPr lang="en-US" sz="1600" i="1" dirty="0">
+                <a:solidFill>
+                  <a:srgbClr val="1C3140"/>
+                </a:solidFill>
+                <a:latin typeface="Constantia" pitchFamily="34" charset="0"/>
+                <a:ea typeface="Constantia" pitchFamily="34" charset="-122"/>
+                <a:cs typeface="Constantia" pitchFamily="34" charset="-120"/>
               </a:rPr>
               <a:t>Objectives must map one-to-one onto your analysis plan and, later, onto your results section. If an objective produces no result, or a result answers no objective, something has gone wrong.</a:t>
             </a:r>
@@ -3494,8 +3629,8 @@
         </p:nvSpPr>
         <p:spPr>
           <a:xfrm>
-            <a:off x="8503920" y="4709160"/>
-            <a:ext cx="800000" cy="300000"/>
+            <a:off x="566928" y="4700016"/>
+            <a:ext cx="914400" cy="274320"/>
           </a:xfrm>
           <a:prstGeom prst="rect">
             <a:avLst/>
@@ -3510,10 +3645,13 @@
           <a:bodyPr/>
           <a:lstStyle>
             <a:lvl1pPr>
-              <a:defRPr sz="1000">
-                <a:solidFill>
-                  <a:srgbClr val="6B7280"/>
-                </a:solidFill>
+              <a:defRPr sz="900">
+                <a:solidFill>
+                  <a:srgbClr val="5F6B76"/>
+                </a:solidFill>
+                <a:latin typeface="Corbel"/>
+                <a:ea typeface="Corbel"/>
+                <a:cs typeface="Corbel"/>
               </a:defRPr>
             </a:lvl1pPr>
           </a:lstStyle>
@@ -3560,8 +3698,8 @@
         </p:nvSpPr>
         <p:spPr>
           <a:xfrm>
-            <a:off x="502920" y="292608"/>
-            <a:ext cx="8046720" cy="228600"/>
+            <a:off x="566928" y="384048"/>
+            <a:ext cx="7772400" cy="237744"/>
           </a:xfrm>
           <a:prstGeom prst="rect">
             <a:avLst/>
@@ -3577,14 +3715,17 @@
               <a:buNone/>
             </a:pPr>
             <a:r>
-              <a:rPr lang="en-US" sz="1100" b="1" spc="150" kern="0" dirty="0">
-                <a:solidFill>
-                  <a:srgbClr val="0066CC"/>
-                </a:solidFill>
+              <a:rPr lang="en-US" sz="1000" spc="200" kern="0" dirty="0">
+                <a:solidFill>
+                  <a:srgbClr val="9A6A3C"/>
+                </a:solidFill>
+                <a:latin typeface="Corbel" pitchFamily="34" charset="0"/>
+                <a:ea typeface="Corbel" pitchFamily="34" charset="-122"/>
+                <a:cs typeface="Corbel" pitchFamily="34" charset="-120"/>
               </a:rPr>
               <a:t>UNIT 2</a:t>
             </a:r>
-            <a:endParaRPr lang="en-US" sz="1100" dirty="0"/>
+            <a:endParaRPr lang="en-US" sz="1000" dirty="0"/>
           </a:p>
         </p:txBody>
       </p:sp>
@@ -3596,8 +3737,8 @@
         </p:nvSpPr>
         <p:spPr>
           <a:xfrm>
-            <a:off x="502920" y="548640"/>
-            <a:ext cx="8046720" cy="640080"/>
+            <a:off x="566928" y="658368"/>
+            <a:ext cx="7772400" cy="658368"/>
           </a:xfrm>
           <a:prstGeom prst="rect">
             <a:avLst/>
@@ -3610,30 +3751,56 @@
           <a:lstStyle/>
           <a:p>
             <a:pPr indent="0" marL="0">
+              <a:lnSpc>
+                <a:spcPct val="100000"/>
+              </a:lnSpc>
               <a:buNone/>
             </a:pPr>
             <a:r>
-              <a:rPr lang="en-US" sz="2400" b="1" dirty="0">
-                <a:solidFill>
-                  <a:srgbClr val="111827"/>
-                </a:solidFill>
+              <a:rPr lang="en-US" sz="2500" dirty="0">
+                <a:solidFill>
+                  <a:srgbClr val="1C3140"/>
+                </a:solidFill>
+                <a:latin typeface="Constantia" pitchFamily="34" charset="0"/>
+                <a:ea typeface="Constantia" pitchFamily="34" charset="-122"/>
+                <a:cs typeface="Constantia" pitchFamily="34" charset="-120"/>
               </a:rPr>
               <a:t>Conceptual and theoretical frameworks (1/2)</a:t>
             </a:r>
-            <a:endParaRPr lang="en-US" sz="2400" dirty="0"/>
-          </a:p>
-        </p:txBody>
-      </p:sp>
-      <p:sp>
-        <p:nvSpPr>
-          <p:cNvPr id="4" name="Text 2"/>
+            <a:endParaRPr lang="en-US" sz="2500" dirty="0"/>
+          </a:p>
+        </p:txBody>
+      </p:sp>
+      <p:sp>
+        <p:nvSpPr>
+          <p:cNvPr id="4" name="Shape 2"/>
           <p:cNvSpPr/>
           <p:nvPr/>
         </p:nvSpPr>
         <p:spPr>
           <a:xfrm>
-            <a:off x="685800" y="1325880"/>
-            <a:ext cx="7772400" cy="3200400"/>
+            <a:off x="566928" y="1335024"/>
+            <a:ext cx="566928" cy="20117"/>
+          </a:xfrm>
+          <a:prstGeom prst="rect">
+            <a:avLst/>
+          </a:prstGeom>
+          <a:solidFill>
+            <a:srgbClr val="9A6A3C"/>
+          </a:solidFill>
+          <a:ln/>
+        </p:spPr>
+      </p:sp>
+      <p:sp>
+        <p:nvSpPr>
+          <p:cNvPr id="5" name="Text 3"/>
+          <p:cNvSpPr/>
+          <p:nvPr/>
+        </p:nvSpPr>
+        <p:spPr>
+          <a:xfrm>
+            <a:off x="713232" y="1664208"/>
+            <a:ext cx="7498080" cy="2788920"/>
           </a:xfrm>
           <a:prstGeom prst="rect">
             <a:avLst/>
@@ -3647,86 +3814,98 @@
           <a:p>
             <a:pPr marL="342900" indent="-342900">
               <a:lnSpc>
-                <a:spcPct val="125000"/>
+                <a:spcPct val="130000"/>
               </a:lnSpc>
               <a:spcAft>
-                <a:spcPts val="800"/>
+                <a:spcPts val="1100"/>
               </a:spcAft>
               <a:buSzPct val="100000"/>
-              <a:buChar char="•"/>
+              <a:buChar char="–"/>
             </a:pPr>
             <a:r>
-              <a:rPr lang="en-US" sz="1300" dirty="0">
-                <a:solidFill>
-                  <a:srgbClr val="374151"/>
-                </a:solidFill>
+              <a:rPr lang="en-US" sz="1350" dirty="0">
+                <a:solidFill>
+                  <a:srgbClr val="23282E"/>
+                </a:solidFill>
+                <a:latin typeface="Corbel" pitchFamily="34" charset="0"/>
+                <a:ea typeface="Corbel" pitchFamily="34" charset="-122"/>
+                <a:cs typeface="Corbel" pitchFamily="34" charset="-120"/>
               </a:rPr>
               <a:t>A theoretical framework borrows an existing theory (Health Belief Model, Theory of Planned Behaviour, Social Cognitive Theory) to explain your phenomenon</a:t>
             </a:r>
-            <a:endParaRPr lang="en-US" sz="1300" dirty="0"/>
+            <a:endParaRPr lang="en-US" sz="1350" dirty="0"/>
           </a:p>
           <a:p>
             <a:pPr marL="342900" indent="-342900">
               <a:lnSpc>
-                <a:spcPct val="125000"/>
+                <a:spcPct val="130000"/>
               </a:lnSpc>
               <a:spcAft>
-                <a:spcPts val="800"/>
+                <a:spcPts val="1100"/>
               </a:spcAft>
               <a:buSzPct val="100000"/>
-              <a:buChar char="•"/>
+              <a:buChar char="–"/>
             </a:pPr>
             <a:r>
-              <a:rPr lang="en-US" sz="1300" dirty="0">
-                <a:solidFill>
-                  <a:srgbClr val="374151"/>
-                </a:solidFill>
+              <a:rPr lang="en-US" sz="1350" dirty="0">
+                <a:solidFill>
+                  <a:srgbClr val="23282E"/>
+                </a:solidFill>
+                <a:latin typeface="Corbel" pitchFamily="34" charset="0"/>
+                <a:ea typeface="Corbel" pitchFamily="34" charset="-122"/>
+                <a:cs typeface="Corbel" pitchFamily="34" charset="-120"/>
               </a:rPr>
               <a:t>A conceptual framework is your own diagram of how the variables in your study relate</a:t>
             </a:r>
-            <a:endParaRPr lang="en-US" sz="1300" dirty="0"/>
+            <a:endParaRPr lang="en-US" sz="1350" dirty="0"/>
           </a:p>
           <a:p>
             <a:pPr marL="342900" indent="-342900">
               <a:lnSpc>
-                <a:spcPct val="125000"/>
+                <a:spcPct val="130000"/>
               </a:lnSpc>
               <a:spcAft>
-                <a:spcPts val="800"/>
+                <a:spcPts val="1100"/>
               </a:spcAft>
               <a:buSzPct val="100000"/>
-              <a:buChar char="•"/>
+              <a:buChar char="–"/>
             </a:pPr>
             <a:r>
-              <a:rPr lang="en-US" sz="1300" dirty="0">
-                <a:solidFill>
-                  <a:srgbClr val="374151"/>
-                </a:solidFill>
+              <a:rPr lang="en-US" sz="1350" dirty="0">
+                <a:solidFill>
+                  <a:srgbClr val="23282E"/>
+                </a:solidFill>
+                <a:latin typeface="Corbel" pitchFamily="34" charset="0"/>
+                <a:ea typeface="Corbel" pitchFamily="34" charset="-122"/>
+                <a:cs typeface="Corbel" pitchFamily="34" charset="-120"/>
               </a:rPr>
               <a:t>It should distinguish independent, dependent, mediating, moderating and confounding variables</a:t>
             </a:r>
-            <a:endParaRPr lang="en-US" sz="1300" dirty="0"/>
+            <a:endParaRPr lang="en-US" sz="1350" dirty="0"/>
           </a:p>
           <a:p>
             <a:pPr marL="342900" indent="-342900">
               <a:lnSpc>
-                <a:spcPct val="125000"/>
+                <a:spcPct val="130000"/>
               </a:lnSpc>
               <a:spcAft>
-                <a:spcPts val="800"/>
+                <a:spcPts val="1100"/>
               </a:spcAft>
               <a:buSzPct val="100000"/>
-              <a:buChar char="•"/>
+              <a:buChar char="–"/>
             </a:pPr>
             <a:r>
-              <a:rPr lang="en-US" sz="1300" dirty="0">
-                <a:solidFill>
-                  <a:srgbClr val="374151"/>
-                </a:solidFill>
+              <a:rPr lang="en-US" sz="1350" dirty="0">
+                <a:solidFill>
+                  <a:srgbClr val="23282E"/>
+                </a:solidFill>
+                <a:latin typeface="Corbel" pitchFamily="34" charset="0"/>
+                <a:ea typeface="Corbel" pitchFamily="34" charset="-122"/>
+                <a:cs typeface="Corbel" pitchFamily="34" charset="-120"/>
               </a:rPr>
               <a:t>Drawing it early exposes variables you would otherwise forget to measure</a:t>
             </a:r>
-            <a:endParaRPr lang="en-US" sz="1300" dirty="0"/>
+            <a:endParaRPr lang="en-US" sz="1350" dirty="0"/>
           </a:p>
         </p:txBody>
       </p:sp>
@@ -3742,8 +3921,8 @@
         </p:nvSpPr>
         <p:spPr>
           <a:xfrm>
-            <a:off x="8503920" y="4709160"/>
-            <a:ext cx="800000" cy="300000"/>
+            <a:off x="566928" y="4700016"/>
+            <a:ext cx="914400" cy="274320"/>
           </a:xfrm>
           <a:prstGeom prst="rect">
             <a:avLst/>
@@ -3758,10 +3937,13 @@
           <a:bodyPr/>
           <a:lstStyle>
             <a:lvl1pPr>
-              <a:defRPr sz="1000">
-                <a:solidFill>
-                  <a:srgbClr val="6B7280"/>
-                </a:solidFill>
+              <a:defRPr sz="900">
+                <a:solidFill>
+                  <a:srgbClr val="5F6B76"/>
+                </a:solidFill>
+                <a:latin typeface="Corbel"/>
+                <a:ea typeface="Corbel"/>
+                <a:cs typeface="Corbel"/>
               </a:defRPr>
             </a:lvl1pPr>
           </a:lstStyle>
@@ -3808,8 +3990,8 @@
         </p:nvSpPr>
         <p:spPr>
           <a:xfrm>
-            <a:off x="502920" y="292608"/>
-            <a:ext cx="8046720" cy="228600"/>
+            <a:off x="566928" y="384048"/>
+            <a:ext cx="7772400" cy="237744"/>
           </a:xfrm>
           <a:prstGeom prst="rect">
             <a:avLst/>
@@ -3825,14 +4007,17 @@
               <a:buNone/>
             </a:pPr>
             <a:r>
-              <a:rPr lang="en-US" sz="1100" b="1" spc="150" kern="0" dirty="0">
-                <a:solidFill>
-                  <a:srgbClr val="0066CC"/>
-                </a:solidFill>
+              <a:rPr lang="en-US" sz="1000" spc="200" kern="0" dirty="0">
+                <a:solidFill>
+                  <a:srgbClr val="9A6A3C"/>
+                </a:solidFill>
+                <a:latin typeface="Corbel" pitchFamily="34" charset="0"/>
+                <a:ea typeface="Corbel" pitchFamily="34" charset="-122"/>
+                <a:cs typeface="Corbel" pitchFamily="34" charset="-120"/>
               </a:rPr>
               <a:t>UNIT 2</a:t>
             </a:r>
-            <a:endParaRPr lang="en-US" sz="1100" dirty="0"/>
+            <a:endParaRPr lang="en-US" sz="1000" dirty="0"/>
           </a:p>
         </p:txBody>
       </p:sp>
@@ -3844,8 +4029,8 @@
         </p:nvSpPr>
         <p:spPr>
           <a:xfrm>
-            <a:off x="502920" y="548640"/>
-            <a:ext cx="8046720" cy="640080"/>
+            <a:off x="566928" y="658368"/>
+            <a:ext cx="7772400" cy="658368"/>
           </a:xfrm>
           <a:prstGeom prst="rect">
             <a:avLst/>
@@ -3858,30 +4043,56 @@
           <a:lstStyle/>
           <a:p>
             <a:pPr indent="0" marL="0">
+              <a:lnSpc>
+                <a:spcPct val="100000"/>
+              </a:lnSpc>
               <a:buNone/>
             </a:pPr>
             <a:r>
-              <a:rPr lang="en-US" sz="2400" b="1" dirty="0">
-                <a:solidFill>
-                  <a:srgbClr val="111827"/>
-                </a:solidFill>
+              <a:rPr lang="en-US" sz="2500" dirty="0">
+                <a:solidFill>
+                  <a:srgbClr val="1C3140"/>
+                </a:solidFill>
+                <a:latin typeface="Constantia" pitchFamily="34" charset="0"/>
+                <a:ea typeface="Constantia" pitchFamily="34" charset="-122"/>
+                <a:cs typeface="Constantia" pitchFamily="34" charset="-120"/>
               </a:rPr>
               <a:t>Conceptual and theoretical frameworks (2/2)</a:t>
             </a:r>
-            <a:endParaRPr lang="en-US" sz="2400" dirty="0"/>
-          </a:p>
-        </p:txBody>
-      </p:sp>
-      <p:sp>
-        <p:nvSpPr>
-          <p:cNvPr id="4" name="Text 2"/>
+            <a:endParaRPr lang="en-US" sz="2500" dirty="0"/>
+          </a:p>
+        </p:txBody>
+      </p:sp>
+      <p:sp>
+        <p:nvSpPr>
+          <p:cNvPr id="4" name="Shape 2"/>
           <p:cNvSpPr/>
           <p:nvPr/>
         </p:nvSpPr>
         <p:spPr>
           <a:xfrm>
-            <a:off x="685800" y="1325880"/>
-            <a:ext cx="7772400" cy="3200400"/>
+            <a:off x="566928" y="1335024"/>
+            <a:ext cx="566928" cy="20117"/>
+          </a:xfrm>
+          <a:prstGeom prst="rect">
+            <a:avLst/>
+          </a:prstGeom>
+          <a:solidFill>
+            <a:srgbClr val="9A6A3C"/>
+          </a:solidFill>
+          <a:ln/>
+        </p:spPr>
+      </p:sp>
+      <p:sp>
+        <p:nvSpPr>
+          <p:cNvPr id="5" name="Text 3"/>
+          <p:cNvSpPr/>
+          <p:nvPr/>
+        </p:nvSpPr>
+        <p:spPr>
+          <a:xfrm>
+            <a:off x="713232" y="1664208"/>
+            <a:ext cx="7498080" cy="2788920"/>
           </a:xfrm>
           <a:prstGeom prst="rect">
             <a:avLst/>
@@ -3895,23 +4106,26 @@
           <a:p>
             <a:pPr marL="342900" indent="-342900">
               <a:lnSpc>
-                <a:spcPct val="125000"/>
+                <a:spcPct val="130000"/>
               </a:lnSpc>
               <a:spcAft>
-                <a:spcPts val="800"/>
+                <a:spcPts val="1100"/>
               </a:spcAft>
               <a:buSzPct val="100000"/>
-              <a:buChar char="•"/>
+              <a:buChar char="–"/>
             </a:pPr>
             <a:r>
-              <a:rPr lang="en-US" sz="1700" dirty="0">
-                <a:solidFill>
-                  <a:srgbClr val="374151"/>
-                </a:solidFill>
+              <a:rPr lang="en-US" sz="1650" dirty="0">
+                <a:solidFill>
+                  <a:srgbClr val="23282E"/>
+                </a:solidFill>
+                <a:latin typeface="Corbel" pitchFamily="34" charset="0"/>
+                <a:ea typeface="Corbel" pitchFamily="34" charset="-122"/>
+                <a:cs typeface="Corbel" pitchFamily="34" charset="-120"/>
               </a:rPr>
               <a:t>The framework is also what tells you which variables must be adjusted for in analysis</a:t>
             </a:r>
-            <a:endParaRPr lang="en-US" sz="1700" dirty="0"/>
+            <a:endParaRPr lang="en-US" sz="1650" dirty="0"/>
           </a:p>
         </p:txBody>
       </p:sp>
@@ -3927,8 +4141,8 @@
         </p:nvSpPr>
         <p:spPr>
           <a:xfrm>
-            <a:off x="8503920" y="4709160"/>
-            <a:ext cx="800000" cy="300000"/>
+            <a:off x="566928" y="4700016"/>
+            <a:ext cx="914400" cy="274320"/>
           </a:xfrm>
           <a:prstGeom prst="rect">
             <a:avLst/>
@@ -3943,10 +4157,13 @@
           <a:bodyPr/>
           <a:lstStyle>
             <a:lvl1pPr>
-              <a:defRPr sz="1000">
-                <a:solidFill>
-                  <a:srgbClr val="6B7280"/>
-                </a:solidFill>
+              <a:defRPr sz="900">
+                <a:solidFill>
+                  <a:srgbClr val="5F6B76"/>
+                </a:solidFill>
+                <a:latin typeface="Corbel"/>
+                <a:ea typeface="Corbel"/>
+                <a:cs typeface="Corbel"/>
               </a:defRPr>
             </a:lvl1pPr>
           </a:lstStyle>
@@ -3993,8 +4210,8 @@
         </p:nvSpPr>
         <p:spPr>
           <a:xfrm>
-            <a:off x="502920" y="292608"/>
-            <a:ext cx="8046720" cy="228600"/>
+            <a:off x="566928" y="384048"/>
+            <a:ext cx="7772400" cy="237744"/>
           </a:xfrm>
           <a:prstGeom prst="rect">
             <a:avLst/>
@@ -4010,14 +4227,17 @@
               <a:buNone/>
             </a:pPr>
             <a:r>
-              <a:rPr lang="en-US" sz="1100" b="1" spc="150" kern="0" dirty="0">
-                <a:solidFill>
-                  <a:srgbClr val="00A86B"/>
-                </a:solidFill>
+              <a:rPr lang="en-US" sz="1000" spc="200" kern="0" dirty="0">
+                <a:solidFill>
+                  <a:srgbClr val="9A6A3C"/>
+                </a:solidFill>
+                <a:latin typeface="Corbel" pitchFamily="34" charset="0"/>
+                <a:ea typeface="Corbel" pitchFamily="34" charset="-122"/>
+                <a:cs typeface="Corbel" pitchFamily="34" charset="-120"/>
               </a:rPr>
               <a:t>UNIT 2  ·  WORKED EXAMPLE</a:t>
             </a:r>
-            <a:endParaRPr lang="en-US" sz="1100" dirty="0"/>
+            <a:endParaRPr lang="en-US" sz="1000" dirty="0"/>
           </a:p>
         </p:txBody>
       </p:sp>
@@ -4029,8 +4249,8 @@
         </p:nvSpPr>
         <p:spPr>
           <a:xfrm>
-            <a:off x="502920" y="548640"/>
-            <a:ext cx="8046720" cy="566928"/>
+            <a:off x="566928" y="658368"/>
+            <a:ext cx="7772400" cy="658368"/>
           </a:xfrm>
           <a:prstGeom prst="rect">
             <a:avLst/>
@@ -4043,17 +4263,23 @@
           <a:lstStyle/>
           <a:p>
             <a:pPr indent="0" marL="0">
+              <a:lnSpc>
+                <a:spcPct val="100000"/>
+              </a:lnSpc>
               <a:buNone/>
             </a:pPr>
             <a:r>
-              <a:rPr lang="en-US" sz="2300" b="1" dirty="0">
-                <a:solidFill>
-                  <a:srgbClr val="111827"/>
-                </a:solidFill>
+              <a:rPr lang="en-US" sz="2500" dirty="0">
+                <a:solidFill>
+                  <a:srgbClr val="1C3140"/>
+                </a:solidFill>
+                <a:latin typeface="Constantia" pitchFamily="34" charset="0"/>
+                <a:ea typeface="Constantia" pitchFamily="34" charset="-122"/>
+                <a:cs typeface="Constantia" pitchFamily="34" charset="-120"/>
               </a:rPr>
               <a:t>Narrowing a topic until it can actually be answered</a:t>
             </a:r>
-            <a:endParaRPr lang="en-US" sz="2300" dirty="0"/>
+            <a:endParaRPr lang="en-US" sz="2500" dirty="0"/>
           </a:p>
         </p:txBody>
       </p:sp>
@@ -4065,21 +4291,16 @@
         </p:nvSpPr>
         <p:spPr>
           <a:xfrm>
-            <a:off x="502920" y="1207008"/>
-            <a:ext cx="8138160" cy="3200400"/>
+            <a:off x="566928" y="1335024"/>
+            <a:ext cx="566928" cy="20117"/>
           </a:xfrm>
           <a:prstGeom prst="rect">
             <a:avLst/>
           </a:prstGeom>
           <a:solidFill>
-            <a:srgbClr val="F3F7FC"/>
+            <a:srgbClr val="9A6A3C"/>
           </a:solidFill>
-          <a:ln w="9525">
-            <a:solidFill>
-              <a:srgbClr val="0066CC"/>
-            </a:solidFill>
-            <a:prstDash val="solid"/>
-          </a:ln>
+          <a:ln/>
         </p:spPr>
       </p:sp>
       <p:sp>
@@ -4090,8 +4311,8 @@
         </p:nvSpPr>
         <p:spPr>
           <a:xfrm>
-            <a:off x="731520" y="1371600"/>
-            <a:ext cx="7680960" cy="1005840"/>
+            <a:off x="566928" y="1645920"/>
+            <a:ext cx="8010144" cy="822960"/>
           </a:xfrm>
           <a:prstGeom prst="rect">
             <a:avLst/>
@@ -4104,156 +4325,195 @@
           <a:lstStyle/>
           <a:p>
             <a:pPr indent="0" marL="0">
+              <a:lnSpc>
+                <a:spcPct val="124000"/>
+              </a:lnSpc>
+              <a:buNone/>
+            </a:pPr>
+            <a:r>
+              <a:rPr lang="en-US" sz="1300" i="1" dirty="0">
+                <a:solidFill>
+                  <a:srgbClr val="5F6B76"/>
+                </a:solidFill>
+                <a:latin typeface="Constantia" pitchFamily="34" charset="0"/>
+                <a:ea typeface="Constantia" pitchFamily="34" charset="-122"/>
+                <a:cs typeface="Constantia" pitchFamily="34" charset="-120"/>
+              </a:rPr>
+              <a:t>A student arrives with the topic "mental health of students in Ghana". It is a real problem, but as written it cannot be studied.</a:t>
+            </a:r>
+            <a:endParaRPr lang="en-US" sz="1300" dirty="0"/>
+          </a:p>
+        </p:txBody>
+      </p:sp>
+      <p:sp>
+        <p:nvSpPr>
+          <p:cNvPr id="6" name="Text 4"/>
+          <p:cNvSpPr/>
+          <p:nvPr/>
+        </p:nvSpPr>
+        <p:spPr>
+          <a:xfrm>
+            <a:off x="786384" y="2523744"/>
+            <a:ext cx="7406640" cy="1920240"/>
+          </a:xfrm>
+          <a:prstGeom prst="rect">
+            <a:avLst/>
+          </a:prstGeom>
+          <a:noFill/>
+          <a:ln/>
+        </p:spPr>
+        <p:txBody>
+          <a:bodyPr wrap="square" rtlCol="0" anchor="t"/>
+          <a:lstStyle/>
+          <a:p>
+            <a:pPr marL="342900" indent="-342900">
               <a:lnSpc>
                 <a:spcPct val="120000"/>
               </a:lnSpc>
-              <a:buNone/>
-            </a:pPr>
-            <a:r>
-              <a:rPr lang="en-US" sz="1400" i="1" dirty="0">
-                <a:solidFill>
-                  <a:srgbClr val="374151"/>
-                </a:solidFill>
-              </a:rPr>
-              <a:t>A student arrives with the topic "mental health of students in Ghana". It is a real problem, but as written it cannot be studied.</a:t>
-            </a:r>
-            <a:endParaRPr lang="en-US" sz="1400" dirty="0"/>
-          </a:p>
-        </p:txBody>
-      </p:sp>
-      <p:sp>
-        <p:nvSpPr>
-          <p:cNvPr id="6" name="Text 4"/>
-          <p:cNvSpPr/>
-          <p:nvPr/>
-        </p:nvSpPr>
-        <p:spPr>
-          <a:xfrm>
-            <a:off x="868680" y="2395728"/>
-            <a:ext cx="7452360" cy="1920240"/>
-          </a:xfrm>
-          <a:prstGeom prst="rect">
-            <a:avLst/>
-          </a:prstGeom>
-          <a:noFill/>
-          <a:ln/>
-        </p:spPr>
-        <p:txBody>
-          <a:bodyPr wrap="square" rtlCol="0" anchor="t"/>
-          <a:lstStyle/>
-          <a:p>
-            <a:pPr marL="342900" indent="-342900">
-              <a:lnSpc>
-                <a:spcPct val="115000"/>
-              </a:lnSpc>
+              <a:spcAft>
+                <a:spcPts val="500"/>
+              </a:spcAft>
               <a:buSzPct val="100000"/>
               <a:buFont typeface="+mj-lt"/>
               <a:buAutoNum type="arabicPeriod" startAt="1"/>
             </a:pPr>
             <a:r>
-              <a:rPr lang="en-US" sz="1300" dirty="0">
-                <a:solidFill>
-                  <a:srgbClr val="374151"/>
-                </a:solidFill>
+              <a:rPr lang="en-US" sz="1250" dirty="0">
+                <a:solidFill>
+                  <a:srgbClr val="23282E"/>
+                </a:solidFill>
+                <a:latin typeface="Corbel" pitchFamily="34" charset="0"/>
+                <a:ea typeface="Corbel" pitchFamily="34" charset="-122"/>
+                <a:cs typeface="Corbel" pitchFamily="34" charset="-120"/>
               </a:rPr>
               <a:t>Population: which students? Settle on final-year nursing students at one university.</a:t>
             </a:r>
-            <a:endParaRPr lang="en-US" sz="1300" dirty="0"/>
+            <a:endParaRPr lang="en-US" sz="1250" dirty="0"/>
           </a:p>
           <a:p>
             <a:pPr marL="342900" indent="-342900">
               <a:lnSpc>
-                <a:spcPct val="115000"/>
+                <a:spcPct val="120000"/>
               </a:lnSpc>
+              <a:spcAft>
+                <a:spcPts val="500"/>
+              </a:spcAft>
               <a:buSzPct val="100000"/>
               <a:buFont typeface="+mj-lt"/>
               <a:buAutoNum type="arabicPeriod" startAt="1"/>
             </a:pPr>
             <a:r>
-              <a:rPr lang="en-US" sz="1300" dirty="0">
-                <a:solidFill>
-                  <a:srgbClr val="374151"/>
-                </a:solidFill>
+              <a:rPr lang="en-US" sz="1250" dirty="0">
+                <a:solidFill>
+                  <a:srgbClr val="23282E"/>
+                </a:solidFill>
+                <a:latin typeface="Corbel" pitchFamily="34" charset="0"/>
+                <a:ea typeface="Corbel" pitchFamily="34" charset="-122"/>
+                <a:cs typeface="Corbel" pitchFamily="34" charset="-120"/>
               </a:rPr>
               <a:t>Exposure or concept: what about them? Choose academic workload, measured in timetabled contact hours.</a:t>
             </a:r>
-            <a:endParaRPr lang="en-US" sz="1300" dirty="0"/>
+            <a:endParaRPr lang="en-US" sz="1250" dirty="0"/>
           </a:p>
           <a:p>
             <a:pPr marL="342900" indent="-342900">
               <a:lnSpc>
-                <a:spcPct val="115000"/>
+                <a:spcPct val="120000"/>
               </a:lnSpc>
+              <a:spcAft>
+                <a:spcPts val="500"/>
+              </a:spcAft>
               <a:buSzPct val="100000"/>
               <a:buFont typeface="+mj-lt"/>
               <a:buAutoNum type="arabicPeriod" startAt="1"/>
             </a:pPr>
             <a:r>
-              <a:rPr lang="en-US" sz="1300" dirty="0">
-                <a:solidFill>
-                  <a:srgbClr val="374151"/>
-                </a:solidFill>
+              <a:rPr lang="en-US" sz="1250" dirty="0">
+                <a:solidFill>
+                  <a:srgbClr val="23282E"/>
+                </a:solidFill>
+                <a:latin typeface="Corbel" pitchFamily="34" charset="0"/>
+                <a:ea typeface="Corbel" pitchFamily="34" charset="-122"/>
+                <a:cs typeface="Corbel" pitchFamily="34" charset="-120"/>
               </a:rPr>
               <a:t>Outcome: what will you measure? Depressive symptoms on the PHQ-9.</a:t>
             </a:r>
-            <a:endParaRPr lang="en-US" sz="1300" dirty="0"/>
+            <a:endParaRPr lang="en-US" sz="1250" dirty="0"/>
           </a:p>
           <a:p>
             <a:pPr marL="342900" indent="-342900">
               <a:lnSpc>
-                <a:spcPct val="115000"/>
+                <a:spcPct val="120000"/>
               </a:lnSpc>
+              <a:spcAft>
+                <a:spcPts val="500"/>
+              </a:spcAft>
               <a:buSzPct val="100000"/>
               <a:buFont typeface="+mj-lt"/>
               <a:buAutoNum type="arabicPeriod" startAt="1"/>
             </a:pPr>
             <a:r>
-              <a:rPr lang="en-US" sz="1300" dirty="0">
-                <a:solidFill>
-                  <a:srgbClr val="374151"/>
-                </a:solidFill>
+              <a:rPr lang="en-US" sz="1250" dirty="0">
+                <a:solidFill>
+                  <a:srgbClr val="23282E"/>
+                </a:solidFill>
+                <a:latin typeface="Corbel" pitchFamily="34" charset="0"/>
+                <a:ea typeface="Corbel" pitchFamily="34" charset="-122"/>
+                <a:cs typeface="Corbel" pitchFamily="34" charset="-120"/>
               </a:rPr>
               <a:t>Setting and time: one campus, one semester.</a:t>
             </a:r>
-            <a:endParaRPr lang="en-US" sz="1300" dirty="0"/>
+            <a:endParaRPr lang="en-US" sz="1250" dirty="0"/>
           </a:p>
           <a:p>
             <a:pPr marL="342900" indent="-342900">
               <a:lnSpc>
-                <a:spcPct val="115000"/>
+                <a:spcPct val="120000"/>
               </a:lnSpc>
+              <a:spcAft>
+                <a:spcPts val="500"/>
+              </a:spcAft>
               <a:buSzPct val="100000"/>
               <a:buFont typeface="+mj-lt"/>
               <a:buAutoNum type="arabicPeriod" startAt="1"/>
             </a:pPr>
             <a:r>
-              <a:rPr lang="en-US" sz="1300" dirty="0">
-                <a:solidFill>
-                  <a:srgbClr val="374151"/>
-                </a:solidFill>
+              <a:rPr lang="en-US" sz="1250" dirty="0">
+                <a:solidFill>
+                  <a:srgbClr val="23282E"/>
+                </a:solidFill>
+                <a:latin typeface="Corbel" pitchFamily="34" charset="0"/>
+                <a:ea typeface="Corbel" pitchFamily="34" charset="-122"/>
+                <a:cs typeface="Corbel" pitchFamily="34" charset="-120"/>
               </a:rPr>
               <a:t>The question becomes: "Is timetabled workload associated with PHQ-9 score among final-year nursing students at [University] in the 2026 second semester?"</a:t>
             </a:r>
-            <a:endParaRPr lang="en-US" sz="1300" dirty="0"/>
+            <a:endParaRPr lang="en-US" sz="1250" dirty="0"/>
           </a:p>
           <a:p>
             <a:pPr marL="342900" indent="-342900">
               <a:lnSpc>
-                <a:spcPct val="115000"/>
+                <a:spcPct val="120000"/>
               </a:lnSpc>
+              <a:spcAft>
+                <a:spcPts val="500"/>
+              </a:spcAft>
               <a:buSzPct val="100000"/>
               <a:buFont typeface="+mj-lt"/>
               <a:buAutoNum type="arabicPeriod" startAt="1"/>
             </a:pPr>
             <a:r>
-              <a:rPr lang="en-US" sz="1300" dirty="0">
-                <a:solidFill>
-                  <a:srgbClr val="374151"/>
-                </a:solidFill>
+              <a:rPr lang="en-US" sz="1250" dirty="0">
+                <a:solidFill>
+                  <a:srgbClr val="23282E"/>
+                </a:solidFill>
+                <a:latin typeface="Corbel" pitchFamily="34" charset="0"/>
+                <a:ea typeface="Corbel" pitchFamily="34" charset="-122"/>
+                <a:cs typeface="Corbel" pitchFamily="34" charset="-120"/>
               </a:rPr>
               <a:t>Now name the analysis: linear regression of PHQ-9 score on contact hours, adjusted for age, sex and financial stress. If you cannot name it, the question is still too vague.</a:t>
             </a:r>
-            <a:endParaRPr lang="en-US" sz="1300" dirty="0"/>
+            <a:endParaRPr lang="en-US" sz="1250" dirty="0"/>
           </a:p>
         </p:txBody>
       </p:sp>
@@ -4269,8 +4529,8 @@
         </p:nvSpPr>
         <p:spPr>
           <a:xfrm>
-            <a:off x="8503920" y="4709160"/>
-            <a:ext cx="800000" cy="300000"/>
+            <a:off x="566928" y="4700016"/>
+            <a:ext cx="914400" cy="274320"/>
           </a:xfrm>
           <a:prstGeom prst="rect">
             <a:avLst/>
@@ -4285,10 +4545,13 @@
           <a:bodyPr/>
           <a:lstStyle>
             <a:lvl1pPr>
-              <a:defRPr sz="1000">
-                <a:solidFill>
-                  <a:srgbClr val="6B7280"/>
-                </a:solidFill>
+              <a:defRPr sz="900">
+                <a:solidFill>
+                  <a:srgbClr val="5F6B76"/>
+                </a:solidFill>
+                <a:latin typeface="Corbel"/>
+                <a:ea typeface="Corbel"/>
+                <a:cs typeface="Corbel"/>
               </a:defRPr>
             </a:lvl1pPr>
           </a:lstStyle>
@@ -4335,8 +4598,8 @@
         </p:nvSpPr>
         <p:spPr>
           <a:xfrm>
-            <a:off x="502920" y="292608"/>
-            <a:ext cx="8046720" cy="228600"/>
+            <a:off x="566928" y="384048"/>
+            <a:ext cx="7772400" cy="237744"/>
           </a:xfrm>
           <a:prstGeom prst="rect">
             <a:avLst/>
@@ -4352,14 +4615,17 @@
               <a:buNone/>
             </a:pPr>
             <a:r>
-              <a:rPr lang="en-US" sz="1100" b="1" spc="150" kern="0" dirty="0">
-                <a:solidFill>
-                  <a:srgbClr val="00A86B"/>
-                </a:solidFill>
+              <a:rPr lang="en-US" sz="1000" spc="200" kern="0" dirty="0">
+                <a:solidFill>
+                  <a:srgbClr val="9A6A3C"/>
+                </a:solidFill>
+                <a:latin typeface="Corbel" pitchFamily="34" charset="0"/>
+                <a:ea typeface="Corbel" pitchFamily="34" charset="-122"/>
+                <a:cs typeface="Corbel" pitchFamily="34" charset="-120"/>
               </a:rPr>
               <a:t>UNIT 2  ·  WORKED EXAMPLE</a:t>
             </a:r>
-            <a:endParaRPr lang="en-US" sz="1100" dirty="0"/>
+            <a:endParaRPr lang="en-US" sz="1000" dirty="0"/>
           </a:p>
         </p:txBody>
       </p:sp>
@@ -4371,8 +4637,8 @@
         </p:nvSpPr>
         <p:spPr>
           <a:xfrm>
-            <a:off x="502920" y="548640"/>
-            <a:ext cx="8046720" cy="566928"/>
+            <a:off x="566928" y="658368"/>
+            <a:ext cx="7772400" cy="658368"/>
           </a:xfrm>
           <a:prstGeom prst="rect">
             <a:avLst/>
@@ -4385,17 +4651,23 @@
           <a:lstStyle/>
           <a:p>
             <a:pPr indent="0" marL="0">
+              <a:lnSpc>
+                <a:spcPct val="100000"/>
+              </a:lnSpc>
               <a:buNone/>
             </a:pPr>
             <a:r>
-              <a:rPr lang="en-US" sz="2300" b="1" dirty="0">
-                <a:solidFill>
-                  <a:srgbClr val="111827"/>
-                </a:solidFill>
+              <a:rPr lang="en-US" sz="2500" dirty="0">
+                <a:solidFill>
+                  <a:srgbClr val="1C3140"/>
+                </a:solidFill>
+                <a:latin typeface="Constantia" pitchFamily="34" charset="0"/>
+                <a:ea typeface="Constantia" pitchFamily="34" charset="-122"/>
+                <a:cs typeface="Constantia" pitchFamily="34" charset="-120"/>
               </a:rPr>
               <a:t>An objective that produces no result</a:t>
             </a:r>
-            <a:endParaRPr lang="en-US" sz="2300" dirty="0"/>
+            <a:endParaRPr lang="en-US" sz="2500" dirty="0"/>
           </a:p>
         </p:txBody>
       </p:sp>
@@ -4407,21 +4679,16 @@
         </p:nvSpPr>
         <p:spPr>
           <a:xfrm>
-            <a:off x="502920" y="1207008"/>
-            <a:ext cx="8138160" cy="3200400"/>
+            <a:off x="566928" y="1335024"/>
+            <a:ext cx="566928" cy="20117"/>
           </a:xfrm>
           <a:prstGeom prst="rect">
             <a:avLst/>
           </a:prstGeom>
           <a:solidFill>
-            <a:srgbClr val="F3F7FC"/>
+            <a:srgbClr val="9A6A3C"/>
           </a:solidFill>
-          <a:ln w="9525">
-            <a:solidFill>
-              <a:srgbClr val="0066CC"/>
-            </a:solidFill>
-            <a:prstDash val="solid"/>
-          </a:ln>
+          <a:ln/>
         </p:spPr>
       </p:sp>
       <p:sp>
@@ -4432,8 +4699,8 @@
         </p:nvSpPr>
         <p:spPr>
           <a:xfrm>
-            <a:off x="731520" y="1371600"/>
-            <a:ext cx="7680960" cy="1005840"/>
+            <a:off x="566928" y="1645920"/>
+            <a:ext cx="8010144" cy="822960"/>
           </a:xfrm>
           <a:prstGeom prst="rect">
             <a:avLst/>
@@ -4446,137 +4713,170 @@
           <a:lstStyle/>
           <a:p>
             <a:pPr indent="0" marL="0">
+              <a:lnSpc>
+                <a:spcPct val="124000"/>
+              </a:lnSpc>
+              <a:buNone/>
+            </a:pPr>
+            <a:r>
+              <a:rPr lang="en-US" sz="1300" i="1" dirty="0">
+                <a:solidFill>
+                  <a:srgbClr val="5F6B76"/>
+                </a:solidFill>
+                <a:latin typeface="Constantia" pitchFamily="34" charset="0"/>
+                <a:ea typeface="Constantia" pitchFamily="34" charset="-122"/>
+                <a:cs typeface="Constantia" pitchFamily="34" charset="-120"/>
+              </a:rPr>
+              <a:t>A proposal lists four objectives. The third is "to explore the perceptions of health workers". The study is a cross-sectional survey with a closed-response questionnaire.</a:t>
+            </a:r>
+            <a:endParaRPr lang="en-US" sz="1300" dirty="0"/>
+          </a:p>
+        </p:txBody>
+      </p:sp>
+      <p:sp>
+        <p:nvSpPr>
+          <p:cNvPr id="6" name="Text 4"/>
+          <p:cNvSpPr/>
+          <p:nvPr/>
+        </p:nvSpPr>
+        <p:spPr>
+          <a:xfrm>
+            <a:off x="786384" y="2523744"/>
+            <a:ext cx="7406640" cy="1920240"/>
+          </a:xfrm>
+          <a:prstGeom prst="rect">
+            <a:avLst/>
+          </a:prstGeom>
+          <a:noFill/>
+          <a:ln/>
+        </p:spPr>
+        <p:txBody>
+          <a:bodyPr wrap="square" rtlCol="0" anchor="t"/>
+          <a:lstStyle/>
+          <a:p>
+            <a:pPr marL="342900" indent="-342900">
               <a:lnSpc>
                 <a:spcPct val="120000"/>
               </a:lnSpc>
-              <a:buNone/>
-            </a:pPr>
-            <a:r>
-              <a:rPr lang="en-US" sz="1400" i="1" dirty="0">
-                <a:solidFill>
-                  <a:srgbClr val="374151"/>
-                </a:solidFill>
-              </a:rPr>
-              <a:t>A proposal lists four objectives. The third is "to explore the perceptions of health workers". The study is a cross-sectional survey with a closed-response questionnaire.</a:t>
-            </a:r>
-            <a:endParaRPr lang="en-US" sz="1400" dirty="0"/>
-          </a:p>
-        </p:txBody>
-      </p:sp>
-      <p:sp>
-        <p:nvSpPr>
-          <p:cNvPr id="6" name="Text 4"/>
-          <p:cNvSpPr/>
-          <p:nvPr/>
-        </p:nvSpPr>
-        <p:spPr>
-          <a:xfrm>
-            <a:off x="868680" y="2395728"/>
-            <a:ext cx="7452360" cy="1920240"/>
-          </a:xfrm>
-          <a:prstGeom prst="rect">
-            <a:avLst/>
-          </a:prstGeom>
-          <a:noFill/>
-          <a:ln/>
-        </p:spPr>
-        <p:txBody>
-          <a:bodyPr wrap="square" rtlCol="0" anchor="t"/>
-          <a:lstStyle/>
-          <a:p>
-            <a:pPr marL="342900" indent="-342900">
-              <a:lnSpc>
-                <a:spcPct val="115000"/>
-              </a:lnSpc>
+              <a:spcAft>
+                <a:spcPts val="500"/>
+              </a:spcAft>
               <a:buSzPct val="100000"/>
               <a:buFont typeface="+mj-lt"/>
               <a:buAutoNum type="arabicPeriod" startAt="1"/>
             </a:pPr>
             <a:r>
-              <a:rPr lang="en-US" sz="1300" dirty="0">
-                <a:solidFill>
-                  <a:srgbClr val="374151"/>
-                </a:solidFill>
+              <a:rPr lang="en-US" sz="1250" dirty="0">
+                <a:solidFill>
+                  <a:srgbClr val="23282E"/>
+                </a:solidFill>
+                <a:latin typeface="Corbel" pitchFamily="34" charset="0"/>
+                <a:ea typeface="Corbel" pitchFamily="34" charset="-122"/>
+                <a:cs typeface="Corbel" pitchFamily="34" charset="-120"/>
               </a:rPr>
               <a:t>"Explore perceptions" implies qualitative work — interviews or focus groups.</a:t>
             </a:r>
-            <a:endParaRPr lang="en-US" sz="1300" dirty="0"/>
+            <a:endParaRPr lang="en-US" sz="1250" dirty="0"/>
           </a:p>
           <a:p>
             <a:pPr marL="342900" indent="-342900">
               <a:lnSpc>
-                <a:spcPct val="115000"/>
+                <a:spcPct val="120000"/>
               </a:lnSpc>
+              <a:spcAft>
+                <a:spcPts val="500"/>
+              </a:spcAft>
               <a:buSzPct val="100000"/>
               <a:buFont typeface="+mj-lt"/>
               <a:buAutoNum type="arabicPeriod" startAt="1"/>
             </a:pPr>
             <a:r>
-              <a:rPr lang="en-US" sz="1300" dirty="0">
-                <a:solidFill>
-                  <a:srgbClr val="374151"/>
-                </a:solidFill>
+              <a:rPr lang="en-US" sz="1250" dirty="0">
+                <a:solidFill>
+                  <a:srgbClr val="23282E"/>
+                </a:solidFill>
+                <a:latin typeface="Corbel" pitchFamily="34" charset="0"/>
+                <a:ea typeface="Corbel" pitchFamily="34" charset="-122"/>
+                <a:cs typeface="Corbel" pitchFamily="34" charset="-120"/>
               </a:rPr>
               <a:t>The instrument collects no free text, so nothing in the data can answer this objective.</a:t>
             </a:r>
-            <a:endParaRPr lang="en-US" sz="1300" dirty="0"/>
+            <a:endParaRPr lang="en-US" sz="1250" dirty="0"/>
           </a:p>
           <a:p>
             <a:pPr marL="342900" indent="-342900">
               <a:lnSpc>
-                <a:spcPct val="115000"/>
+                <a:spcPct val="120000"/>
               </a:lnSpc>
+              <a:spcAft>
+                <a:spcPts val="500"/>
+              </a:spcAft>
               <a:buSzPct val="100000"/>
               <a:buFont typeface="+mj-lt"/>
               <a:buAutoNum type="arabicPeriod" startAt="1"/>
             </a:pPr>
             <a:r>
-              <a:rPr lang="en-US" sz="1300" dirty="0">
-                <a:solidFill>
-                  <a:srgbClr val="374151"/>
-                </a:solidFill>
+              <a:rPr lang="en-US" sz="1250" dirty="0">
+                <a:solidFill>
+                  <a:srgbClr val="23282E"/>
+                </a:solidFill>
+                <a:latin typeface="Corbel" pitchFamily="34" charset="0"/>
+                <a:ea typeface="Corbel" pitchFamily="34" charset="-122"/>
+                <a:cs typeface="Corbel" pitchFamily="34" charset="-120"/>
               </a:rPr>
               <a:t>At write-up the student will either drop the objective, or pad the results with a frequency table that does not address it.</a:t>
             </a:r>
-            <a:endParaRPr lang="en-US" sz="1300" dirty="0"/>
+            <a:endParaRPr lang="en-US" sz="1250" dirty="0"/>
           </a:p>
           <a:p>
             <a:pPr marL="342900" indent="-342900">
               <a:lnSpc>
-                <a:spcPct val="115000"/>
+                <a:spcPct val="120000"/>
               </a:lnSpc>
+              <a:spcAft>
+                <a:spcPts val="500"/>
+              </a:spcAft>
               <a:buSzPct val="100000"/>
               <a:buFont typeface="+mj-lt"/>
               <a:buAutoNum type="arabicPeriod" startAt="1"/>
             </a:pPr>
             <a:r>
-              <a:rPr lang="en-US" sz="1300" dirty="0">
-                <a:solidFill>
-                  <a:srgbClr val="374151"/>
-                </a:solidFill>
+              <a:rPr lang="en-US" sz="1250" dirty="0">
+                <a:solidFill>
+                  <a:srgbClr val="23282E"/>
+                </a:solidFill>
+                <a:latin typeface="Corbel" pitchFamily="34" charset="0"/>
+                <a:ea typeface="Corbel" pitchFamily="34" charset="-122"/>
+                <a:cs typeface="Corbel" pitchFamily="34" charset="-120"/>
               </a:rPr>
               <a:t>Either outcome invites the examiner question: why did you state an objective you never met?</a:t>
             </a:r>
-            <a:endParaRPr lang="en-US" sz="1300" dirty="0"/>
+            <a:endParaRPr lang="en-US" sz="1250" dirty="0"/>
           </a:p>
           <a:p>
             <a:pPr marL="342900" indent="-342900">
               <a:lnSpc>
-                <a:spcPct val="115000"/>
+                <a:spcPct val="120000"/>
               </a:lnSpc>
+              <a:spcAft>
+                <a:spcPts val="500"/>
+              </a:spcAft>
               <a:buSzPct val="100000"/>
               <a:buFont typeface="+mj-lt"/>
               <a:buAutoNum type="arabicPeriod" startAt="1"/>
             </a:pPr>
             <a:r>
-              <a:rPr lang="en-US" sz="1300" dirty="0">
-                <a:solidFill>
-                  <a:srgbClr val="374151"/>
-                </a:solidFill>
+              <a:rPr lang="en-US" sz="1250" dirty="0">
+                <a:solidFill>
+                  <a:srgbClr val="23282E"/>
+                </a:solidFill>
+                <a:latin typeface="Corbel" pitchFamily="34" charset="0"/>
+                <a:ea typeface="Corbel" pitchFamily="34" charset="-122"/>
+                <a:cs typeface="Corbel" pitchFamily="34" charset="-120"/>
               </a:rPr>
               <a:t>The fix at proposal stage is cheap: rewrite it as "to describe health workers' reported barriers", or add a qualitative strand and design for it.</a:t>
             </a:r>
-            <a:endParaRPr lang="en-US" sz="1300" dirty="0"/>
+            <a:endParaRPr lang="en-US" sz="1250" dirty="0"/>
           </a:p>
         </p:txBody>
       </p:sp>
@@ -4592,8 +4892,8 @@
         </p:nvSpPr>
         <p:spPr>
           <a:xfrm>
-            <a:off x="8503920" y="4709160"/>
-            <a:ext cx="800000" cy="300000"/>
+            <a:off x="566928" y="4700016"/>
+            <a:ext cx="914400" cy="274320"/>
           </a:xfrm>
           <a:prstGeom prst="rect">
             <a:avLst/>
@@ -4608,10 +4908,13 @@
           <a:bodyPr/>
           <a:lstStyle>
             <a:lvl1pPr>
-              <a:defRPr sz="1000">
-                <a:solidFill>
-                  <a:srgbClr val="6B7280"/>
-                </a:solidFill>
+              <a:defRPr sz="900">
+                <a:solidFill>
+                  <a:srgbClr val="5F6B76"/>
+                </a:solidFill>
+                <a:latin typeface="Corbel"/>
+                <a:ea typeface="Corbel"/>
+                <a:cs typeface="Corbel"/>
               </a:defRPr>
             </a:lvl1pPr>
           </a:lstStyle>
@@ -4658,8 +4961,8 @@
         </p:nvSpPr>
         <p:spPr>
           <a:xfrm>
-            <a:off x="502920" y="292608"/>
-            <a:ext cx="8046720" cy="228600"/>
+            <a:off x="566928" y="384048"/>
+            <a:ext cx="7772400" cy="237744"/>
           </a:xfrm>
           <a:prstGeom prst="rect">
             <a:avLst/>
@@ -4675,14 +4978,17 @@
               <a:buNone/>
             </a:pPr>
             <a:r>
-              <a:rPr lang="en-US" sz="1100" b="1" spc="150" kern="0" dirty="0">
-                <a:solidFill>
-                  <a:srgbClr val="0066CC"/>
-                </a:solidFill>
+              <a:rPr lang="en-US" sz="1000" spc="200" kern="0" dirty="0">
+                <a:solidFill>
+                  <a:srgbClr val="9A6A3C"/>
+                </a:solidFill>
+                <a:latin typeface="Corbel" pitchFamily="34" charset="0"/>
+                <a:ea typeface="Corbel" pitchFamily="34" charset="-122"/>
+                <a:cs typeface="Corbel" pitchFamily="34" charset="-120"/>
               </a:rPr>
               <a:t>UNIT 2</a:t>
             </a:r>
-            <a:endParaRPr lang="en-US" sz="1100" dirty="0"/>
+            <a:endParaRPr lang="en-US" sz="1000" dirty="0"/>
           </a:p>
         </p:txBody>
       </p:sp>
@@ -4694,8 +5000,8 @@
         </p:nvSpPr>
         <p:spPr>
           <a:xfrm>
-            <a:off x="502920" y="548640"/>
-            <a:ext cx="8046720" cy="640080"/>
+            <a:off x="566928" y="658368"/>
+            <a:ext cx="7772400" cy="658368"/>
           </a:xfrm>
           <a:prstGeom prst="rect">
             <a:avLst/>
@@ -4708,30 +5014,56 @@
           <a:lstStyle/>
           <a:p>
             <a:pPr indent="0" marL="0">
+              <a:lnSpc>
+                <a:spcPct val="100000"/>
+              </a:lnSpc>
               <a:buNone/>
             </a:pPr>
             <a:r>
-              <a:rPr lang="en-US" sz="2400" b="1" dirty="0">
-                <a:solidFill>
-                  <a:srgbClr val="111827"/>
-                </a:solidFill>
+              <a:rPr lang="en-US" sz="2500" dirty="0">
+                <a:solidFill>
+                  <a:srgbClr val="1C3140"/>
+                </a:solidFill>
+                <a:latin typeface="Constantia" pitchFamily="34" charset="0"/>
+                <a:ea typeface="Constantia" pitchFamily="34" charset="-122"/>
+                <a:cs typeface="Constantia" pitchFamily="34" charset="-120"/>
               </a:rPr>
               <a:t>Key terms (1/2)</a:t>
             </a:r>
-            <a:endParaRPr lang="en-US" sz="2400" dirty="0"/>
-          </a:p>
-        </p:txBody>
-      </p:sp>
-      <p:sp>
-        <p:nvSpPr>
-          <p:cNvPr id="4" name="Text 2"/>
+            <a:endParaRPr lang="en-US" sz="2500" dirty="0"/>
+          </a:p>
+        </p:txBody>
+      </p:sp>
+      <p:sp>
+        <p:nvSpPr>
+          <p:cNvPr id="4" name="Shape 2"/>
           <p:cNvSpPr/>
           <p:nvPr/>
         </p:nvSpPr>
         <p:spPr>
           <a:xfrm>
-            <a:off x="685800" y="1325880"/>
-            <a:ext cx="7772400" cy="3200400"/>
+            <a:off x="566928" y="1335024"/>
+            <a:ext cx="566928" cy="20117"/>
+          </a:xfrm>
+          <a:prstGeom prst="rect">
+            <a:avLst/>
+          </a:prstGeom>
+          <a:solidFill>
+            <a:srgbClr val="9A6A3C"/>
+          </a:solidFill>
+          <a:ln/>
+        </p:spPr>
+      </p:sp>
+      <p:sp>
+        <p:nvSpPr>
+          <p:cNvPr id="5" name="Text 3"/>
+          <p:cNvSpPr/>
+          <p:nvPr/>
+        </p:nvSpPr>
+        <p:spPr>
+          <a:xfrm>
+            <a:off x="713232" y="1664208"/>
+            <a:ext cx="7498080" cy="2788920"/>
           </a:xfrm>
           <a:prstGeom prst="rect">
             <a:avLst/>
@@ -4745,107 +5077,122 @@
           <a:p>
             <a:pPr marL="342900" indent="-342900">
               <a:lnSpc>
-                <a:spcPct val="125000"/>
+                <a:spcPct val="130000"/>
               </a:lnSpc>
               <a:spcAft>
-                <a:spcPts val="800"/>
+                <a:spcPts val="1100"/>
               </a:spcAft>
               <a:buSzPct val="100000"/>
-              <a:buChar char="•"/>
+              <a:buChar char="–"/>
             </a:pPr>
             <a:r>
-              <a:rPr lang="en-US" sz="1700" dirty="0">
-                <a:solidFill>
-                  <a:srgbClr val="374151"/>
-                </a:solidFill>
+              <a:rPr lang="en-US" sz="1650" dirty="0">
+                <a:solidFill>
+                  <a:srgbClr val="23282E"/>
+                </a:solidFill>
+                <a:latin typeface="Corbel" pitchFamily="34" charset="0"/>
+                <a:ea typeface="Corbel" pitchFamily="34" charset="-122"/>
+                <a:cs typeface="Corbel" pitchFamily="34" charset="-120"/>
               </a:rPr>
               <a:t>Research gap — A specific limitation in existing knowledge that the proposed study will address.</a:t>
             </a:r>
-            <a:endParaRPr lang="en-US" sz="1700" dirty="0"/>
+            <a:endParaRPr lang="en-US" sz="1650" dirty="0"/>
           </a:p>
           <a:p>
             <a:pPr marL="342900" indent="-342900">
               <a:lnSpc>
-                <a:spcPct val="125000"/>
+                <a:spcPct val="130000"/>
               </a:lnSpc>
               <a:spcAft>
-                <a:spcPts val="800"/>
+                <a:spcPts val="1100"/>
               </a:spcAft>
               <a:buSzPct val="100000"/>
-              <a:buChar char="•"/>
+              <a:buChar char="–"/>
             </a:pPr>
             <a:r>
-              <a:rPr lang="en-US" sz="1700" dirty="0">
-                <a:solidFill>
-                  <a:srgbClr val="374151"/>
-                </a:solidFill>
+              <a:rPr lang="en-US" sz="1650" dirty="0">
+                <a:solidFill>
+                  <a:srgbClr val="23282E"/>
+                </a:solidFill>
+                <a:latin typeface="Corbel" pitchFamily="34" charset="0"/>
+                <a:ea typeface="Corbel" pitchFamily="34" charset="-122"/>
+                <a:cs typeface="Corbel" pitchFamily="34" charset="-120"/>
               </a:rPr>
               <a:t>Aim — A single statement of the overall purpose of the study.</a:t>
             </a:r>
-            <a:endParaRPr lang="en-US" sz="1700" dirty="0"/>
+            <a:endParaRPr lang="en-US" sz="1650" dirty="0"/>
           </a:p>
           <a:p>
             <a:pPr marL="342900" indent="-342900">
               <a:lnSpc>
-                <a:spcPct val="125000"/>
+                <a:spcPct val="130000"/>
               </a:lnSpc>
               <a:spcAft>
-                <a:spcPts val="800"/>
+                <a:spcPts val="1100"/>
               </a:spcAft>
               <a:buSzPct val="100000"/>
-              <a:buChar char="•"/>
+              <a:buChar char="–"/>
             </a:pPr>
             <a:r>
-              <a:rPr lang="en-US" sz="1700" dirty="0">
-                <a:solidFill>
-                  <a:srgbClr val="374151"/>
-                </a:solidFill>
+              <a:rPr lang="en-US" sz="1650" dirty="0">
+                <a:solidFill>
+                  <a:srgbClr val="23282E"/>
+                </a:solidFill>
+                <a:latin typeface="Corbel" pitchFamily="34" charset="0"/>
+                <a:ea typeface="Corbel" pitchFamily="34" charset="-122"/>
+                <a:cs typeface="Corbel" pitchFamily="34" charset="-120"/>
               </a:rPr>
               <a:t>Objective — A specific, measurable step that contributes to achieving the aim.</a:t>
             </a:r>
-            <a:endParaRPr lang="en-US" sz="1700" dirty="0"/>
+            <a:endParaRPr lang="en-US" sz="1650" dirty="0"/>
           </a:p>
           <a:p>
             <a:pPr marL="342900" indent="-342900">
               <a:lnSpc>
-                <a:spcPct val="125000"/>
+                <a:spcPct val="130000"/>
               </a:lnSpc>
               <a:spcAft>
-                <a:spcPts val="800"/>
+                <a:spcPts val="1100"/>
               </a:spcAft>
               <a:buSzPct val="100000"/>
-              <a:buChar char="•"/>
+              <a:buChar char="–"/>
             </a:pPr>
             <a:r>
-              <a:rPr lang="en-US" sz="1700" dirty="0">
-                <a:solidFill>
-                  <a:srgbClr val="374151"/>
-                </a:solidFill>
+              <a:rPr lang="en-US" sz="1650" dirty="0">
+                <a:solidFill>
+                  <a:srgbClr val="23282E"/>
+                </a:solidFill>
+                <a:latin typeface="Corbel" pitchFamily="34" charset="0"/>
+                <a:ea typeface="Corbel" pitchFamily="34" charset="-122"/>
+                <a:cs typeface="Corbel" pitchFamily="34" charset="-120"/>
               </a:rPr>
               <a:t>Null hypothesis — The testable statement that no difference or association exists in the population.</a:t>
             </a:r>
-            <a:endParaRPr lang="en-US" sz="1700" dirty="0"/>
+            <a:endParaRPr lang="en-US" sz="1650" dirty="0"/>
           </a:p>
           <a:p>
             <a:pPr marL="342900" indent="-342900">
               <a:lnSpc>
-                <a:spcPct val="125000"/>
+                <a:spcPct val="130000"/>
               </a:lnSpc>
               <a:spcAft>
-                <a:spcPts val="800"/>
+                <a:spcPts val="1100"/>
               </a:spcAft>
               <a:buSzPct val="100000"/>
-              <a:buChar char="•"/>
+              <a:buChar char="–"/>
             </a:pPr>
             <a:r>
-              <a:rPr lang="en-US" sz="1700" dirty="0">
-                <a:solidFill>
-                  <a:srgbClr val="374151"/>
-                </a:solidFill>
+              <a:rPr lang="en-US" sz="1650" dirty="0">
+                <a:solidFill>
+                  <a:srgbClr val="23282E"/>
+                </a:solidFill>
+                <a:latin typeface="Corbel" pitchFamily="34" charset="0"/>
+                <a:ea typeface="Corbel" pitchFamily="34" charset="-122"/>
+                <a:cs typeface="Corbel" pitchFamily="34" charset="-120"/>
               </a:rPr>
               <a:t>Conceptual framework — A diagram or model of the presumed relationships among the study variables.</a:t>
             </a:r>
-            <a:endParaRPr lang="en-US" sz="1700" dirty="0"/>
+            <a:endParaRPr lang="en-US" sz="1650" dirty="0"/>
           </a:p>
         </p:txBody>
       </p:sp>
@@ -4861,8 +5208,8 @@
         </p:nvSpPr>
         <p:spPr>
           <a:xfrm>
-            <a:off x="8503920" y="4709160"/>
-            <a:ext cx="800000" cy="300000"/>
+            <a:off x="566928" y="4700016"/>
+            <a:ext cx="914400" cy="274320"/>
           </a:xfrm>
           <a:prstGeom prst="rect">
             <a:avLst/>
@@ -4877,10 +5224,13 @@
           <a:bodyPr/>
           <a:lstStyle>
             <a:lvl1pPr>
-              <a:defRPr sz="1000">
-                <a:solidFill>
-                  <a:srgbClr val="6B7280"/>
-                </a:solidFill>
+              <a:defRPr sz="900">
+                <a:solidFill>
+                  <a:srgbClr val="5F6B76"/>
+                </a:solidFill>
+                <a:latin typeface="Corbel"/>
+                <a:ea typeface="Corbel"/>
+                <a:cs typeface="Corbel"/>
               </a:defRPr>
             </a:lvl1pPr>
           </a:lstStyle>
@@ -4927,8 +5277,8 @@
         </p:nvSpPr>
         <p:spPr>
           <a:xfrm>
-            <a:off x="502920" y="292608"/>
-            <a:ext cx="8046720" cy="228600"/>
+            <a:off x="566928" y="384048"/>
+            <a:ext cx="7772400" cy="237744"/>
           </a:xfrm>
           <a:prstGeom prst="rect">
             <a:avLst/>
@@ -4944,14 +5294,17 @@
               <a:buNone/>
             </a:pPr>
             <a:r>
-              <a:rPr lang="en-US" sz="1100" b="1" spc="150" kern="0" dirty="0">
-                <a:solidFill>
-                  <a:srgbClr val="0066CC"/>
-                </a:solidFill>
+              <a:rPr lang="en-US" sz="1000" spc="200" kern="0" dirty="0">
+                <a:solidFill>
+                  <a:srgbClr val="9A6A3C"/>
+                </a:solidFill>
+                <a:latin typeface="Corbel" pitchFamily="34" charset="0"/>
+                <a:ea typeface="Corbel" pitchFamily="34" charset="-122"/>
+                <a:cs typeface="Corbel" pitchFamily="34" charset="-120"/>
               </a:rPr>
               <a:t>UNIT 2</a:t>
             </a:r>
-            <a:endParaRPr lang="en-US" sz="1100" dirty="0"/>
+            <a:endParaRPr lang="en-US" sz="1000" dirty="0"/>
           </a:p>
         </p:txBody>
       </p:sp>
@@ -4963,8 +5316,8 @@
         </p:nvSpPr>
         <p:spPr>
           <a:xfrm>
-            <a:off x="502920" y="548640"/>
-            <a:ext cx="8046720" cy="640080"/>
+            <a:off x="566928" y="658368"/>
+            <a:ext cx="7772400" cy="658368"/>
           </a:xfrm>
           <a:prstGeom prst="rect">
             <a:avLst/>
@@ -4977,30 +5330,56 @@
           <a:lstStyle/>
           <a:p>
             <a:pPr indent="0" marL="0">
+              <a:lnSpc>
+                <a:spcPct val="100000"/>
+              </a:lnSpc>
               <a:buNone/>
             </a:pPr>
             <a:r>
-              <a:rPr lang="en-US" sz="2400" b="1" dirty="0">
-                <a:solidFill>
-                  <a:srgbClr val="111827"/>
-                </a:solidFill>
+              <a:rPr lang="en-US" sz="2500" dirty="0">
+                <a:solidFill>
+                  <a:srgbClr val="1C3140"/>
+                </a:solidFill>
+                <a:latin typeface="Constantia" pitchFamily="34" charset="0"/>
+                <a:ea typeface="Constantia" pitchFamily="34" charset="-122"/>
+                <a:cs typeface="Constantia" pitchFamily="34" charset="-120"/>
               </a:rPr>
               <a:t>Key terms (2/2)</a:t>
             </a:r>
-            <a:endParaRPr lang="en-US" sz="2400" dirty="0"/>
-          </a:p>
-        </p:txBody>
-      </p:sp>
-      <p:sp>
-        <p:nvSpPr>
-          <p:cNvPr id="4" name="Text 2"/>
+            <a:endParaRPr lang="en-US" sz="2500" dirty="0"/>
+          </a:p>
+        </p:txBody>
+      </p:sp>
+      <p:sp>
+        <p:nvSpPr>
+          <p:cNvPr id="4" name="Shape 2"/>
           <p:cNvSpPr/>
           <p:nvPr/>
         </p:nvSpPr>
         <p:spPr>
           <a:xfrm>
-            <a:off x="685800" y="1325880"/>
-            <a:ext cx="7772400" cy="3200400"/>
+            <a:off x="566928" y="1335024"/>
+            <a:ext cx="566928" cy="20117"/>
+          </a:xfrm>
+          <a:prstGeom prst="rect">
+            <a:avLst/>
+          </a:prstGeom>
+          <a:solidFill>
+            <a:srgbClr val="9A6A3C"/>
+          </a:solidFill>
+          <a:ln/>
+        </p:spPr>
+      </p:sp>
+      <p:sp>
+        <p:nvSpPr>
+          <p:cNvPr id="5" name="Text 3"/>
+          <p:cNvSpPr/>
+          <p:nvPr/>
+        </p:nvSpPr>
+        <p:spPr>
+          <a:xfrm>
+            <a:off x="713232" y="1664208"/>
+            <a:ext cx="7498080" cy="2788920"/>
           </a:xfrm>
           <a:prstGeom prst="rect">
             <a:avLst/>
@@ -5014,23 +5393,26 @@
           <a:p>
             <a:pPr marL="342900" indent="-342900">
               <a:lnSpc>
-                <a:spcPct val="125000"/>
+                <a:spcPct val="130000"/>
               </a:lnSpc>
               <a:spcAft>
-                <a:spcPts val="800"/>
+                <a:spcPts val="1100"/>
               </a:spcAft>
               <a:buSzPct val="100000"/>
-              <a:buChar char="•"/>
+              <a:buChar char="–"/>
             </a:pPr>
             <a:r>
-              <a:rPr lang="en-US" sz="1700" dirty="0">
-                <a:solidFill>
-                  <a:srgbClr val="374151"/>
-                </a:solidFill>
+              <a:rPr lang="en-US" sz="1650" dirty="0">
+                <a:solidFill>
+                  <a:srgbClr val="23282E"/>
+                </a:solidFill>
+                <a:latin typeface="Corbel" pitchFamily="34" charset="0"/>
+                <a:ea typeface="Corbel" pitchFamily="34" charset="-122"/>
+                <a:cs typeface="Corbel" pitchFamily="34" charset="-120"/>
               </a:rPr>
               <a:t>Confounder — A variable associated with both exposure and outcome that can produce a spurious association.</a:t>
             </a:r>
-            <a:endParaRPr lang="en-US" sz="1700" dirty="0"/>
+            <a:endParaRPr lang="en-US" sz="1650" dirty="0"/>
           </a:p>
         </p:txBody>
       </p:sp>
@@ -5046,8 +5428,8 @@
         </p:nvSpPr>
         <p:spPr>
           <a:xfrm>
-            <a:off x="8503920" y="4709160"/>
-            <a:ext cx="800000" cy="300000"/>
+            <a:off x="566928" y="4700016"/>
+            <a:ext cx="914400" cy="274320"/>
           </a:xfrm>
           <a:prstGeom prst="rect">
             <a:avLst/>
@@ -5062,10 +5444,13 @@
           <a:bodyPr/>
           <a:lstStyle>
             <a:lvl1pPr>
-              <a:defRPr sz="1000">
-                <a:solidFill>
-                  <a:srgbClr val="6B7280"/>
-                </a:solidFill>
+              <a:defRPr sz="900">
+                <a:solidFill>
+                  <a:srgbClr val="5F6B76"/>
+                </a:solidFill>
+                <a:latin typeface="Corbel"/>
+                <a:ea typeface="Corbel"/>
+                <a:cs typeface="Corbel"/>
               </a:defRPr>
             </a:lvl1pPr>
           </a:lstStyle>
@@ -5112,8 +5497,8 @@
         </p:nvSpPr>
         <p:spPr>
           <a:xfrm>
-            <a:off x="502920" y="292608"/>
-            <a:ext cx="8046720" cy="228600"/>
+            <a:off x="685800" y="1024128"/>
+            <a:ext cx="6766560" cy="292608"/>
           </a:xfrm>
           <a:prstGeom prst="rect">
             <a:avLst/>
@@ -5129,14 +5514,17 @@
               <a:buNone/>
             </a:pPr>
             <a:r>
-              <a:rPr lang="en-US" sz="1100" b="1" spc="150" kern="0" dirty="0">
-                <a:solidFill>
-                  <a:srgbClr val="0066CC"/>
-                </a:solidFill>
+              <a:rPr lang="en-US" sz="1150" spc="240" kern="0" dirty="0">
+                <a:solidFill>
+                  <a:srgbClr val="C8A67B"/>
+                </a:solidFill>
+                <a:latin typeface="Corbel" pitchFamily="34" charset="0"/>
+                <a:ea typeface="Corbel" pitchFamily="34" charset="-122"/>
+                <a:cs typeface="Corbel" pitchFamily="34" charset="-120"/>
               </a:rPr>
-              <a:t>UNIT 2  ·  OVER TO YOU</a:t>
-            </a:r>
-            <a:endParaRPr lang="en-US" sz="1100" dirty="0"/>
+              <a:t>Over to you</a:t>
+            </a:r>
+            <a:endParaRPr lang="en-US" sz="1150" dirty="0"/>
           </a:p>
         </p:txBody>
       </p:sp>
@@ -5148,8 +5536,8 @@
         </p:nvSpPr>
         <p:spPr>
           <a:xfrm>
-            <a:off x="502920" y="548640"/>
-            <a:ext cx="8046720" cy="640080"/>
+            <a:off x="685800" y="1700784"/>
+            <a:ext cx="6858000" cy="640080"/>
           </a:xfrm>
           <a:prstGeom prst="rect">
             <a:avLst/>
@@ -5165,14 +5553,17 @@
               <a:buNone/>
             </a:pPr>
             <a:r>
-              <a:rPr lang="en-US" sz="2400" b="1" dirty="0">
-                <a:solidFill>
-                  <a:srgbClr val="111827"/>
-                </a:solidFill>
+              <a:rPr lang="en-US" sz="3000" dirty="0">
+                <a:solidFill>
+                  <a:srgbClr val="FFFFFF"/>
+                </a:solidFill>
+                <a:latin typeface="Constantia" pitchFamily="34" charset="0"/>
+                <a:ea typeface="Constantia" pitchFamily="34" charset="-122"/>
+                <a:cs typeface="Constantia" pitchFamily="34" charset="-120"/>
               </a:rPr>
               <a:t>Activity</a:t>
             </a:r>
-            <a:endParaRPr lang="en-US" sz="2400" dirty="0"/>
+            <a:endParaRPr lang="en-US" sz="3000" dirty="0"/>
           </a:p>
         </p:txBody>
       </p:sp>
@@ -5184,8 +5575,8 @@
         </p:nvSpPr>
         <p:spPr>
           <a:xfrm>
-            <a:off x="685800" y="1325880"/>
-            <a:ext cx="7772400" cy="3200400"/>
+            <a:off x="685800" y="2487168"/>
+            <a:ext cx="6949440" cy="1737360"/>
           </a:xfrm>
           <a:prstGeom prst="rect">
             <a:avLst/>
@@ -5197,70 +5588,24 @@
           <a:bodyPr wrap="square" rtlCol="0" anchor="t"/>
           <a:lstStyle/>
           <a:p>
-            <a:pPr marL="342900" indent="-342900">
+            <a:pPr indent="0" marL="0">
               <a:lnSpc>
-                <a:spcPct val="125000"/>
+                <a:spcPct val="134000"/>
               </a:lnSpc>
-              <a:spcAft>
-                <a:spcPts val="800"/>
-              </a:spcAft>
-              <a:buSzPct val="100000"/>
-              <a:buChar char="•"/>
+              <a:buNone/>
             </a:pPr>
             <a:r>
-              <a:rPr lang="en-US" sz="1300" dirty="0">
-                <a:solidFill>
-                  <a:srgbClr val="374151"/>
-                </a:solidFill>
+              <a:rPr lang="en-US" sz="1450" dirty="0">
+                <a:solidFill>
+                  <a:srgbClr val="C4CCD4"/>
+                </a:solidFill>
+                <a:latin typeface="Corbel" pitchFamily="34" charset="0"/>
+                <a:ea typeface="Corbel" pitchFamily="34" charset="-122"/>
+                <a:cs typeface="Corbel" pitchFamily="34" charset="-120"/>
               </a:rPr>
               <a:t>Write a one-paragraph problem statement and one research question for your own study. Exchange with a partner, who must identify the gap type and name the analysis your question implies. If they cannot, revise it.</a:t>
             </a:r>
-            <a:endParaRPr lang="en-US" sz="1300" dirty="0"/>
-          </a:p>
-        </p:txBody>
-      </p:sp>
-      <p:sp>
-        <p:nvSpPr>
-          <p:cNvPr id="25" name="Slide Number Placeholder 0"/>
-          <p:cNvSpPr>
-            <a:spLocks noGrp="1"/>
-          </p:cNvSpPr>
-          <p:nvPr>
-            <p:ph type="sldNum" sz="quarter" idx="4294967295"/>
-          </p:nvPr>
-        </p:nvSpPr>
-        <p:spPr>
-          <a:xfrm>
-            <a:off x="8503920" y="4709160"/>
-            <a:ext cx="800000" cy="300000"/>
-          </a:xfrm>
-          <a:prstGeom prst="rect">
-            <a:avLst/>
-          </a:prstGeom>
-          <a:extLst>
-            <a:ext uri="{C572A759-6A51-4108-AA02-DFA0A04FC94B}">
-              <ma14:wrappingTextBoxFlag xmlns:ma14="http://schemas.microsoft.com/office/mac/drawingml/2011/main" val="0"/>
-            </a:ext>
-          </a:extLst>
-        </p:spPr>
-        <p:txBody>
-          <a:bodyPr/>
-          <a:lstStyle>
-            <a:lvl1pPr>
-              <a:defRPr sz="1000">
-                <a:solidFill>
-                  <a:srgbClr val="6B7280"/>
-                </a:solidFill>
-              </a:defRPr>
-            </a:lvl1pPr>
-          </a:lstStyle>
-          <a:p>
-            <a:pPr algn="l"/>
-            <a:fld id="{F7021451-1387-4CA6-816F-3879F97B5CBC}" type="slidenum">
-              <a:rPr b="0" lang="en-US"/>
-              <a:t>19</a:t>
-            </a:fld>
-            <a:endParaRPr lang="en-US"/>
+            <a:endParaRPr lang="en-US" sz="1450" dirty="0"/>
           </a:p>
         </p:txBody>
       </p:sp>
@@ -5297,8 +5642,8 @@
         </p:nvSpPr>
         <p:spPr>
           <a:xfrm>
-            <a:off x="502920" y="292608"/>
-            <a:ext cx="8046720" cy="228600"/>
+            <a:off x="566928" y="384048"/>
+            <a:ext cx="7772400" cy="237744"/>
           </a:xfrm>
           <a:prstGeom prst="rect">
             <a:avLst/>
@@ -5314,14 +5659,17 @@
               <a:buNone/>
             </a:pPr>
             <a:r>
-              <a:rPr lang="en-US" sz="1100" b="1" spc="150" kern="0" dirty="0">
-                <a:solidFill>
-                  <a:srgbClr val="0066CC"/>
-                </a:solidFill>
+              <a:rPr lang="en-US" sz="1000" spc="200" kern="0" dirty="0">
+                <a:solidFill>
+                  <a:srgbClr val="9A6A3C"/>
+                </a:solidFill>
+                <a:latin typeface="Corbel" pitchFamily="34" charset="0"/>
+                <a:ea typeface="Corbel" pitchFamily="34" charset="-122"/>
+                <a:cs typeface="Corbel" pitchFamily="34" charset="-120"/>
               </a:rPr>
               <a:t>UNIT 2</a:t>
             </a:r>
-            <a:endParaRPr lang="en-US" sz="1100" dirty="0"/>
+            <a:endParaRPr lang="en-US" sz="1000" dirty="0"/>
           </a:p>
         </p:txBody>
       </p:sp>
@@ -5333,8 +5681,8 @@
         </p:nvSpPr>
         <p:spPr>
           <a:xfrm>
-            <a:off x="502920" y="548640"/>
-            <a:ext cx="8046720" cy="640080"/>
+            <a:off x="566928" y="658368"/>
+            <a:ext cx="7772400" cy="658368"/>
           </a:xfrm>
           <a:prstGeom prst="rect">
             <a:avLst/>
@@ -5347,30 +5695,56 @@
           <a:lstStyle/>
           <a:p>
             <a:pPr indent="0" marL="0">
+              <a:lnSpc>
+                <a:spcPct val="100000"/>
+              </a:lnSpc>
               <a:buNone/>
             </a:pPr>
             <a:r>
-              <a:rPr lang="en-US" sz="2400" b="1" dirty="0">
-                <a:solidFill>
-                  <a:srgbClr val="111827"/>
-                </a:solidFill>
+              <a:rPr lang="en-US" sz="2500" dirty="0">
+                <a:solidFill>
+                  <a:srgbClr val="1C3140"/>
+                </a:solidFill>
+                <a:latin typeface="Constantia" pitchFamily="34" charset="0"/>
+                <a:ea typeface="Constantia" pitchFamily="34" charset="-122"/>
+                <a:cs typeface="Constantia" pitchFamily="34" charset="-120"/>
               </a:rPr>
               <a:t>What you will be able to do</a:t>
             </a:r>
-            <a:endParaRPr lang="en-US" sz="2400" dirty="0"/>
-          </a:p>
-        </p:txBody>
-      </p:sp>
-      <p:sp>
-        <p:nvSpPr>
-          <p:cNvPr id="4" name="Text 2"/>
+            <a:endParaRPr lang="en-US" sz="2500" dirty="0"/>
+          </a:p>
+        </p:txBody>
+      </p:sp>
+      <p:sp>
+        <p:nvSpPr>
+          <p:cNvPr id="4" name="Shape 2"/>
           <p:cNvSpPr/>
           <p:nvPr/>
         </p:nvSpPr>
         <p:spPr>
           <a:xfrm>
-            <a:off x="685800" y="1325880"/>
-            <a:ext cx="7772400" cy="3200400"/>
+            <a:off x="566928" y="1335024"/>
+            <a:ext cx="566928" cy="20117"/>
+          </a:xfrm>
+          <a:prstGeom prst="rect">
+            <a:avLst/>
+          </a:prstGeom>
+          <a:solidFill>
+            <a:srgbClr val="9A6A3C"/>
+          </a:solidFill>
+          <a:ln/>
+        </p:spPr>
+      </p:sp>
+      <p:sp>
+        <p:nvSpPr>
+          <p:cNvPr id="5" name="Text 3"/>
+          <p:cNvSpPr/>
+          <p:nvPr/>
+        </p:nvSpPr>
+        <p:spPr>
+          <a:xfrm>
+            <a:off x="713232" y="1664208"/>
+            <a:ext cx="7498080" cy="2788920"/>
           </a:xfrm>
           <a:prstGeom prst="rect">
             <a:avLst/>
@@ -5384,19 +5758,22 @@
           <a:p>
             <a:pPr marL="342900" indent="-342900">
               <a:lnSpc>
-                <a:spcPct val="125000"/>
+                <a:spcPct val="130000"/>
               </a:lnSpc>
               <a:spcAft>
-                <a:spcPts val="800"/>
+                <a:spcPts val="1100"/>
               </a:spcAft>
               <a:buSzPct val="100000"/>
-              <a:buChar char="•"/>
+              <a:buChar char="–"/>
             </a:pPr>
             <a:r>
               <a:rPr lang="en-US" sz="1800" dirty="0">
                 <a:solidFill>
-                  <a:srgbClr val="374151"/>
-                </a:solidFill>
+                  <a:srgbClr val="23282E"/>
+                </a:solidFill>
+                <a:latin typeface="Corbel" pitchFamily="34" charset="0"/>
+                <a:ea typeface="Corbel" pitchFamily="34" charset="-122"/>
+                <a:cs typeface="Corbel" pitchFamily="34" charset="-120"/>
               </a:rPr>
               <a:t>Write a problem statement that establishes magnitude, consequence and gap</a:t>
             </a:r>
@@ -5405,19 +5782,22 @@
           <a:p>
             <a:pPr marL="342900" indent="-342900">
               <a:lnSpc>
-                <a:spcPct val="125000"/>
+                <a:spcPct val="130000"/>
               </a:lnSpc>
               <a:spcAft>
-                <a:spcPts val="800"/>
+                <a:spcPts val="1100"/>
               </a:spcAft>
               <a:buSzPct val="100000"/>
-              <a:buChar char="•"/>
+              <a:buChar char="–"/>
             </a:pPr>
             <a:r>
               <a:rPr lang="en-US" sz="1800" dirty="0">
                 <a:solidFill>
-                  <a:srgbClr val="374151"/>
-                </a:solidFill>
+                  <a:srgbClr val="23282E"/>
+                </a:solidFill>
+                <a:latin typeface="Corbel" pitchFamily="34" charset="0"/>
+                <a:ea typeface="Corbel" pitchFamily="34" charset="-122"/>
+                <a:cs typeface="Corbel" pitchFamily="34" charset="-120"/>
               </a:rPr>
               <a:t>Convert a broad topic into a focused, answerable research question</a:t>
             </a:r>
@@ -5426,19 +5806,22 @@
           <a:p>
             <a:pPr marL="342900" indent="-342900">
               <a:lnSpc>
-                <a:spcPct val="125000"/>
+                <a:spcPct val="130000"/>
               </a:lnSpc>
               <a:spcAft>
-                <a:spcPts val="800"/>
+                <a:spcPts val="1100"/>
               </a:spcAft>
               <a:buSzPct val="100000"/>
-              <a:buChar char="•"/>
+              <a:buChar char="–"/>
             </a:pPr>
             <a:r>
               <a:rPr lang="en-US" sz="1800" dirty="0">
                 <a:solidFill>
-                  <a:srgbClr val="374151"/>
-                </a:solidFill>
+                  <a:srgbClr val="23282E"/>
+                </a:solidFill>
+                <a:latin typeface="Corbel" pitchFamily="34" charset="0"/>
+                <a:ea typeface="Corbel" pitchFamily="34" charset="-122"/>
+                <a:cs typeface="Corbel" pitchFamily="34" charset="-120"/>
               </a:rPr>
               <a:t>Apply FINER and PICO to test whether a question is worth asking</a:t>
             </a:r>
@@ -5447,19 +5830,22 @@
           <a:p>
             <a:pPr marL="342900" indent="-342900">
               <a:lnSpc>
-                <a:spcPct val="125000"/>
+                <a:spcPct val="130000"/>
               </a:lnSpc>
               <a:spcAft>
-                <a:spcPts val="800"/>
+                <a:spcPts val="1100"/>
               </a:spcAft>
               <a:buSzPct val="100000"/>
-              <a:buChar char="•"/>
+              <a:buChar char="–"/>
             </a:pPr>
             <a:r>
               <a:rPr lang="en-US" sz="1800" dirty="0">
                 <a:solidFill>
-                  <a:srgbClr val="374151"/>
-                </a:solidFill>
+                  <a:srgbClr val="23282E"/>
+                </a:solidFill>
+                <a:latin typeface="Corbel" pitchFamily="34" charset="0"/>
+                <a:ea typeface="Corbel" pitchFamily="34" charset="-122"/>
+                <a:cs typeface="Corbel" pitchFamily="34" charset="-120"/>
               </a:rPr>
               <a:t>Distinguish aims, objectives, research questions and hypotheses</a:t>
             </a:r>
@@ -5468,19 +5854,22 @@
           <a:p>
             <a:pPr marL="342900" indent="-342900">
               <a:lnSpc>
-                <a:spcPct val="125000"/>
+                <a:spcPct val="130000"/>
               </a:lnSpc>
               <a:spcAft>
-                <a:spcPts val="800"/>
+                <a:spcPts val="1100"/>
               </a:spcAft>
               <a:buSzPct val="100000"/>
-              <a:buChar char="•"/>
+              <a:buChar char="–"/>
             </a:pPr>
             <a:r>
               <a:rPr lang="en-US" sz="1800" dirty="0">
                 <a:solidFill>
-                  <a:srgbClr val="374151"/>
-                </a:solidFill>
+                  <a:srgbClr val="23282E"/>
+                </a:solidFill>
+                <a:latin typeface="Corbel" pitchFamily="34" charset="0"/>
+                <a:ea typeface="Corbel" pitchFamily="34" charset="-122"/>
+                <a:cs typeface="Corbel" pitchFamily="34" charset="-120"/>
               </a:rPr>
               <a:t>Draw a conceptual framework linking your key variables or concepts</a:t>
             </a:r>
@@ -5500,8 +5889,8 @@
         </p:nvSpPr>
         <p:spPr>
           <a:xfrm>
-            <a:off x="8503920" y="4709160"/>
-            <a:ext cx="800000" cy="300000"/>
+            <a:off x="566928" y="4700016"/>
+            <a:ext cx="914400" cy="274320"/>
           </a:xfrm>
           <a:prstGeom prst="rect">
             <a:avLst/>
@@ -5516,10 +5905,13 @@
           <a:bodyPr/>
           <a:lstStyle>
             <a:lvl1pPr>
-              <a:defRPr sz="1000">
-                <a:solidFill>
-                  <a:srgbClr val="6B7280"/>
-                </a:solidFill>
+              <a:defRPr sz="900">
+                <a:solidFill>
+                  <a:srgbClr val="5F6B76"/>
+                </a:solidFill>
+                <a:latin typeface="Corbel"/>
+                <a:ea typeface="Corbel"/>
+                <a:cs typeface="Corbel"/>
               </a:defRPr>
             </a:lvl1pPr>
           </a:lstStyle>
@@ -5566,8 +5958,8 @@
         </p:nvSpPr>
         <p:spPr>
           <a:xfrm>
-            <a:off x="502920" y="292608"/>
-            <a:ext cx="8046720" cy="228600"/>
+            <a:off x="566928" y="384048"/>
+            <a:ext cx="7772400" cy="237744"/>
           </a:xfrm>
           <a:prstGeom prst="rect">
             <a:avLst/>
@@ -5583,14 +5975,17 @@
               <a:buNone/>
             </a:pPr>
             <a:r>
-              <a:rPr lang="en-US" sz="1100" b="1" spc="150" kern="0" dirty="0">
-                <a:solidFill>
-                  <a:srgbClr val="0066CC"/>
-                </a:solidFill>
+              <a:rPr lang="en-US" sz="1000" spc="200" kern="0" dirty="0">
+                <a:solidFill>
+                  <a:srgbClr val="9A6A3C"/>
+                </a:solidFill>
+                <a:latin typeface="Corbel" pitchFamily="34" charset="0"/>
+                <a:ea typeface="Corbel" pitchFamily="34" charset="-122"/>
+                <a:cs typeface="Corbel" pitchFamily="34" charset="-120"/>
               </a:rPr>
               <a:t>UNIT 2</a:t>
             </a:r>
-            <a:endParaRPr lang="en-US" sz="1100" dirty="0"/>
+            <a:endParaRPr lang="en-US" sz="1000" dirty="0"/>
           </a:p>
         </p:txBody>
       </p:sp>
@@ -5602,8 +5997,8 @@
         </p:nvSpPr>
         <p:spPr>
           <a:xfrm>
-            <a:off x="502920" y="548640"/>
-            <a:ext cx="8046720" cy="640080"/>
+            <a:off x="566928" y="658368"/>
+            <a:ext cx="7772400" cy="658368"/>
           </a:xfrm>
           <a:prstGeom prst="rect">
             <a:avLst/>
@@ -5616,30 +6011,56 @@
           <a:lstStyle/>
           <a:p>
             <a:pPr indent="0" marL="0">
+              <a:lnSpc>
+                <a:spcPct val="100000"/>
+              </a:lnSpc>
               <a:buNone/>
             </a:pPr>
             <a:r>
-              <a:rPr lang="en-US" sz="2400" b="1" dirty="0">
-                <a:solidFill>
-                  <a:srgbClr val="111827"/>
-                </a:solidFill>
+              <a:rPr lang="en-US" sz="2500" dirty="0">
+                <a:solidFill>
+                  <a:srgbClr val="1C3140"/>
+                </a:solidFill>
+                <a:latin typeface="Constantia" pitchFamily="34" charset="0"/>
+                <a:ea typeface="Constantia" pitchFamily="34" charset="-122"/>
+                <a:cs typeface="Constantia" pitchFamily="34" charset="-120"/>
               </a:rPr>
               <a:t>The problem statement (1/2)</a:t>
             </a:r>
-            <a:endParaRPr lang="en-US" sz="2400" dirty="0"/>
-          </a:p>
-        </p:txBody>
-      </p:sp>
-      <p:sp>
-        <p:nvSpPr>
-          <p:cNvPr id="4" name="Text 2"/>
+            <a:endParaRPr lang="en-US" sz="2500" dirty="0"/>
+          </a:p>
+        </p:txBody>
+      </p:sp>
+      <p:sp>
+        <p:nvSpPr>
+          <p:cNvPr id="4" name="Shape 2"/>
           <p:cNvSpPr/>
           <p:nvPr/>
         </p:nvSpPr>
         <p:spPr>
           <a:xfrm>
-            <a:off x="685800" y="1325880"/>
-            <a:ext cx="7772400" cy="3200400"/>
+            <a:off x="566928" y="1335024"/>
+            <a:ext cx="566928" cy="20117"/>
+          </a:xfrm>
+          <a:prstGeom prst="rect">
+            <a:avLst/>
+          </a:prstGeom>
+          <a:solidFill>
+            <a:srgbClr val="9A6A3C"/>
+          </a:solidFill>
+          <a:ln/>
+        </p:spPr>
+      </p:sp>
+      <p:sp>
+        <p:nvSpPr>
+          <p:cNvPr id="5" name="Text 3"/>
+          <p:cNvSpPr/>
+          <p:nvPr/>
+        </p:nvSpPr>
+        <p:spPr>
+          <a:xfrm>
+            <a:off x="713232" y="1664208"/>
+            <a:ext cx="7498080" cy="2788920"/>
           </a:xfrm>
           <a:prstGeom prst="rect">
             <a:avLst/>
@@ -5653,19 +6074,22 @@
           <a:p>
             <a:pPr marL="342900" indent="-342900">
               <a:lnSpc>
-                <a:spcPct val="125000"/>
+                <a:spcPct val="130000"/>
               </a:lnSpc>
               <a:spcAft>
-                <a:spcPts val="800"/>
+                <a:spcPts val="1100"/>
               </a:spcAft>
               <a:buSzPct val="100000"/>
-              <a:buChar char="•"/>
+              <a:buChar char="–"/>
             </a:pPr>
             <a:r>
               <a:rPr lang="en-US" sz="1500" dirty="0">
                 <a:solidFill>
-                  <a:srgbClr val="374151"/>
-                </a:solidFill>
+                  <a:srgbClr val="23282E"/>
+                </a:solidFill>
+                <a:latin typeface="Corbel" pitchFamily="34" charset="0"/>
+                <a:ea typeface="Corbel" pitchFamily="34" charset="-122"/>
+                <a:cs typeface="Corbel" pitchFamily="34" charset="-120"/>
               </a:rPr>
               <a:t>A problem statement answers four things in order: what is the problem, how big is it, what follows if it is not addressed, and what is not yet known</a:t>
             </a:r>
@@ -5674,19 +6098,22 @@
           <a:p>
             <a:pPr marL="342900" indent="-342900">
               <a:lnSpc>
-                <a:spcPct val="125000"/>
+                <a:spcPct val="130000"/>
               </a:lnSpc>
               <a:spcAft>
-                <a:spcPts val="800"/>
+                <a:spcPts val="1100"/>
               </a:spcAft>
               <a:buSzPct val="100000"/>
-              <a:buChar char="•"/>
+              <a:buChar char="–"/>
             </a:pPr>
             <a:r>
               <a:rPr lang="en-US" sz="1500" dirty="0">
                 <a:solidFill>
-                  <a:srgbClr val="374151"/>
-                </a:solidFill>
+                  <a:srgbClr val="23282E"/>
+                </a:solidFill>
+                <a:latin typeface="Corbel" pitchFamily="34" charset="0"/>
+                <a:ea typeface="Corbel" pitchFamily="34" charset="-122"/>
+                <a:cs typeface="Corbel" pitchFamily="34" charset="-120"/>
               </a:rPr>
               <a:t>Magnitude needs evidence — prevalence, incidence, cost, or documented reports, each cited</a:t>
             </a:r>
@@ -5695,19 +6122,22 @@
           <a:p>
             <a:pPr marL="342900" indent="-342900">
               <a:lnSpc>
-                <a:spcPct val="125000"/>
+                <a:spcPct val="130000"/>
               </a:lnSpc>
               <a:spcAft>
-                <a:spcPts val="800"/>
+                <a:spcPts val="1100"/>
               </a:spcAft>
               <a:buSzPct val="100000"/>
-              <a:buChar char="•"/>
+              <a:buChar char="–"/>
             </a:pPr>
             <a:r>
               <a:rPr lang="en-US" sz="1500" dirty="0">
                 <a:solidFill>
-                  <a:srgbClr val="374151"/>
-                </a:solidFill>
+                  <a:srgbClr val="23282E"/>
+                </a:solidFill>
+                <a:latin typeface="Corbel" pitchFamily="34" charset="0"/>
+                <a:ea typeface="Corbel" pitchFamily="34" charset="-122"/>
+                <a:cs typeface="Corbel" pitchFamily="34" charset="-120"/>
               </a:rPr>
               <a:t>The gap is the pivot of the whole proposal: it must be a gap in knowledge, not merely a gap in your own reading</a:t>
             </a:r>
@@ -5727,8 +6157,8 @@
         </p:nvSpPr>
         <p:spPr>
           <a:xfrm>
-            <a:off x="8503920" y="4709160"/>
-            <a:ext cx="800000" cy="300000"/>
+            <a:off x="566928" y="4700016"/>
+            <a:ext cx="914400" cy="274320"/>
           </a:xfrm>
           <a:prstGeom prst="rect">
             <a:avLst/>
@@ -5743,10 +6173,13 @@
           <a:bodyPr/>
           <a:lstStyle>
             <a:lvl1pPr>
-              <a:defRPr sz="1000">
-                <a:solidFill>
-                  <a:srgbClr val="6B7280"/>
-                </a:solidFill>
+              <a:defRPr sz="900">
+                <a:solidFill>
+                  <a:srgbClr val="5F6B76"/>
+                </a:solidFill>
+                <a:latin typeface="Corbel"/>
+                <a:ea typeface="Corbel"/>
+                <a:cs typeface="Corbel"/>
               </a:defRPr>
             </a:lvl1pPr>
           </a:lstStyle>
@@ -5793,8 +6226,8 @@
         </p:nvSpPr>
         <p:spPr>
           <a:xfrm>
-            <a:off x="502920" y="292608"/>
-            <a:ext cx="8046720" cy="228600"/>
+            <a:off x="566928" y="384048"/>
+            <a:ext cx="7772400" cy="237744"/>
           </a:xfrm>
           <a:prstGeom prst="rect">
             <a:avLst/>
@@ -5810,14 +6243,17 @@
               <a:buNone/>
             </a:pPr>
             <a:r>
-              <a:rPr lang="en-US" sz="1100" b="1" spc="150" kern="0" dirty="0">
-                <a:solidFill>
-                  <a:srgbClr val="0066CC"/>
-                </a:solidFill>
+              <a:rPr lang="en-US" sz="1000" spc="200" kern="0" dirty="0">
+                <a:solidFill>
+                  <a:srgbClr val="9A6A3C"/>
+                </a:solidFill>
+                <a:latin typeface="Corbel" pitchFamily="34" charset="0"/>
+                <a:ea typeface="Corbel" pitchFamily="34" charset="-122"/>
+                <a:cs typeface="Corbel" pitchFamily="34" charset="-120"/>
               </a:rPr>
               <a:t>UNIT 2</a:t>
             </a:r>
-            <a:endParaRPr lang="en-US" sz="1100" dirty="0"/>
+            <a:endParaRPr lang="en-US" sz="1000" dirty="0"/>
           </a:p>
         </p:txBody>
       </p:sp>
@@ -5829,8 +6265,8 @@
         </p:nvSpPr>
         <p:spPr>
           <a:xfrm>
-            <a:off x="502920" y="548640"/>
-            <a:ext cx="8046720" cy="640080"/>
+            <a:off x="566928" y="658368"/>
+            <a:ext cx="7772400" cy="658368"/>
           </a:xfrm>
           <a:prstGeom prst="rect">
             <a:avLst/>
@@ -5843,30 +6279,56 @@
           <a:lstStyle/>
           <a:p>
             <a:pPr indent="0" marL="0">
+              <a:lnSpc>
+                <a:spcPct val="100000"/>
+              </a:lnSpc>
               <a:buNone/>
             </a:pPr>
             <a:r>
-              <a:rPr lang="en-US" sz="2400" b="1" dirty="0">
-                <a:solidFill>
-                  <a:srgbClr val="111827"/>
-                </a:solidFill>
+              <a:rPr lang="en-US" sz="2500" dirty="0">
+                <a:solidFill>
+                  <a:srgbClr val="1C3140"/>
+                </a:solidFill>
+                <a:latin typeface="Constantia" pitchFamily="34" charset="0"/>
+                <a:ea typeface="Constantia" pitchFamily="34" charset="-122"/>
+                <a:cs typeface="Constantia" pitchFamily="34" charset="-120"/>
               </a:rPr>
               <a:t>The problem statement (2/2)</a:t>
             </a:r>
-            <a:endParaRPr lang="en-US" sz="2400" dirty="0"/>
-          </a:p>
-        </p:txBody>
-      </p:sp>
-      <p:sp>
-        <p:nvSpPr>
-          <p:cNvPr id="4" name="Text 2"/>
+            <a:endParaRPr lang="en-US" sz="2500" dirty="0"/>
+          </a:p>
+        </p:txBody>
+      </p:sp>
+      <p:sp>
+        <p:nvSpPr>
+          <p:cNvPr id="4" name="Shape 2"/>
           <p:cNvSpPr/>
           <p:nvPr/>
         </p:nvSpPr>
         <p:spPr>
           <a:xfrm>
-            <a:off x="685800" y="1325880"/>
-            <a:ext cx="7772400" cy="3200400"/>
+            <a:off x="566928" y="1335024"/>
+            <a:ext cx="566928" cy="20117"/>
+          </a:xfrm>
+          <a:prstGeom prst="rect">
+            <a:avLst/>
+          </a:prstGeom>
+          <a:solidFill>
+            <a:srgbClr val="9A6A3C"/>
+          </a:solidFill>
+          <a:ln/>
+        </p:spPr>
+      </p:sp>
+      <p:sp>
+        <p:nvSpPr>
+          <p:cNvPr id="5" name="Text 3"/>
+          <p:cNvSpPr/>
+          <p:nvPr/>
+        </p:nvSpPr>
+        <p:spPr>
+          <a:xfrm>
+            <a:off x="713232" y="1664208"/>
+            <a:ext cx="7498080" cy="2788920"/>
           </a:xfrm>
           <a:prstGeom prst="rect">
             <a:avLst/>
@@ -5880,44 +6342,50 @@
           <a:p>
             <a:pPr marL="342900" indent="-342900">
               <a:lnSpc>
-                <a:spcPct val="125000"/>
+                <a:spcPct val="130000"/>
               </a:lnSpc>
               <a:spcAft>
-                <a:spcPts val="800"/>
+                <a:spcPts val="1100"/>
               </a:spcAft>
               <a:buSzPct val="100000"/>
-              <a:buChar char="•"/>
+              <a:buChar char="–"/>
             </a:pPr>
             <a:r>
-              <a:rPr lang="en-US" sz="1300" dirty="0">
-                <a:solidFill>
-                  <a:srgbClr val="374151"/>
-                </a:solidFill>
+              <a:rPr lang="en-US" sz="1350" dirty="0">
+                <a:solidFill>
+                  <a:srgbClr val="23282E"/>
+                </a:solidFill>
+                <a:latin typeface="Corbel" pitchFamily="34" charset="0"/>
+                <a:ea typeface="Corbel" pitchFamily="34" charset="-122"/>
+                <a:cs typeface="Corbel" pitchFamily="34" charset="-120"/>
               </a:rPr>
               <a:t>A gap can be empirical (nobody has measured this), methodological (measured badly), theoretical (no adequate explanation) or contextual (established elsewhere but never tested here)</a:t>
             </a:r>
-            <a:endParaRPr lang="en-US" sz="1300" dirty="0"/>
+            <a:endParaRPr lang="en-US" sz="1350" dirty="0"/>
           </a:p>
           <a:p>
             <a:pPr marL="342900" indent="-342900">
               <a:lnSpc>
-                <a:spcPct val="125000"/>
+                <a:spcPct val="130000"/>
               </a:lnSpc>
               <a:spcAft>
-                <a:spcPts val="800"/>
+                <a:spcPts val="1100"/>
               </a:spcAft>
               <a:buSzPct val="100000"/>
-              <a:buChar char="•"/>
+              <a:buChar char="–"/>
             </a:pPr>
             <a:r>
-              <a:rPr lang="en-US" sz="1300" dirty="0">
-                <a:solidFill>
-                  <a:srgbClr val="374151"/>
-                </a:solidFill>
+              <a:rPr lang="en-US" sz="1350" dirty="0">
+                <a:solidFill>
+                  <a:srgbClr val="23282E"/>
+                </a:solidFill>
+                <a:latin typeface="Corbel" pitchFamily="34" charset="0"/>
+                <a:ea typeface="Corbel" pitchFamily="34" charset="-122"/>
+                <a:cs typeface="Corbel" pitchFamily="34" charset="-120"/>
               </a:rPr>
               <a:t>Contextual gaps are legitimate and are often the strongest basis for research in Ghana and across Africa</a:t>
             </a:r>
-            <a:endParaRPr lang="en-US" sz="1300" dirty="0"/>
+            <a:endParaRPr lang="en-US" sz="1350" dirty="0"/>
           </a:p>
         </p:txBody>
       </p:sp>
@@ -5933,8 +6401,8 @@
         </p:nvSpPr>
         <p:spPr>
           <a:xfrm>
-            <a:off x="8503920" y="4709160"/>
-            <a:ext cx="800000" cy="300000"/>
+            <a:off x="566928" y="4700016"/>
+            <a:ext cx="914400" cy="274320"/>
           </a:xfrm>
           <a:prstGeom prst="rect">
             <a:avLst/>
@@ -5949,10 +6417,13 @@
           <a:bodyPr/>
           <a:lstStyle>
             <a:lvl1pPr>
-              <a:defRPr sz="1000">
-                <a:solidFill>
-                  <a:srgbClr val="6B7280"/>
-                </a:solidFill>
+              <a:defRPr sz="900">
+                <a:solidFill>
+                  <a:srgbClr val="5F6B76"/>
+                </a:solidFill>
+                <a:latin typeface="Corbel"/>
+                <a:ea typeface="Corbel"/>
+                <a:cs typeface="Corbel"/>
               </a:defRPr>
             </a:lvl1pPr>
           </a:lstStyle>
@@ -5999,8 +6470,8 @@
         </p:nvSpPr>
         <p:spPr>
           <a:xfrm>
-            <a:off x="502920" y="292608"/>
-            <a:ext cx="8046720" cy="228600"/>
+            <a:off x="566928" y="384048"/>
+            <a:ext cx="7772400" cy="237744"/>
           </a:xfrm>
           <a:prstGeom prst="rect">
             <a:avLst/>
@@ -6016,14 +6487,17 @@
               <a:buNone/>
             </a:pPr>
             <a:r>
-              <a:rPr lang="en-US" sz="1100" b="1" spc="150" kern="0" dirty="0">
-                <a:solidFill>
-                  <a:srgbClr val="00A86B"/>
-                </a:solidFill>
+              <a:rPr lang="en-US" sz="1000" spc="200" kern="0" dirty="0">
+                <a:solidFill>
+                  <a:srgbClr val="9A6A3C"/>
+                </a:solidFill>
+                <a:latin typeface="Corbel" pitchFamily="34" charset="0"/>
+                <a:ea typeface="Corbel" pitchFamily="34" charset="-122"/>
+                <a:cs typeface="Corbel" pitchFamily="34" charset="-120"/>
               </a:rPr>
               <a:t>UNIT 2</a:t>
             </a:r>
-            <a:endParaRPr lang="en-US" sz="1100" dirty="0"/>
+            <a:endParaRPr lang="en-US" sz="1000" dirty="0"/>
           </a:p>
         </p:txBody>
       </p:sp>
@@ -6035,8 +6509,8 @@
         </p:nvSpPr>
         <p:spPr>
           <a:xfrm>
-            <a:off x="502920" y="548640"/>
-            <a:ext cx="8046720" cy="548640"/>
+            <a:off x="566928" y="658368"/>
+            <a:ext cx="7772400" cy="658368"/>
           </a:xfrm>
           <a:prstGeom prst="rect">
             <a:avLst/>
@@ -6045,21 +6519,27 @@
           <a:ln/>
         </p:spPr>
         <p:txBody>
-          <a:bodyPr wrap="square" rtlCol="0" anchor="ctr"/>
+          <a:bodyPr wrap="square" rtlCol="0" anchor="t"/>
           <a:lstStyle/>
           <a:p>
             <a:pPr indent="0" marL="0">
+              <a:lnSpc>
+                <a:spcPct val="100000"/>
+              </a:lnSpc>
               <a:buNone/>
             </a:pPr>
             <a:r>
-              <a:rPr lang="en-US" sz="2400" b="1" dirty="0">
-                <a:solidFill>
-                  <a:srgbClr val="111827"/>
-                </a:solidFill>
+              <a:rPr lang="en-US" sz="2500" dirty="0">
+                <a:solidFill>
+                  <a:srgbClr val="1C3140"/>
+                </a:solidFill>
+                <a:latin typeface="Constantia" pitchFamily="34" charset="0"/>
+                <a:ea typeface="Constantia" pitchFamily="34" charset="-122"/>
+                <a:cs typeface="Constantia" pitchFamily="34" charset="-120"/>
               </a:rPr>
               <a:t>In practice</a:t>
             </a:r>
-            <a:endParaRPr lang="en-US" sz="2400" dirty="0"/>
+            <a:endParaRPr lang="en-US" sz="2500" dirty="0"/>
           </a:p>
         </p:txBody>
       </p:sp>
@@ -6071,28 +6551,48 @@
         </p:nvSpPr>
         <p:spPr>
           <a:xfrm>
-            <a:off x="502920" y="1280160"/>
-            <a:ext cx="54864" cy="2377440"/>
+            <a:off x="566928" y="1335024"/>
+            <a:ext cx="566928" cy="20117"/>
           </a:xfrm>
           <a:prstGeom prst="rect">
             <a:avLst/>
           </a:prstGeom>
           <a:solidFill>
-            <a:srgbClr val="00A86B"/>
+            <a:srgbClr val="9A6A3C"/>
           </a:solidFill>
           <a:ln/>
         </p:spPr>
       </p:sp>
       <p:sp>
         <p:nvSpPr>
-          <p:cNvPr id="5" name="Text 3"/>
+          <p:cNvPr id="5" name="Shape 3"/>
           <p:cNvSpPr/>
           <p:nvPr/>
         </p:nvSpPr>
         <p:spPr>
           <a:xfrm>
-            <a:off x="777240" y="1280160"/>
-            <a:ext cx="7589520" cy="2377440"/>
+            <a:off x="566928" y="1664208"/>
+            <a:ext cx="8010144" cy="2395728"/>
+          </a:xfrm>
+          <a:prstGeom prst="rect">
+            <a:avLst/>
+          </a:prstGeom>
+          <a:solidFill>
+            <a:srgbClr val="F6F4F0"/>
+          </a:solidFill>
+          <a:ln/>
+        </p:spPr>
+      </p:sp>
+      <p:sp>
+        <p:nvSpPr>
+          <p:cNvPr id="6" name="Text 4"/>
+          <p:cNvSpPr/>
+          <p:nvPr/>
+        </p:nvSpPr>
+        <p:spPr>
+          <a:xfrm>
+            <a:off x="932688" y="1847088"/>
+            <a:ext cx="7278624" cy="2029968"/>
           </a:xfrm>
           <a:prstGeom prst="rect">
             <a:avLst/>
@@ -6106,15 +6606,18 @@
           <a:p>
             <a:pPr indent="0" marL="0">
               <a:lnSpc>
-                <a:spcPct val="130000"/>
+                <a:spcPct val="132000"/>
               </a:lnSpc>
               <a:buNone/>
             </a:pPr>
             <a:r>
-              <a:rPr lang="en-US" sz="1600" dirty="0">
-                <a:solidFill>
-                  <a:srgbClr val="374151"/>
-                </a:solidFill>
+              <a:rPr lang="en-US" sz="1600" i="1" dirty="0">
+                <a:solidFill>
+                  <a:srgbClr val="1C3140"/>
+                </a:solidFill>
+                <a:latin typeface="Constantia" pitchFamily="34" charset="0"/>
+                <a:ea typeface="Constantia" pitchFamily="34" charset="-122"/>
+                <a:cs typeface="Constantia" pitchFamily="34" charset="-120"/>
               </a:rPr>
               <a:t>"No study has been done in my district" is only a gap if there is reason to expect the local answer might differ. Say why it might — different health system, different exposure, different population structure.</a:t>
             </a:r>
@@ -6134,8 +6637,8 @@
         </p:nvSpPr>
         <p:spPr>
           <a:xfrm>
-            <a:off x="8503920" y="4709160"/>
-            <a:ext cx="800000" cy="300000"/>
+            <a:off x="566928" y="4700016"/>
+            <a:ext cx="914400" cy="274320"/>
           </a:xfrm>
           <a:prstGeom prst="rect">
             <a:avLst/>
@@ -6150,10 +6653,13 @@
           <a:bodyPr/>
           <a:lstStyle>
             <a:lvl1pPr>
-              <a:defRPr sz="1000">
-                <a:solidFill>
-                  <a:srgbClr val="6B7280"/>
-                </a:solidFill>
+              <a:defRPr sz="900">
+                <a:solidFill>
+                  <a:srgbClr val="5F6B76"/>
+                </a:solidFill>
+                <a:latin typeface="Corbel"/>
+                <a:ea typeface="Corbel"/>
+                <a:cs typeface="Corbel"/>
               </a:defRPr>
             </a:lvl1pPr>
           </a:lstStyle>
@@ -6200,8 +6706,8 @@
         </p:nvSpPr>
         <p:spPr>
           <a:xfrm>
-            <a:off x="502920" y="292608"/>
-            <a:ext cx="8046720" cy="228600"/>
+            <a:off x="566928" y="384048"/>
+            <a:ext cx="7772400" cy="237744"/>
           </a:xfrm>
           <a:prstGeom prst="rect">
             <a:avLst/>
@@ -6217,14 +6723,17 @@
               <a:buNone/>
             </a:pPr>
             <a:r>
-              <a:rPr lang="en-US" sz="1100" b="1" spc="150" kern="0" dirty="0">
-                <a:solidFill>
-                  <a:srgbClr val="0066CC"/>
-                </a:solidFill>
+              <a:rPr lang="en-US" sz="1000" spc="200" kern="0" dirty="0">
+                <a:solidFill>
+                  <a:srgbClr val="9A6A3C"/>
+                </a:solidFill>
+                <a:latin typeface="Corbel" pitchFamily="34" charset="0"/>
+                <a:ea typeface="Corbel" pitchFamily="34" charset="-122"/>
+                <a:cs typeface="Corbel" pitchFamily="34" charset="-120"/>
               </a:rPr>
               <a:t>UNIT 2</a:t>
             </a:r>
-            <a:endParaRPr lang="en-US" sz="1100" dirty="0"/>
+            <a:endParaRPr lang="en-US" sz="1000" dirty="0"/>
           </a:p>
         </p:txBody>
       </p:sp>
@@ -6236,8 +6745,8 @@
         </p:nvSpPr>
         <p:spPr>
           <a:xfrm>
-            <a:off x="502920" y="548640"/>
-            <a:ext cx="8046720" cy="640080"/>
+            <a:off x="566928" y="658368"/>
+            <a:ext cx="7772400" cy="658368"/>
           </a:xfrm>
           <a:prstGeom prst="rect">
             <a:avLst/>
@@ -6250,30 +6759,56 @@
           <a:lstStyle/>
           <a:p>
             <a:pPr indent="0" marL="0">
+              <a:lnSpc>
+                <a:spcPct val="100000"/>
+              </a:lnSpc>
               <a:buNone/>
             </a:pPr>
             <a:r>
-              <a:rPr lang="en-US" sz="2400" b="1" dirty="0">
-                <a:solidFill>
-                  <a:srgbClr val="111827"/>
-                </a:solidFill>
+              <a:rPr lang="en-US" sz="2500" dirty="0">
+                <a:solidFill>
+                  <a:srgbClr val="1C3140"/>
+                </a:solidFill>
+                <a:latin typeface="Constantia" pitchFamily="34" charset="0"/>
+                <a:ea typeface="Constantia" pitchFamily="34" charset="-122"/>
+                <a:cs typeface="Constantia" pitchFamily="34" charset="-120"/>
               </a:rPr>
               <a:t>From topic to question (1/2)</a:t>
             </a:r>
-            <a:endParaRPr lang="en-US" sz="2400" dirty="0"/>
-          </a:p>
-        </p:txBody>
-      </p:sp>
-      <p:sp>
-        <p:nvSpPr>
-          <p:cNvPr id="4" name="Text 2"/>
+            <a:endParaRPr lang="en-US" sz="2500" dirty="0"/>
+          </a:p>
+        </p:txBody>
+      </p:sp>
+      <p:sp>
+        <p:nvSpPr>
+          <p:cNvPr id="4" name="Shape 2"/>
           <p:cNvSpPr/>
           <p:nvPr/>
         </p:nvSpPr>
         <p:spPr>
           <a:xfrm>
-            <a:off x="685800" y="1325880"/>
-            <a:ext cx="7772400" cy="3200400"/>
+            <a:off x="566928" y="1335024"/>
+            <a:ext cx="566928" cy="20117"/>
+          </a:xfrm>
+          <a:prstGeom prst="rect">
+            <a:avLst/>
+          </a:prstGeom>
+          <a:solidFill>
+            <a:srgbClr val="9A6A3C"/>
+          </a:solidFill>
+          <a:ln/>
+        </p:spPr>
+      </p:sp>
+      <p:sp>
+        <p:nvSpPr>
+          <p:cNvPr id="5" name="Text 3"/>
+          <p:cNvSpPr/>
+          <p:nvPr/>
+        </p:nvSpPr>
+        <p:spPr>
+          <a:xfrm>
+            <a:off x="713232" y="1664208"/>
+            <a:ext cx="7498080" cy="2788920"/>
           </a:xfrm>
           <a:prstGeom prst="rect">
             <a:avLst/>
@@ -6287,86 +6822,98 @@
           <a:p>
             <a:pPr marL="342900" indent="-342900">
               <a:lnSpc>
-                <a:spcPct val="125000"/>
+                <a:spcPct val="130000"/>
               </a:lnSpc>
               <a:spcAft>
-                <a:spcPts val="800"/>
+                <a:spcPts val="1100"/>
               </a:spcAft>
               <a:buSzPct val="100000"/>
-              <a:buChar char="•"/>
+              <a:buChar char="–"/>
             </a:pPr>
             <a:r>
-              <a:rPr lang="en-US" sz="1300" dirty="0">
-                <a:solidFill>
-                  <a:srgbClr val="374151"/>
-                </a:solidFill>
+              <a:rPr lang="en-US" sz="1350" dirty="0">
+                <a:solidFill>
+                  <a:srgbClr val="23282E"/>
+                </a:solidFill>
+                <a:latin typeface="Corbel" pitchFamily="34" charset="0"/>
+                <a:ea typeface="Corbel" pitchFamily="34" charset="-122"/>
+                <a:cs typeface="Corbel" pitchFamily="34" charset="-120"/>
               </a:rPr>
               <a:t>Narrow along four axes: population, concept or exposure, outcome, and setting or time</a:t>
             </a:r>
-            <a:endParaRPr lang="en-US" sz="1300" dirty="0"/>
+            <a:endParaRPr lang="en-US" sz="1350" dirty="0"/>
           </a:p>
           <a:p>
             <a:pPr marL="342900" indent="-342900">
               <a:lnSpc>
-                <a:spcPct val="125000"/>
+                <a:spcPct val="130000"/>
               </a:lnSpc>
               <a:spcAft>
-                <a:spcPts val="800"/>
+                <a:spcPts val="1100"/>
               </a:spcAft>
               <a:buSzPct val="100000"/>
-              <a:buChar char="•"/>
+              <a:buChar char="–"/>
             </a:pPr>
             <a:r>
-              <a:rPr lang="en-US" sz="1300" dirty="0">
-                <a:solidFill>
-                  <a:srgbClr val="374151"/>
-                </a:solidFill>
+              <a:rPr lang="en-US" sz="1350" dirty="0">
+                <a:solidFill>
+                  <a:srgbClr val="23282E"/>
+                </a:solidFill>
+                <a:latin typeface="Corbel" pitchFamily="34" charset="0"/>
+                <a:ea typeface="Corbel" pitchFamily="34" charset="-122"/>
+                <a:cs typeface="Corbel" pitchFamily="34" charset="-120"/>
               </a:rPr>
               <a:t>"Malaria in children" is a topic; "Does distance to a health facility predict delayed treatment for malaria in under-fives in the Upper East Region?" is a question</a:t>
             </a:r>
-            <a:endParaRPr lang="en-US" sz="1300" dirty="0"/>
+            <a:endParaRPr lang="en-US" sz="1350" dirty="0"/>
           </a:p>
           <a:p>
             <a:pPr marL="342900" indent="-342900">
               <a:lnSpc>
-                <a:spcPct val="125000"/>
+                <a:spcPct val="130000"/>
               </a:lnSpc>
               <a:spcAft>
-                <a:spcPts val="800"/>
+                <a:spcPts val="1100"/>
               </a:spcAft>
               <a:buSzPct val="100000"/>
-              <a:buChar char="•"/>
+              <a:buChar char="–"/>
             </a:pPr>
             <a:r>
-              <a:rPr lang="en-US" sz="1300" dirty="0">
-                <a:solidFill>
-                  <a:srgbClr val="374151"/>
-                </a:solidFill>
+              <a:rPr lang="en-US" sz="1350" dirty="0">
+                <a:solidFill>
+                  <a:srgbClr val="23282E"/>
+                </a:solidFill>
+                <a:latin typeface="Corbel" pitchFamily="34" charset="0"/>
+                <a:ea typeface="Corbel" pitchFamily="34" charset="-122"/>
+                <a:cs typeface="Corbel" pitchFamily="34" charset="-120"/>
               </a:rPr>
               <a:t>A good question is answerable with the data and time you actually have</a:t>
             </a:r>
-            <a:endParaRPr lang="en-US" sz="1300" dirty="0"/>
+            <a:endParaRPr lang="en-US" sz="1350" dirty="0"/>
           </a:p>
           <a:p>
             <a:pPr marL="342900" indent="-342900">
               <a:lnSpc>
-                <a:spcPct val="125000"/>
+                <a:spcPct val="130000"/>
               </a:lnSpc>
               <a:spcAft>
-                <a:spcPts val="800"/>
+                <a:spcPts val="1100"/>
               </a:spcAft>
               <a:buSzPct val="100000"/>
-              <a:buChar char="•"/>
+              <a:buChar char="–"/>
             </a:pPr>
             <a:r>
-              <a:rPr lang="en-US" sz="1300" dirty="0">
-                <a:solidFill>
-                  <a:srgbClr val="374151"/>
-                </a:solidFill>
+              <a:rPr lang="en-US" sz="1350" dirty="0">
+                <a:solidFill>
+                  <a:srgbClr val="23282E"/>
+                </a:solidFill>
+                <a:latin typeface="Corbel" pitchFamily="34" charset="0"/>
+                <a:ea typeface="Corbel" pitchFamily="34" charset="-122"/>
+                <a:cs typeface="Corbel" pitchFamily="34" charset="-120"/>
               </a:rPr>
               <a:t>If you cannot name the analysis that would answer it, the question is not yet specific enough</a:t>
             </a:r>
-            <a:endParaRPr lang="en-US" sz="1300" dirty="0"/>
+            <a:endParaRPr lang="en-US" sz="1350" dirty="0"/>
           </a:p>
         </p:txBody>
       </p:sp>
@@ -6382,8 +6929,8 @@
         </p:nvSpPr>
         <p:spPr>
           <a:xfrm>
-            <a:off x="8503920" y="4709160"/>
-            <a:ext cx="800000" cy="300000"/>
+            <a:off x="566928" y="4700016"/>
+            <a:ext cx="914400" cy="274320"/>
           </a:xfrm>
           <a:prstGeom prst="rect">
             <a:avLst/>
@@ -6398,10 +6945,13 @@
           <a:bodyPr/>
           <a:lstStyle>
             <a:lvl1pPr>
-              <a:defRPr sz="1000">
-                <a:solidFill>
-                  <a:srgbClr val="6B7280"/>
-                </a:solidFill>
+              <a:defRPr sz="900">
+                <a:solidFill>
+                  <a:srgbClr val="5F6B76"/>
+                </a:solidFill>
+                <a:latin typeface="Corbel"/>
+                <a:ea typeface="Corbel"/>
+                <a:cs typeface="Corbel"/>
               </a:defRPr>
             </a:lvl1pPr>
           </a:lstStyle>
@@ -6448,8 +6998,8 @@
         </p:nvSpPr>
         <p:spPr>
           <a:xfrm>
-            <a:off x="502920" y="292608"/>
-            <a:ext cx="8046720" cy="228600"/>
+            <a:off x="566928" y="384048"/>
+            <a:ext cx="7772400" cy="237744"/>
           </a:xfrm>
           <a:prstGeom prst="rect">
             <a:avLst/>
@@ -6465,14 +7015,17 @@
               <a:buNone/>
             </a:pPr>
             <a:r>
-              <a:rPr lang="en-US" sz="1100" b="1" spc="150" kern="0" dirty="0">
-                <a:solidFill>
-                  <a:srgbClr val="0066CC"/>
-                </a:solidFill>
+              <a:rPr lang="en-US" sz="1000" spc="200" kern="0" dirty="0">
+                <a:solidFill>
+                  <a:srgbClr val="9A6A3C"/>
+                </a:solidFill>
+                <a:latin typeface="Corbel" pitchFamily="34" charset="0"/>
+                <a:ea typeface="Corbel" pitchFamily="34" charset="-122"/>
+                <a:cs typeface="Corbel" pitchFamily="34" charset="-120"/>
               </a:rPr>
               <a:t>UNIT 2</a:t>
             </a:r>
-            <a:endParaRPr lang="en-US" sz="1100" dirty="0"/>
+            <a:endParaRPr lang="en-US" sz="1000" dirty="0"/>
           </a:p>
         </p:txBody>
       </p:sp>
@@ -6484,8 +7037,8 @@
         </p:nvSpPr>
         <p:spPr>
           <a:xfrm>
-            <a:off x="502920" y="548640"/>
-            <a:ext cx="8046720" cy="640080"/>
+            <a:off x="566928" y="658368"/>
+            <a:ext cx="7772400" cy="658368"/>
           </a:xfrm>
           <a:prstGeom prst="rect">
             <a:avLst/>
@@ -6498,30 +7051,56 @@
           <a:lstStyle/>
           <a:p>
             <a:pPr indent="0" marL="0">
+              <a:lnSpc>
+                <a:spcPct val="100000"/>
+              </a:lnSpc>
               <a:buNone/>
             </a:pPr>
             <a:r>
-              <a:rPr lang="en-US" sz="2400" b="1" dirty="0">
-                <a:solidFill>
-                  <a:srgbClr val="111827"/>
-                </a:solidFill>
+              <a:rPr lang="en-US" sz="2500" dirty="0">
+                <a:solidFill>
+                  <a:srgbClr val="1C3140"/>
+                </a:solidFill>
+                <a:latin typeface="Constantia" pitchFamily="34" charset="0"/>
+                <a:ea typeface="Constantia" pitchFamily="34" charset="-122"/>
+                <a:cs typeface="Constantia" pitchFamily="34" charset="-120"/>
               </a:rPr>
               <a:t>From topic to question (2/2)</a:t>
             </a:r>
-            <a:endParaRPr lang="en-US" sz="2400" dirty="0"/>
-          </a:p>
-        </p:txBody>
-      </p:sp>
-      <p:sp>
-        <p:nvSpPr>
-          <p:cNvPr id="4" name="Text 2"/>
+            <a:endParaRPr lang="en-US" sz="2500" dirty="0"/>
+          </a:p>
+        </p:txBody>
+      </p:sp>
+      <p:sp>
+        <p:nvSpPr>
+          <p:cNvPr id="4" name="Shape 2"/>
           <p:cNvSpPr/>
           <p:nvPr/>
         </p:nvSpPr>
         <p:spPr>
           <a:xfrm>
-            <a:off x="685800" y="1325880"/>
-            <a:ext cx="7772400" cy="3200400"/>
+            <a:off x="566928" y="1335024"/>
+            <a:ext cx="566928" cy="20117"/>
+          </a:xfrm>
+          <a:prstGeom prst="rect">
+            <a:avLst/>
+          </a:prstGeom>
+          <a:solidFill>
+            <a:srgbClr val="9A6A3C"/>
+          </a:solidFill>
+          <a:ln/>
+        </p:spPr>
+      </p:sp>
+      <p:sp>
+        <p:nvSpPr>
+          <p:cNvPr id="5" name="Text 3"/>
+          <p:cNvSpPr/>
+          <p:nvPr/>
+        </p:nvSpPr>
+        <p:spPr>
+          <a:xfrm>
+            <a:off x="713232" y="1664208"/>
+            <a:ext cx="7498080" cy="2788920"/>
           </a:xfrm>
           <a:prstGeom prst="rect">
             <a:avLst/>
@@ -6535,19 +7114,22 @@
           <a:p>
             <a:pPr marL="342900" indent="-342900">
               <a:lnSpc>
-                <a:spcPct val="125000"/>
+                <a:spcPct val="130000"/>
               </a:lnSpc>
               <a:spcAft>
-                <a:spcPts val="800"/>
+                <a:spcPts val="1100"/>
               </a:spcAft>
               <a:buSzPct val="100000"/>
-              <a:buChar char="•"/>
+              <a:buChar char="–"/>
             </a:pPr>
             <a:r>
               <a:rPr lang="en-US" sz="1500" dirty="0">
                 <a:solidFill>
-                  <a:srgbClr val="374151"/>
-                </a:solidFill>
+                  <a:srgbClr val="23282E"/>
+                </a:solidFill>
+                <a:latin typeface="Corbel" pitchFamily="34" charset="0"/>
+                <a:ea typeface="Corbel" pitchFamily="34" charset="-122"/>
+                <a:cs typeface="Corbel" pitchFamily="34" charset="-120"/>
               </a:rPr>
               <a:t>Quantitative questions specify variables and their relationship; qualitative questions specify experience, process or meaning</a:t>
             </a:r>
@@ -6567,8 +7149,8 @@
         </p:nvSpPr>
         <p:spPr>
           <a:xfrm>
-            <a:off x="8503920" y="4709160"/>
-            <a:ext cx="800000" cy="300000"/>
+            <a:off x="566928" y="4700016"/>
+            <a:ext cx="914400" cy="274320"/>
           </a:xfrm>
           <a:prstGeom prst="rect">
             <a:avLst/>
@@ -6583,10 +7165,13 @@
           <a:bodyPr/>
           <a:lstStyle>
             <a:lvl1pPr>
-              <a:defRPr sz="1000">
-                <a:solidFill>
-                  <a:srgbClr val="6B7280"/>
-                </a:solidFill>
+              <a:defRPr sz="900">
+                <a:solidFill>
+                  <a:srgbClr val="5F6B76"/>
+                </a:solidFill>
+                <a:latin typeface="Corbel"/>
+                <a:ea typeface="Corbel"/>
+                <a:cs typeface="Corbel"/>
               </a:defRPr>
             </a:lvl1pPr>
           </a:lstStyle>
@@ -6633,8 +7218,8 @@
         </p:nvSpPr>
         <p:spPr>
           <a:xfrm>
-            <a:off x="502920" y="292608"/>
-            <a:ext cx="8046720" cy="228600"/>
+            <a:off x="566928" y="384048"/>
+            <a:ext cx="7772400" cy="237744"/>
           </a:xfrm>
           <a:prstGeom prst="rect">
             <a:avLst/>
@@ -6650,14 +7235,17 @@
               <a:buNone/>
             </a:pPr>
             <a:r>
-              <a:rPr lang="en-US" sz="1100" b="1" spc="150" kern="0" dirty="0">
-                <a:solidFill>
-                  <a:srgbClr val="0066CC"/>
-                </a:solidFill>
+              <a:rPr lang="en-US" sz="1000" spc="200" kern="0" dirty="0">
+                <a:solidFill>
+                  <a:srgbClr val="9A6A3C"/>
+                </a:solidFill>
+                <a:latin typeface="Corbel" pitchFamily="34" charset="0"/>
+                <a:ea typeface="Corbel" pitchFamily="34" charset="-122"/>
+                <a:cs typeface="Corbel" pitchFamily="34" charset="-120"/>
               </a:rPr>
               <a:t>UNIT 2</a:t>
             </a:r>
-            <a:endParaRPr lang="en-US" sz="1100" dirty="0"/>
+            <a:endParaRPr lang="en-US" sz="1000" dirty="0"/>
           </a:p>
         </p:txBody>
       </p:sp>
@@ -6669,8 +7257,8 @@
         </p:nvSpPr>
         <p:spPr>
           <a:xfrm>
-            <a:off x="502920" y="548640"/>
-            <a:ext cx="8046720" cy="640080"/>
+            <a:off x="566928" y="658368"/>
+            <a:ext cx="7772400" cy="658368"/>
           </a:xfrm>
           <a:prstGeom prst="rect">
             <a:avLst/>
@@ -6683,30 +7271,56 @@
           <a:lstStyle/>
           <a:p>
             <a:pPr indent="0" marL="0">
+              <a:lnSpc>
+                <a:spcPct val="100000"/>
+              </a:lnSpc>
               <a:buNone/>
             </a:pPr>
             <a:r>
-              <a:rPr lang="en-US" sz="2400" b="1" dirty="0">
-                <a:solidFill>
-                  <a:srgbClr val="111827"/>
-                </a:solidFill>
+              <a:rPr lang="en-US" sz="2500" dirty="0">
+                <a:solidFill>
+                  <a:srgbClr val="1C3140"/>
+                </a:solidFill>
+                <a:latin typeface="Constantia" pitchFamily="34" charset="0"/>
+                <a:ea typeface="Constantia" pitchFamily="34" charset="-122"/>
+                <a:cs typeface="Constantia" pitchFamily="34" charset="-120"/>
               </a:rPr>
               <a:t>Testing the question: FINER and PICO</a:t>
             </a:r>
-            <a:endParaRPr lang="en-US" sz="2400" dirty="0"/>
-          </a:p>
-        </p:txBody>
-      </p:sp>
-      <p:sp>
-        <p:nvSpPr>
-          <p:cNvPr id="4" name="Text 2"/>
+            <a:endParaRPr lang="en-US" sz="2500" dirty="0"/>
+          </a:p>
+        </p:txBody>
+      </p:sp>
+      <p:sp>
+        <p:nvSpPr>
+          <p:cNvPr id="4" name="Shape 2"/>
           <p:cNvSpPr/>
           <p:nvPr/>
         </p:nvSpPr>
         <p:spPr>
           <a:xfrm>
-            <a:off x="685800" y="1325880"/>
-            <a:ext cx="7772400" cy="3200400"/>
+            <a:off x="566928" y="1335024"/>
+            <a:ext cx="566928" cy="20117"/>
+          </a:xfrm>
+          <a:prstGeom prst="rect">
+            <a:avLst/>
+          </a:prstGeom>
+          <a:solidFill>
+            <a:srgbClr val="9A6A3C"/>
+          </a:solidFill>
+          <a:ln/>
+        </p:spPr>
+      </p:sp>
+      <p:sp>
+        <p:nvSpPr>
+          <p:cNvPr id="5" name="Text 3"/>
+          <p:cNvSpPr/>
+          <p:nvPr/>
+        </p:nvSpPr>
+        <p:spPr>
+          <a:xfrm>
+            <a:off x="713232" y="1664208"/>
+            <a:ext cx="7498080" cy="2788920"/>
           </a:xfrm>
           <a:prstGeom prst="rect">
             <a:avLst/>
@@ -6720,19 +7334,22 @@
           <a:p>
             <a:pPr marL="342900" indent="-342900">
               <a:lnSpc>
-                <a:spcPct val="125000"/>
+                <a:spcPct val="130000"/>
               </a:lnSpc>
               <a:spcAft>
-                <a:spcPts val="800"/>
+                <a:spcPts val="1100"/>
               </a:spcAft>
               <a:buSzPct val="100000"/>
-              <a:buChar char="•"/>
+              <a:buChar char="–"/>
             </a:pPr>
             <a:r>
               <a:rPr lang="en-US" sz="1500" dirty="0">
                 <a:solidFill>
-                  <a:srgbClr val="374151"/>
-                </a:solidFill>
+                  <a:srgbClr val="23282E"/>
+                </a:solidFill>
+                <a:latin typeface="Corbel" pitchFamily="34" charset="0"/>
+                <a:ea typeface="Corbel" pitchFamily="34" charset="-122"/>
+                <a:cs typeface="Corbel" pitchFamily="34" charset="-120"/>
               </a:rPr>
               <a:t>FINER — Feasible, Interesting, Novel, Ethical, Relevant</a:t>
             </a:r>
@@ -6741,19 +7358,22 @@
           <a:p>
             <a:pPr marL="342900" indent="-342900">
               <a:lnSpc>
-                <a:spcPct val="125000"/>
+                <a:spcPct val="130000"/>
               </a:lnSpc>
               <a:spcAft>
-                <a:spcPts val="800"/>
+                <a:spcPts val="1100"/>
               </a:spcAft>
               <a:buSzPct val="100000"/>
-              <a:buChar char="•"/>
+              <a:buChar char="–"/>
             </a:pPr>
             <a:r>
               <a:rPr lang="en-US" sz="1500" dirty="0">
                 <a:solidFill>
-                  <a:srgbClr val="374151"/>
-                </a:solidFill>
+                  <a:srgbClr val="23282E"/>
+                </a:solidFill>
+                <a:latin typeface="Corbel" pitchFamily="34" charset="0"/>
+                <a:ea typeface="Corbel" pitchFamily="34" charset="-122"/>
+                <a:cs typeface="Corbel" pitchFamily="34" charset="-120"/>
               </a:rPr>
               <a:t>Feasibility is the most commonly overlooked: participants, time, funding, skills and access</a:t>
             </a:r>
@@ -6762,19 +7382,22 @@
           <a:p>
             <a:pPr marL="342900" indent="-342900">
               <a:lnSpc>
-                <a:spcPct val="125000"/>
+                <a:spcPct val="130000"/>
               </a:lnSpc>
               <a:spcAft>
-                <a:spcPts val="800"/>
+                <a:spcPts val="1100"/>
               </a:spcAft>
               <a:buSzPct val="100000"/>
-              <a:buChar char="•"/>
+              <a:buChar char="–"/>
             </a:pPr>
             <a:r>
               <a:rPr lang="en-US" sz="1500" dirty="0">
                 <a:solidFill>
-                  <a:srgbClr val="374151"/>
-                </a:solidFill>
+                  <a:srgbClr val="23282E"/>
+                </a:solidFill>
+                <a:latin typeface="Corbel" pitchFamily="34" charset="0"/>
+                <a:ea typeface="Corbel" pitchFamily="34" charset="-122"/>
+                <a:cs typeface="Corbel" pitchFamily="34" charset="-120"/>
               </a:rPr>
               <a:t>PICO structures comparative quantitative questions: Population, Intervention or exposure, Comparison, Outcome</a:t>
             </a:r>
@@ -6783,19 +7406,22 @@
           <a:p>
             <a:pPr marL="342900" indent="-342900">
               <a:lnSpc>
-                <a:spcPct val="125000"/>
+                <a:spcPct val="130000"/>
               </a:lnSpc>
               <a:spcAft>
-                <a:spcPts val="800"/>
+                <a:spcPts val="1100"/>
               </a:spcAft>
               <a:buSzPct val="100000"/>
-              <a:buChar char="•"/>
+              <a:buChar char="–"/>
             </a:pPr>
             <a:r>
               <a:rPr lang="en-US" sz="1500" dirty="0">
                 <a:solidFill>
-                  <a:srgbClr val="374151"/>
-                </a:solidFill>
+                  <a:srgbClr val="23282E"/>
+                </a:solidFill>
+                <a:latin typeface="Corbel" pitchFamily="34" charset="0"/>
+                <a:ea typeface="Corbel" pitchFamily="34" charset="-122"/>
+                <a:cs typeface="Corbel" pitchFamily="34" charset="-120"/>
               </a:rPr>
               <a:t>Add T for timeframe (PICOT) when duration matters</a:t>
             </a:r>
@@ -6804,19 +7430,22 @@
           <a:p>
             <a:pPr marL="342900" indent="-342900">
               <a:lnSpc>
-                <a:spcPct val="125000"/>
+                <a:spcPct val="130000"/>
               </a:lnSpc>
               <a:spcAft>
-                <a:spcPts val="800"/>
+                <a:spcPts val="1100"/>
               </a:spcAft>
               <a:buSzPct val="100000"/>
-              <a:buChar char="•"/>
+              <a:buChar char="–"/>
             </a:pPr>
             <a:r>
               <a:rPr lang="en-US" sz="1500" dirty="0">
                 <a:solidFill>
-                  <a:srgbClr val="374151"/>
-                </a:solidFill>
+                  <a:srgbClr val="23282E"/>
+                </a:solidFill>
+                <a:latin typeface="Corbel" pitchFamily="34" charset="0"/>
+                <a:ea typeface="Corbel" pitchFamily="34" charset="-122"/>
+                <a:cs typeface="Corbel" pitchFamily="34" charset="-120"/>
               </a:rPr>
               <a:t>For qualitative work, SPIDER is a better fit: Sample, Phenomenon of Interest, Design, Evaluation, Research type</a:t>
             </a:r>
@@ -6836,8 +7465,8 @@
         </p:nvSpPr>
         <p:spPr>
           <a:xfrm>
-            <a:off x="8503920" y="4709160"/>
-            <a:ext cx="800000" cy="300000"/>
+            <a:off x="566928" y="4700016"/>
+            <a:ext cx="914400" cy="274320"/>
           </a:xfrm>
           <a:prstGeom prst="rect">
             <a:avLst/>
@@ -6852,10 +7481,13 @@
           <a:bodyPr/>
           <a:lstStyle>
             <a:lvl1pPr>
-              <a:defRPr sz="1000">
-                <a:solidFill>
-                  <a:srgbClr val="6B7280"/>
-                </a:solidFill>
+              <a:defRPr sz="900">
+                <a:solidFill>
+                  <a:srgbClr val="5F6B76"/>
+                </a:solidFill>
+                <a:latin typeface="Corbel"/>
+                <a:ea typeface="Corbel"/>
+                <a:cs typeface="Corbel"/>
               </a:defRPr>
             </a:lvl1pPr>
           </a:lstStyle>
@@ -6902,8 +7534,8 @@
         </p:nvSpPr>
         <p:spPr>
           <a:xfrm>
-            <a:off x="502920" y="292608"/>
-            <a:ext cx="8046720" cy="228600"/>
+            <a:off x="566928" y="384048"/>
+            <a:ext cx="7772400" cy="237744"/>
           </a:xfrm>
           <a:prstGeom prst="rect">
             <a:avLst/>
@@ -6919,14 +7551,17 @@
               <a:buNone/>
             </a:pPr>
             <a:r>
-              <a:rPr lang="en-US" sz="1100" b="1" spc="150" kern="0" dirty="0">
-                <a:solidFill>
-                  <a:srgbClr val="0066CC"/>
-                </a:solidFill>
+              <a:rPr lang="en-US" sz="1000" spc="200" kern="0" dirty="0">
+                <a:solidFill>
+                  <a:srgbClr val="9A6A3C"/>
+                </a:solidFill>
+                <a:latin typeface="Corbel" pitchFamily="34" charset="0"/>
+                <a:ea typeface="Corbel" pitchFamily="34" charset="-122"/>
+                <a:cs typeface="Corbel" pitchFamily="34" charset="-120"/>
               </a:rPr>
               <a:t>UNIT 2</a:t>
             </a:r>
-            <a:endParaRPr lang="en-US" sz="1100" dirty="0"/>
+            <a:endParaRPr lang="en-US" sz="1000" dirty="0"/>
           </a:p>
         </p:txBody>
       </p:sp>
@@ -6938,8 +7573,8 @@
         </p:nvSpPr>
         <p:spPr>
           <a:xfrm>
-            <a:off x="502920" y="548640"/>
-            <a:ext cx="8046720" cy="548640"/>
+            <a:off x="566928" y="658368"/>
+            <a:ext cx="7772400" cy="658368"/>
           </a:xfrm>
           <a:prstGeom prst="rect">
             <a:avLst/>
@@ -6952,19 +7587,45 @@
           <a:lstStyle/>
           <a:p>
             <a:pPr indent="0" marL="0">
+              <a:lnSpc>
+                <a:spcPct val="100000"/>
+              </a:lnSpc>
               <a:buNone/>
             </a:pPr>
             <a:r>
-              <a:rPr lang="en-US" sz="2200" b="1" dirty="0">
-                <a:solidFill>
-                  <a:srgbClr val="111827"/>
-                </a:solidFill>
+              <a:rPr lang="en-US" sz="2500" dirty="0">
+                <a:solidFill>
+                  <a:srgbClr val="1C3140"/>
+                </a:solidFill>
+                <a:latin typeface="Constantia" pitchFamily="34" charset="0"/>
+                <a:ea typeface="Constantia" pitchFamily="34" charset="-122"/>
+                <a:cs typeface="Constantia" pitchFamily="34" charset="-120"/>
               </a:rPr>
               <a:t>Framing the same topic three ways</a:t>
             </a:r>
-            <a:endParaRPr lang="en-US" sz="2200" dirty="0"/>
-          </a:p>
-        </p:txBody>
+            <a:endParaRPr lang="en-US" sz="2500" dirty="0"/>
+          </a:p>
+        </p:txBody>
+      </p:sp>
+      <p:sp>
+        <p:nvSpPr>
+          <p:cNvPr id="4" name="Shape 2"/>
+          <p:cNvSpPr/>
+          <p:nvPr/>
+        </p:nvSpPr>
+        <p:spPr>
+          <a:xfrm>
+            <a:off x="566928" y="1335024"/>
+            <a:ext cx="566928" cy="20117"/>
+          </a:xfrm>
+          <a:prstGeom prst="rect">
+            <a:avLst/>
+          </a:prstGeom>
+          <a:solidFill>
+            <a:srgbClr val="9A6A3C"/>
+          </a:solidFill>
+          <a:ln/>
+        </p:spPr>
       </p:sp>
       <p:graphicFrame>
         <p:nvGraphicFramePr>
@@ -6981,17 +7642,17 @@
           </p:nvPr>
         </p:nvGraphicFramePr>
         <p:xfrm>
-          <a:off x="502920" y="1234440"/>
-          <a:ext cx="8138160" cy="914400"/>
+          <a:off x="566928" y="1627632"/>
+          <a:ext cx="8010144" cy="914400"/>
         </p:xfrm>
         <a:graphic>
           <a:graphicData uri="http://schemas.openxmlformats.org/drawingml/2006/table">
             <a:tbl>
               <a:tblPr/>
               <a:tblGrid>
-                <a:gridCol w="2712720"/>
-                <a:gridCol w="2712720"/>
-                <a:gridCol w="2712720"/>
+                <a:gridCol w="2670048"/>
+                <a:gridCol w="2670048"/>
+                <a:gridCol w="2670048"/>
               </a:tblGrid>
               <a:tr h="0">
                 <a:tc>
@@ -7005,45 +7666,52 @@
                       <a:r>
                         <a:rPr lang="en-US" sz="1100" b="1" dirty="0">
                           <a:solidFill>
-                            <a:srgbClr val="FFFFFF"/>
+                            <a:srgbClr val="1C3140"/>
                           </a:solidFill>
+                          <a:latin typeface="Corbel" pitchFamily="34" charset="0"/>
+                          <a:ea typeface="Corbel" pitchFamily="34" charset="-122"/>
+                          <a:cs typeface="Corbel" pitchFamily="34" charset="-120"/>
                         </a:rPr>
                         <a:t>Element</a:t>
                       </a:r>
-                      <a:endParaRPr lang="en-US" sz="1100" dirty="0"/>
+                      <a:endParaRPr lang="en-US" sz="1100" dirty="0">
+                        <a:latin typeface="Corbel" charset="0"/>
+                        <a:ea typeface="Corbel" charset="0"/>
+                        <a:cs typeface="Corbel" charset="0"/>
+                      </a:endParaRPr>
                     </a:p>
                   </a:txBody>
-                  <a:tcPr marL="91440" marR="91440" marT="45720" marB="45720" anchor="t">
-                    <a:lnL w="6350" cap="flat" cmpd="sng" algn="ctr">
+                  <a:tcPr marL="76200" marR="76200" marT="76200" marB="76200" anchor="t">
+                    <a:lnL w="5080" cap="flat" cmpd="sng" algn="ctr">
                       <a:solidFill>
-                        <a:srgbClr val="D1D5DB"/>
+                        <a:srgbClr val="D8D3CB"/>
                       </a:solidFill>
                       <a:prstDash val="solid"/>
                       <a:round/>
                       <a:headEnd type="none" w="med" len="med"/>
                       <a:tailEnd type="none" w="med" len="med"/>
                     </a:lnL>
-                    <a:lnR w="6350" cap="flat" cmpd="sng" algn="ctr">
+                    <a:lnR w="5080" cap="flat" cmpd="sng" algn="ctr">
                       <a:solidFill>
-                        <a:srgbClr val="D1D5DB"/>
+                        <a:srgbClr val="D8D3CB"/>
                       </a:solidFill>
                       <a:prstDash val="solid"/>
                       <a:round/>
                       <a:headEnd type="none" w="med" len="med"/>
                       <a:tailEnd type="none" w="med" len="med"/>
                     </a:lnR>
-                    <a:lnT w="6350" cap="flat" cmpd="sng" algn="ctr">
+                    <a:lnT w="5080" cap="flat" cmpd="sng" algn="ctr">
                       <a:solidFill>
-                        <a:srgbClr val="D1D5DB"/>
+                        <a:srgbClr val="D8D3CB"/>
                       </a:solidFill>
                       <a:prstDash val="solid"/>
                       <a:round/>
                       <a:headEnd type="none" w="med" len="med"/>
                       <a:tailEnd type="none" w="med" len="med"/>
                     </a:lnT>
-                    <a:lnB w="6350" cap="flat" cmpd="sng" algn="ctr">
+                    <a:lnB w="5080" cap="flat" cmpd="sng" algn="ctr">
                       <a:solidFill>
-                        <a:srgbClr val="D1D5DB"/>
+                        <a:srgbClr val="D8D3CB"/>
                       </a:solidFill>
                       <a:prstDash val="solid"/>
                       <a:round/>
@@ -7051,7 +7719,7 @@
                       <a:tailEnd type="none" w="med" len="med"/>
                     </a:lnB>
                     <a:solidFill>
-                      <a:srgbClr val="004D99"/>
+                      <a:srgbClr val="F6F4F0"/>
                     </a:solidFill>
                   </a:tcPr>
                 </a:tc>
@@ -7066,45 +7734,52 @@
                       <a:r>
                         <a:rPr lang="en-US" sz="1100" b="1" dirty="0">
                           <a:solidFill>
-                            <a:srgbClr val="FFFFFF"/>
+                            <a:srgbClr val="1C3140"/>
                           </a:solidFill>
+                          <a:latin typeface="Corbel" pitchFamily="34" charset="0"/>
+                          <a:ea typeface="Corbel" pitchFamily="34" charset="-122"/>
+                          <a:cs typeface="Corbel" pitchFamily="34" charset="-120"/>
                         </a:rPr>
                         <a:t>Quantitative (PICO)</a:t>
                       </a:r>
-                      <a:endParaRPr lang="en-US" sz="1100" dirty="0"/>
+                      <a:endParaRPr lang="en-US" sz="1100" dirty="0">
+                        <a:latin typeface="Corbel" charset="0"/>
+                        <a:ea typeface="Corbel" charset="0"/>
+                        <a:cs typeface="Corbel" charset="0"/>
+                      </a:endParaRPr>
                     </a:p>
                   </a:txBody>
-                  <a:tcPr marL="91440" marR="91440" marT="45720" marB="45720" anchor="t">
-                    <a:lnL w="6350" cap="flat" cmpd="sng" algn="ctr">
+                  <a:tcPr marL="76200" marR="76200" marT="76200" marB="76200" anchor="t">
+                    <a:lnL w="5080" cap="flat" cmpd="sng" algn="ctr">
                       <a:solidFill>
-                        <a:srgbClr val="D1D5DB"/>
+                        <a:srgbClr val="D8D3CB"/>
                       </a:solidFill>
                       <a:prstDash val="solid"/>
                       <a:round/>
                       <a:headEnd type="none" w="med" len="med"/>
                       <a:tailEnd type="none" w="med" len="med"/>
                     </a:lnL>
-                    <a:lnR w="6350" cap="flat" cmpd="sng" algn="ctr">
+                    <a:lnR w="5080" cap="flat" cmpd="sng" algn="ctr">
                       <a:solidFill>
-                        <a:srgbClr val="D1D5DB"/>
+                        <a:srgbClr val="D8D3CB"/>
                       </a:solidFill>
                       <a:prstDash val="solid"/>
                       <a:round/>
                       <a:headEnd type="none" w="med" len="med"/>
                       <a:tailEnd type="none" w="med" len="med"/>
                     </a:lnR>
-                    <a:lnT w="6350" cap="flat" cmpd="sng" algn="ctr">
+                    <a:lnT w="5080" cap="flat" cmpd="sng" algn="ctr">
                       <a:solidFill>
-                        <a:srgbClr val="D1D5DB"/>
+                        <a:srgbClr val="D8D3CB"/>
                       </a:solidFill>
                       <a:prstDash val="solid"/>
                       <a:round/>
                       <a:headEnd type="none" w="med" len="med"/>
                       <a:tailEnd type="none" w="med" len="med"/>
                     </a:lnT>
-                    <a:lnB w="6350" cap="flat" cmpd="sng" algn="ctr">
+                    <a:lnB w="5080" cap="flat" cmpd="sng" algn="ctr">
                       <a:solidFill>
-                        <a:srgbClr val="D1D5DB"/>
+                        <a:srgbClr val="D8D3CB"/>
                       </a:solidFill>
                       <a:prstDash val="solid"/>
                       <a:round/>
@@ -7112,7 +7787,7 @@
                       <a:tailEnd type="none" w="med" len="med"/>
                     </a:lnB>
                     <a:solidFill>
-                      <a:srgbClr val="004D99"/>
+                      <a:srgbClr val="F6F4F0"/>
                     </a:solidFill>
                   </a:tcPr>
                 </a:tc>
@@ -7127,45 +7802,52 @@
                       <a:r>
                         <a:rPr lang="en-US" sz="1100" b="1" dirty="0">
                           <a:solidFill>
-                            <a:srgbClr val="FFFFFF"/>
+                            <a:srgbClr val="1C3140"/>
                           </a:solidFill>
+                          <a:latin typeface="Corbel" pitchFamily="34" charset="0"/>
+                          <a:ea typeface="Corbel" pitchFamily="34" charset="-122"/>
+                          <a:cs typeface="Corbel" pitchFamily="34" charset="-120"/>
                         </a:rPr>
                         <a:t>Qualitative (SPIDER)</a:t>
                       </a:r>
-                      <a:endParaRPr lang="en-US" sz="1100" dirty="0"/>
+                      <a:endParaRPr lang="en-US" sz="1100" dirty="0">
+                        <a:latin typeface="Corbel" charset="0"/>
+                        <a:ea typeface="Corbel" charset="0"/>
+                        <a:cs typeface="Corbel" charset="0"/>
+                      </a:endParaRPr>
                     </a:p>
                   </a:txBody>
-                  <a:tcPr marL="91440" marR="91440" marT="45720" marB="45720" anchor="t">
-                    <a:lnL w="6350" cap="flat" cmpd="sng" algn="ctr">
+                  <a:tcPr marL="76200" marR="76200" marT="76200" marB="76200" anchor="t">
+                    <a:lnL w="5080" cap="flat" cmpd="sng" algn="ctr">
                       <a:solidFill>
-                        <a:srgbClr val="D1D5DB"/>
+                        <a:srgbClr val="D8D3CB"/>
                       </a:solidFill>
                       <a:prstDash val="solid"/>
                       <a:round/>
                       <a:headEnd type="none" w="med" len="med"/>
                       <a:tailEnd type="none" w="med" len="med"/>
                     </a:lnL>
-                    <a:lnR w="6350" cap="flat" cmpd="sng" algn="ctr">
+                    <a:lnR w="5080" cap="flat" cmpd="sng" algn="ctr">
                       <a:solidFill>
-                        <a:srgbClr val="D1D5DB"/>
+                        <a:srgbClr val="D8D3CB"/>
                       </a:solidFill>
                       <a:prstDash val="solid"/>
                       <a:round/>
                       <a:headEnd type="none" w="med" len="med"/>
                       <a:tailEnd type="none" w="med" len="med"/>
                     </a:lnR>
-                    <a:lnT w="6350" cap="flat" cmpd="sng" algn="ctr">
+                    <a:lnT w="5080" cap="flat" cmpd="sng" algn="ctr">
                       <a:solidFill>
-                        <a:srgbClr val="D1D5DB"/>
+                        <a:srgbClr val="D8D3CB"/>
                       </a:solidFill>
                       <a:prstDash val="solid"/>
                       <a:round/>
                       <a:headEnd type="none" w="med" len="med"/>
                       <a:tailEnd type="none" w="med" len="med"/>
                     </a:lnT>
-                    <a:lnB w="6350" cap="flat" cmpd="sng" algn="ctr">
+                    <a:lnB w="5080" cap="flat" cmpd="sng" algn="ctr">
                       <a:solidFill>
-                        <a:srgbClr val="D1D5DB"/>
+                        <a:srgbClr val="D8D3CB"/>
                       </a:solidFill>
                       <a:prstDash val="solid"/>
                       <a:round/>
@@ -7173,7 +7855,7 @@
                       <a:tailEnd type="none" w="med" len="med"/>
                     </a:lnB>
                     <a:solidFill>
-                      <a:srgbClr val="004D99"/>
+                      <a:srgbClr val="F6F4F0"/>
                     </a:solidFill>
                   </a:tcPr>
                 </a:tc>
@@ -7190,45 +7872,52 @@
                       <a:r>
                         <a:rPr lang="en-US" sz="1100" dirty="0">
                           <a:solidFill>
-                            <a:srgbClr val="374151"/>
+                            <a:srgbClr val="23282E"/>
                           </a:solidFill>
+                          <a:latin typeface="Corbel" pitchFamily="34" charset="0"/>
+                          <a:ea typeface="Corbel" pitchFamily="34" charset="-122"/>
+                          <a:cs typeface="Corbel" pitchFamily="34" charset="-120"/>
                         </a:rPr>
                         <a:t>Who</a:t>
                       </a:r>
-                      <a:endParaRPr lang="en-US" sz="1100" dirty="0"/>
+                      <a:endParaRPr lang="en-US" sz="1100" dirty="0">
+                        <a:latin typeface="Corbel" charset="0"/>
+                        <a:ea typeface="Corbel" charset="0"/>
+                        <a:cs typeface="Corbel" charset="0"/>
+                      </a:endParaRPr>
                     </a:p>
                   </a:txBody>
-                  <a:tcPr marL="91440" marR="91440" marT="45720" marB="45720" anchor="t">
-                    <a:lnL w="6350" cap="flat" cmpd="sng" algn="ctr">
+                  <a:tcPr marL="76200" marR="76200" marT="76200" marB="76200" anchor="t">
+                    <a:lnL w="5080" cap="flat" cmpd="sng" algn="ctr">
                       <a:solidFill>
-                        <a:srgbClr val="D1D5DB"/>
+                        <a:srgbClr val="D8D3CB"/>
                       </a:solidFill>
                       <a:prstDash val="solid"/>
                       <a:round/>
                       <a:headEnd type="none" w="med" len="med"/>
                       <a:tailEnd type="none" w="med" len="med"/>
                     </a:lnL>
-                    <a:lnR w="6350" cap="flat" cmpd="sng" algn="ctr">
+                    <a:lnR w="5080" cap="flat" cmpd="sng" algn="ctr">
                       <a:solidFill>
-                        <a:srgbClr val="D1D5DB"/>
+                        <a:srgbClr val="D8D3CB"/>
                       </a:solidFill>
                       <a:prstDash val="solid"/>
                       <a:round/>
                       <a:headEnd type="none" w="med" len="med"/>
                       <a:tailEnd type="none" w="med" len="med"/>
                     </a:lnR>
-                    <a:lnT w="6350" cap="flat" cmpd="sng" algn="ctr">
+                    <a:lnT w="5080" cap="flat" cmpd="sng" algn="ctr">
                       <a:solidFill>
-                        <a:srgbClr val="D1D5DB"/>
+                        <a:srgbClr val="D8D3CB"/>
                       </a:solidFill>
                       <a:prstDash val="solid"/>
                       <a:round/>
                       <a:headEnd type="none" w="med" len="med"/>
                       <a:tailEnd type="none" w="med" len="med"/>
                     </a:lnT>
-                    <a:lnB w="6350" cap="flat" cmpd="sng" algn="ctr">
+                    <a:lnB w="5080" cap="flat" cmpd="sng" algn="ctr">
                       <a:solidFill>
-                        <a:srgbClr val="D1D5DB"/>
+                        <a:srgbClr val="D8D3CB"/>
                       </a:solidFill>
                       <a:prstDash val="solid"/>
                       <a:round/>
@@ -7251,45 +7940,52 @@
                       <a:r>
                         <a:rPr lang="en-US" sz="1100" dirty="0">
                           <a:solidFill>
-                            <a:srgbClr val="374151"/>
+                            <a:srgbClr val="23282E"/>
                           </a:solidFill>
+                          <a:latin typeface="Corbel" pitchFamily="34" charset="0"/>
+                          <a:ea typeface="Corbel" pitchFamily="34" charset="-122"/>
+                          <a:cs typeface="Corbel" pitchFamily="34" charset="-120"/>
                         </a:rPr>
                         <a:t>Under-fives with confirmed malaria</a:t>
                       </a:r>
-                      <a:endParaRPr lang="en-US" sz="1100" dirty="0"/>
+                      <a:endParaRPr lang="en-US" sz="1100" dirty="0">
+                        <a:latin typeface="Corbel" charset="0"/>
+                        <a:ea typeface="Corbel" charset="0"/>
+                        <a:cs typeface="Corbel" charset="0"/>
+                      </a:endParaRPr>
                     </a:p>
                   </a:txBody>
-                  <a:tcPr marL="91440" marR="91440" marT="45720" marB="45720" anchor="t">
-                    <a:lnL w="6350" cap="flat" cmpd="sng" algn="ctr">
+                  <a:tcPr marL="76200" marR="76200" marT="76200" marB="76200" anchor="t">
+                    <a:lnL w="5080" cap="flat" cmpd="sng" algn="ctr">
                       <a:solidFill>
-                        <a:srgbClr val="D1D5DB"/>
+                        <a:srgbClr val="D8D3CB"/>
                       </a:solidFill>
                       <a:prstDash val="solid"/>
                       <a:round/>
                       <a:headEnd type="none" w="med" len="med"/>
                       <a:tailEnd type="none" w="med" len="med"/>
                     </a:lnL>
-                    <a:lnR w="6350" cap="flat" cmpd="sng" algn="ctr">
+                    <a:lnR w="5080" cap="flat" cmpd="sng" algn="ctr">
                       <a:solidFill>
-                        <a:srgbClr val="D1D5DB"/>
+                        <a:srgbClr val="D8D3CB"/>
                       </a:solidFill>
                       <a:prstDash val="solid"/>
                       <a:round/>
                       <a:headEnd type="none" w="med" len="med"/>
                       <a:tailEnd type="none" w="med" len="med"/>
                     </a:lnR>
-                    <a:lnT w="6350" cap="flat" cmpd="sng" algn="ctr">
+                    <a:lnT w="5080" cap="flat" cmpd="sng" algn="ctr">
                       <a:solidFill>
-                        <a:srgbClr val="D1D5DB"/>
+                        <a:srgbClr val="D8D3CB"/>
                       </a:solidFill>
                       <a:prstDash val="solid"/>
                       <a:round/>
                       <a:headEnd type="none" w="med" len="med"/>
                       <a:tailEnd type="none" w="med" len="med"/>
                     </a:lnT>
-                    <a:lnB w="6350" cap="flat" cmpd="sng" algn="ctr">
+                    <a:lnB w="5080" cap="flat" cmpd="sng" algn="ctr">
                       <a:solidFill>
-                        <a:srgbClr val="D1D5DB"/>
+                        <a:srgbClr val="D8D3CB"/>
                       </a:solidFill>
                       <a:prstDash val="solid"/>
                       <a:round/>
@@ -7312,45 +8008,52 @@
                       <a:r>
                         <a:rPr lang="en-US" sz="1100" dirty="0">
                           <a:solidFill>
-                            <a:srgbClr val="374151"/>
+                            <a:srgbClr val="23282E"/>
                           </a:solidFill>
+                          <a:latin typeface="Corbel" pitchFamily="34" charset="0"/>
+                          <a:ea typeface="Corbel" pitchFamily="34" charset="-122"/>
+                          <a:cs typeface="Corbel" pitchFamily="34" charset="-120"/>
                         </a:rPr>
                         <a:t>Caregivers of under-fives treated for malaria</a:t>
                       </a:r>
-                      <a:endParaRPr lang="en-US" sz="1100" dirty="0"/>
+                      <a:endParaRPr lang="en-US" sz="1100" dirty="0">
+                        <a:latin typeface="Corbel" charset="0"/>
+                        <a:ea typeface="Corbel" charset="0"/>
+                        <a:cs typeface="Corbel" charset="0"/>
+                      </a:endParaRPr>
                     </a:p>
                   </a:txBody>
-                  <a:tcPr marL="91440" marR="91440" marT="45720" marB="45720" anchor="t">
-                    <a:lnL w="6350" cap="flat" cmpd="sng" algn="ctr">
+                  <a:tcPr marL="76200" marR="76200" marT="76200" marB="76200" anchor="t">
+                    <a:lnL w="5080" cap="flat" cmpd="sng" algn="ctr">
                       <a:solidFill>
-                        <a:srgbClr val="D1D5DB"/>
+                        <a:srgbClr val="D8D3CB"/>
                       </a:solidFill>
                       <a:prstDash val="solid"/>
                       <a:round/>
                       <a:headEnd type="none" w="med" len="med"/>
                       <a:tailEnd type="none" w="med" len="med"/>
                     </a:lnL>
-                    <a:lnR w="6350" cap="flat" cmpd="sng" algn="ctr">
+                    <a:lnR w="5080" cap="flat" cmpd="sng" algn="ctr">
                       <a:solidFill>
-                        <a:srgbClr val="D1D5DB"/>
+                        <a:srgbClr val="D8D3CB"/>
                       </a:solidFill>
                       <a:prstDash val="solid"/>
                       <a:round/>
                       <a:headEnd type="none" w="med" len="med"/>
                       <a:tailEnd type="none" w="med" len="med"/>
                     </a:lnR>
-                    <a:lnT w="6350" cap="flat" cmpd="sng" algn="ctr">
+                    <a:lnT w="5080" cap="flat" cmpd="sng" algn="ctr">
                       <a:solidFill>
-                        <a:srgbClr val="D1D5DB"/>
+                        <a:srgbClr val="D8D3CB"/>
                       </a:solidFill>
                       <a:prstDash val="solid"/>
                       <a:round/>
                       <a:headEnd type="none" w="med" len="med"/>
                       <a:tailEnd type="none" w="med" len="med"/>
                     </a:lnT>
-                    <a:lnB w="6350" cap="flat" cmpd="sng" algn="ctr">
+                    <a:lnB w="5080" cap="flat" cmpd="sng" algn="ctr">
                       <a:solidFill>
-                        <a:srgbClr val="D1D5DB"/>
+                        <a:srgbClr val="D8D3CB"/>
                       </a:solidFill>
                       <a:prstDash val="solid"/>
                       <a:round/>
@@ -7375,230 +8078,52 @@
                       <a:r>
                         <a:rPr lang="en-US" sz="1100" dirty="0">
                           <a:solidFill>
-                            <a:srgbClr val="374151"/>
+                            <a:srgbClr val="23282E"/>
                           </a:solidFill>
+                          <a:latin typeface="Corbel" pitchFamily="34" charset="0"/>
+                          <a:ea typeface="Corbel" pitchFamily="34" charset="-122"/>
+                          <a:cs typeface="Corbel" pitchFamily="34" charset="-120"/>
                         </a:rPr>
                         <a:t>What</a:t>
                       </a:r>
-                      <a:endParaRPr lang="en-US" sz="1100" dirty="0"/>
+                      <a:endParaRPr lang="en-US" sz="1100" dirty="0">
+                        <a:latin typeface="Corbel" charset="0"/>
+                        <a:ea typeface="Corbel" charset="0"/>
+                        <a:cs typeface="Corbel" charset="0"/>
+                      </a:endParaRPr>
                     </a:p>
                   </a:txBody>
-                  <a:tcPr marL="91440" marR="91440" marT="45720" marB="45720" anchor="t">
-                    <a:lnL w="6350" cap="flat" cmpd="sng" algn="ctr">
+                  <a:tcPr marL="76200" marR="76200" marT="76200" marB="76200" anchor="t">
+                    <a:lnL w="5080" cap="flat" cmpd="sng" algn="ctr">
                       <a:solidFill>
-                        <a:srgbClr val="D1D5DB"/>
+                        <a:srgbClr val="D8D3CB"/>
                       </a:solidFill>
                       <a:prstDash val="solid"/>
                       <a:round/>
                       <a:headEnd type="none" w="med" len="med"/>
                       <a:tailEnd type="none" w="med" len="med"/>
                     </a:lnL>
-                    <a:lnR w="6350" cap="flat" cmpd="sng" algn="ctr">
+                    <a:lnR w="5080" cap="flat" cmpd="sng" algn="ctr">
                       <a:solidFill>
-                        <a:srgbClr val="D1D5DB"/>
+                        <a:srgbClr val="D8D3CB"/>
                       </a:solidFill>
                       <a:prstDash val="solid"/>
                       <a:round/>
                       <a:headEnd type="none" w="med" len="med"/>
                       <a:tailEnd type="none" w="med" len="med"/>
                     </a:lnR>
-                    <a:lnT w="6350" cap="flat" cmpd="sng" algn="ctr">
+                    <a:lnT w="5080" cap="flat" cmpd="sng" algn="ctr">
                       <a:solidFill>
-                        <a:srgbClr val="D1D5DB"/>
+                        <a:srgbClr val="D8D3CB"/>
                       </a:solidFill>
                       <a:prstDash val="solid"/>
                       <a:round/>
                       <a:headEnd type="none" w="med" len="med"/>
                       <a:tailEnd type="none" w="med" len="med"/>
                     </a:lnT>
-                    <a:lnB w="6350" cap="flat" cmpd="sng" algn="ctr">
+                    <a:lnB w="5080" cap="flat" cmpd="sng" algn="ctr">
                       <a:solidFill>
-                        <a:srgbClr val="D1D5DB"/>
-                      </a:solidFill>
-                      <a:prstDash val="solid"/>
-                      <a:round/>
-                      <a:headEnd type="none" w="med" len="med"/>
-                      <a:tailEnd type="none" w="med" len="med"/>
-                    </a:lnB>
-                    <a:solidFill>
-                      <a:srgbClr val="F9FAFB"/>
-                    </a:solidFill>
-                  </a:tcPr>
-                </a:tc>
-                <a:tc>
-                  <a:txBody>
-                    <a:bodyPr/>
-                    <a:lstStyle/>
-                    <a:p>
-                      <a:pPr indent="0" marL="0">
-                        <a:buNone/>
-                      </a:pPr>
-                      <a:r>
-                        <a:rPr lang="en-US" sz="1100" dirty="0">
-                          <a:solidFill>
-                            <a:srgbClr val="374151"/>
-                          </a:solidFill>
-                        </a:rPr>
-                        <a:t>Distance greater than 5 km to facility</a:t>
-                      </a:r>
-                      <a:endParaRPr lang="en-US" sz="1100" dirty="0"/>
-                    </a:p>
-                  </a:txBody>
-                  <a:tcPr marL="91440" marR="91440" marT="45720" marB="45720" anchor="t">
-                    <a:lnL w="6350" cap="flat" cmpd="sng" algn="ctr">
-                      <a:solidFill>
-                        <a:srgbClr val="D1D5DB"/>
-                      </a:solidFill>
-                      <a:prstDash val="solid"/>
-                      <a:round/>
-                      <a:headEnd type="none" w="med" len="med"/>
-                      <a:tailEnd type="none" w="med" len="med"/>
-                    </a:lnL>
-                    <a:lnR w="6350" cap="flat" cmpd="sng" algn="ctr">
-                      <a:solidFill>
-                        <a:srgbClr val="D1D5DB"/>
-                      </a:solidFill>
-                      <a:prstDash val="solid"/>
-                      <a:round/>
-                      <a:headEnd type="none" w="med" len="med"/>
-                      <a:tailEnd type="none" w="med" len="med"/>
-                    </a:lnR>
-                    <a:lnT w="6350" cap="flat" cmpd="sng" algn="ctr">
-                      <a:solidFill>
-                        <a:srgbClr val="D1D5DB"/>
-                      </a:solidFill>
-                      <a:prstDash val="solid"/>
-                      <a:round/>
-                      <a:headEnd type="none" w="med" len="med"/>
-                      <a:tailEnd type="none" w="med" len="med"/>
-                    </a:lnT>
-                    <a:lnB w="6350" cap="flat" cmpd="sng" algn="ctr">
-                      <a:solidFill>
-                        <a:srgbClr val="D1D5DB"/>
-                      </a:solidFill>
-                      <a:prstDash val="solid"/>
-                      <a:round/>
-                      <a:headEnd type="none" w="med" len="med"/>
-                      <a:tailEnd type="none" w="med" len="med"/>
-                    </a:lnB>
-                    <a:solidFill>
-                      <a:srgbClr val="F9FAFB"/>
-                    </a:solidFill>
-                  </a:tcPr>
-                </a:tc>
-                <a:tc>
-                  <a:txBody>
-                    <a:bodyPr/>
-                    <a:lstStyle/>
-                    <a:p>
-                      <a:pPr indent="0" marL="0">
-                        <a:buNone/>
-                      </a:pPr>
-                      <a:r>
-                        <a:rPr lang="en-US" sz="1100" dirty="0">
-                          <a:solidFill>
-                            <a:srgbClr val="374151"/>
-                          </a:solidFill>
-                        </a:rPr>
-                        <a:t>Experience of seeking and delaying care</a:t>
-                      </a:r>
-                      <a:endParaRPr lang="en-US" sz="1100" dirty="0"/>
-                    </a:p>
-                  </a:txBody>
-                  <a:tcPr marL="91440" marR="91440" marT="45720" marB="45720" anchor="t">
-                    <a:lnL w="6350" cap="flat" cmpd="sng" algn="ctr">
-                      <a:solidFill>
-                        <a:srgbClr val="D1D5DB"/>
-                      </a:solidFill>
-                      <a:prstDash val="solid"/>
-                      <a:round/>
-                      <a:headEnd type="none" w="med" len="med"/>
-                      <a:tailEnd type="none" w="med" len="med"/>
-                    </a:lnL>
-                    <a:lnR w="6350" cap="flat" cmpd="sng" algn="ctr">
-                      <a:solidFill>
-                        <a:srgbClr val="D1D5DB"/>
-                      </a:solidFill>
-                      <a:prstDash val="solid"/>
-                      <a:round/>
-                      <a:headEnd type="none" w="med" len="med"/>
-                      <a:tailEnd type="none" w="med" len="med"/>
-                    </a:lnR>
-                    <a:lnT w="6350" cap="flat" cmpd="sng" algn="ctr">
-                      <a:solidFill>
-                        <a:srgbClr val="D1D5DB"/>
-                      </a:solidFill>
-                      <a:prstDash val="solid"/>
-                      <a:round/>
-                      <a:headEnd type="none" w="med" len="med"/>
-                      <a:tailEnd type="none" w="med" len="med"/>
-                    </a:lnT>
-                    <a:lnB w="6350" cap="flat" cmpd="sng" algn="ctr">
-                      <a:solidFill>
-                        <a:srgbClr val="D1D5DB"/>
-                      </a:solidFill>
-                      <a:prstDash val="solid"/>
-                      <a:round/>
-                      <a:headEnd type="none" w="med" len="med"/>
-                      <a:tailEnd type="none" w="med" len="med"/>
-                    </a:lnB>
-                    <a:solidFill>
-                      <a:srgbClr val="F9FAFB"/>
-                    </a:solidFill>
-                  </a:tcPr>
-                </a:tc>
-              </a:tr>
-              <a:tr h="0">
-                <a:tc>
-                  <a:txBody>
-                    <a:bodyPr/>
-                    <a:lstStyle/>
-                    <a:p>
-                      <a:pPr indent="0" marL="0">
-                        <a:buNone/>
-                      </a:pPr>
-                      <a:r>
-                        <a:rPr lang="en-US" sz="1100" dirty="0">
-                          <a:solidFill>
-                            <a:srgbClr val="374151"/>
-                          </a:solidFill>
-                        </a:rPr>
-                        <a:t>Compared with</a:t>
-                      </a:r>
-                      <a:endParaRPr lang="en-US" sz="1100" dirty="0"/>
-                    </a:p>
-                  </a:txBody>
-                  <a:tcPr marL="91440" marR="91440" marT="45720" marB="45720" anchor="t">
-                    <a:lnL w="6350" cap="flat" cmpd="sng" algn="ctr">
-                      <a:solidFill>
-                        <a:srgbClr val="D1D5DB"/>
-                      </a:solidFill>
-                      <a:prstDash val="solid"/>
-                      <a:round/>
-                      <a:headEnd type="none" w="med" len="med"/>
-                      <a:tailEnd type="none" w="med" len="med"/>
-                    </a:lnL>
-                    <a:lnR w="6350" cap="flat" cmpd="sng" algn="ctr">
-                      <a:solidFill>
-                        <a:srgbClr val="D1D5DB"/>
-                      </a:solidFill>
-                      <a:prstDash val="solid"/>
-                      <a:round/>
-                      <a:headEnd type="none" w="med" len="med"/>
-                      <a:tailEnd type="none" w="med" len="med"/>
-                    </a:lnR>
-                    <a:lnT w="6350" cap="flat" cmpd="sng" algn="ctr">
-                      <a:solidFill>
-                        <a:srgbClr val="D1D5DB"/>
-                      </a:solidFill>
-                      <a:prstDash val="solid"/>
-                      <a:round/>
-                      <a:headEnd type="none" w="med" len="med"/>
-                      <a:tailEnd type="none" w="med" len="med"/>
-                    </a:lnT>
-                    <a:lnB w="6350" cap="flat" cmpd="sng" algn="ctr">
-                      <a:solidFill>
-                        <a:srgbClr val="D1D5DB"/>
+                        <a:srgbClr val="D8D3CB"/>
                       </a:solidFill>
                       <a:prstDash val="solid"/>
                       <a:round/>
@@ -7621,45 +8146,52 @@
                       <a:r>
                         <a:rPr lang="en-US" sz="1100" dirty="0">
                           <a:solidFill>
-                            <a:srgbClr val="374151"/>
+                            <a:srgbClr val="23282E"/>
                           </a:solidFill>
+                          <a:latin typeface="Corbel" pitchFamily="34" charset="0"/>
+                          <a:ea typeface="Corbel" pitchFamily="34" charset="-122"/>
+                          <a:cs typeface="Corbel" pitchFamily="34" charset="-120"/>
                         </a:rPr>
-                        <a:t>Distance of 5 km or less</a:t>
+                        <a:t>Distance greater than 5 km to facility</a:t>
                       </a:r>
-                      <a:endParaRPr lang="en-US" sz="1100" dirty="0"/>
+                      <a:endParaRPr lang="en-US" sz="1100" dirty="0">
+                        <a:latin typeface="Corbel" charset="0"/>
+                        <a:ea typeface="Corbel" charset="0"/>
+                        <a:cs typeface="Corbel" charset="0"/>
+                      </a:endParaRPr>
                     </a:p>
                   </a:txBody>
-                  <a:tcPr marL="91440" marR="91440" marT="45720" marB="45720" anchor="t">
-                    <a:lnL w="6350" cap="flat" cmpd="sng" algn="ctr">
+                  <a:tcPr marL="76200" marR="76200" marT="76200" marB="76200" anchor="t">
+                    <a:lnL w="5080" cap="flat" cmpd="sng" algn="ctr">
                       <a:solidFill>
-                        <a:srgbClr val="D1D5DB"/>
+                        <a:srgbClr val="D8D3CB"/>
                       </a:solidFill>
                       <a:prstDash val="solid"/>
                       <a:round/>
                       <a:headEnd type="none" w="med" len="med"/>
                       <a:tailEnd type="none" w="med" len="med"/>
                     </a:lnL>
-                    <a:lnR w="6350" cap="flat" cmpd="sng" algn="ctr">
+                    <a:lnR w="5080" cap="flat" cmpd="sng" algn="ctr">
                       <a:solidFill>
-                        <a:srgbClr val="D1D5DB"/>
+                        <a:srgbClr val="D8D3CB"/>
                       </a:solidFill>
                       <a:prstDash val="solid"/>
                       <a:round/>
                       <a:headEnd type="none" w="med" len="med"/>
                       <a:tailEnd type="none" w="med" len="med"/>
                     </a:lnR>
-                    <a:lnT w="6350" cap="flat" cmpd="sng" algn="ctr">
+                    <a:lnT w="5080" cap="flat" cmpd="sng" algn="ctr">
                       <a:solidFill>
-                        <a:srgbClr val="D1D5DB"/>
+                        <a:srgbClr val="D8D3CB"/>
                       </a:solidFill>
                       <a:prstDash val="solid"/>
                       <a:round/>
                       <a:headEnd type="none" w="med" len="med"/>
                       <a:tailEnd type="none" w="med" len="med"/>
                     </a:lnT>
-                    <a:lnB w="6350" cap="flat" cmpd="sng" algn="ctr">
+                    <a:lnB w="5080" cap="flat" cmpd="sng" algn="ctr">
                       <a:solidFill>
-                        <a:srgbClr val="D1D5DB"/>
+                        <a:srgbClr val="D8D3CB"/>
                       </a:solidFill>
                       <a:prstDash val="solid"/>
                       <a:round/>
@@ -7682,45 +8214,52 @@
                       <a:r>
                         <a:rPr lang="en-US" sz="1100" dirty="0">
                           <a:solidFill>
-                            <a:srgbClr val="374151"/>
+                            <a:srgbClr val="23282E"/>
                           </a:solidFill>
+                          <a:latin typeface="Corbel" pitchFamily="34" charset="0"/>
+                          <a:ea typeface="Corbel" pitchFamily="34" charset="-122"/>
+                          <a:cs typeface="Corbel" pitchFamily="34" charset="-120"/>
                         </a:rPr>
-                        <a:t>Not applicable</a:t>
+                        <a:t>Experience of seeking and delaying care</a:t>
                       </a:r>
-                      <a:endParaRPr lang="en-US" sz="1100" dirty="0"/>
+                      <a:endParaRPr lang="en-US" sz="1100" dirty="0">
+                        <a:latin typeface="Corbel" charset="0"/>
+                        <a:ea typeface="Corbel" charset="0"/>
+                        <a:cs typeface="Corbel" charset="0"/>
+                      </a:endParaRPr>
                     </a:p>
                   </a:txBody>
-                  <a:tcPr marL="91440" marR="91440" marT="45720" marB="45720" anchor="t">
-                    <a:lnL w="6350" cap="flat" cmpd="sng" algn="ctr">
+                  <a:tcPr marL="76200" marR="76200" marT="76200" marB="76200" anchor="t">
+                    <a:lnL w="5080" cap="flat" cmpd="sng" algn="ctr">
                       <a:solidFill>
-                        <a:srgbClr val="D1D5DB"/>
+                        <a:srgbClr val="D8D3CB"/>
                       </a:solidFill>
                       <a:prstDash val="solid"/>
                       <a:round/>
                       <a:headEnd type="none" w="med" len="med"/>
                       <a:tailEnd type="none" w="med" len="med"/>
                     </a:lnL>
-                    <a:lnR w="6350" cap="flat" cmpd="sng" algn="ctr">
+                    <a:lnR w="5080" cap="flat" cmpd="sng" algn="ctr">
                       <a:solidFill>
-                        <a:srgbClr val="D1D5DB"/>
+                        <a:srgbClr val="D8D3CB"/>
                       </a:solidFill>
                       <a:prstDash val="solid"/>
                       <a:round/>
                       <a:headEnd type="none" w="med" len="med"/>
                       <a:tailEnd type="none" w="med" len="med"/>
                     </a:lnR>
-                    <a:lnT w="6350" cap="flat" cmpd="sng" algn="ctr">
+                    <a:lnT w="5080" cap="flat" cmpd="sng" algn="ctr">
                       <a:solidFill>
-                        <a:srgbClr val="D1D5DB"/>
+                        <a:srgbClr val="D8D3CB"/>
                       </a:solidFill>
                       <a:prstDash val="solid"/>
                       <a:round/>
                       <a:headEnd type="none" w="med" len="med"/>
                       <a:tailEnd type="none" w="med" len="med"/>
                     </a:lnT>
-                    <a:lnB w="6350" cap="flat" cmpd="sng" algn="ctr">
+                    <a:lnB w="5080" cap="flat" cmpd="sng" algn="ctr">
                       <a:solidFill>
-                        <a:srgbClr val="D1D5DB"/>
+                        <a:srgbClr val="D8D3CB"/>
                       </a:solidFill>
                       <a:prstDash val="solid"/>
                       <a:round/>
@@ -7745,230 +8284,52 @@
                       <a:r>
                         <a:rPr lang="en-US" sz="1100" dirty="0">
                           <a:solidFill>
-                            <a:srgbClr val="374151"/>
+                            <a:srgbClr val="23282E"/>
                           </a:solidFill>
+                          <a:latin typeface="Corbel" pitchFamily="34" charset="0"/>
+                          <a:ea typeface="Corbel" pitchFamily="34" charset="-122"/>
+                          <a:cs typeface="Corbel" pitchFamily="34" charset="-120"/>
                         </a:rPr>
-                        <a:t>Outcome</a:t>
+                        <a:t>Compared with</a:t>
                       </a:r>
-                      <a:endParaRPr lang="en-US" sz="1100" dirty="0"/>
+                      <a:endParaRPr lang="en-US" sz="1100" dirty="0">
+                        <a:latin typeface="Corbel" charset="0"/>
+                        <a:ea typeface="Corbel" charset="0"/>
+                        <a:cs typeface="Corbel" charset="0"/>
+                      </a:endParaRPr>
                     </a:p>
                   </a:txBody>
-                  <a:tcPr marL="91440" marR="91440" marT="45720" marB="45720" anchor="t">
-                    <a:lnL w="6350" cap="flat" cmpd="sng" algn="ctr">
+                  <a:tcPr marL="76200" marR="76200" marT="76200" marB="76200" anchor="t">
+                    <a:lnL w="5080" cap="flat" cmpd="sng" algn="ctr">
                       <a:solidFill>
-                        <a:srgbClr val="D1D5DB"/>
+                        <a:srgbClr val="D8D3CB"/>
                       </a:solidFill>
                       <a:prstDash val="solid"/>
                       <a:round/>
                       <a:headEnd type="none" w="med" len="med"/>
                       <a:tailEnd type="none" w="med" len="med"/>
                     </a:lnL>
-                    <a:lnR w="6350" cap="flat" cmpd="sng" algn="ctr">
+                    <a:lnR w="5080" cap="flat" cmpd="sng" algn="ctr">
                       <a:solidFill>
-                        <a:srgbClr val="D1D5DB"/>
+                        <a:srgbClr val="D8D3CB"/>
                       </a:solidFill>
                       <a:prstDash val="solid"/>
                       <a:round/>
                       <a:headEnd type="none" w="med" len="med"/>
                       <a:tailEnd type="none" w="med" len="med"/>
                     </a:lnR>
-                    <a:lnT w="6350" cap="flat" cmpd="sng" algn="ctr">
+                    <a:lnT w="5080" cap="flat" cmpd="sng" algn="ctr">
                       <a:solidFill>
-                        <a:srgbClr val="D1D5DB"/>
+                        <a:srgbClr val="D8D3CB"/>
                       </a:solidFill>
                       <a:prstDash val="solid"/>
                       <a:round/>
                       <a:headEnd type="none" w="med" len="med"/>
                       <a:tailEnd type="none" w="med" len="med"/>
                     </a:lnT>
-                    <a:lnB w="6350" cap="flat" cmpd="sng" algn="ctr">
+                    <a:lnB w="5080" cap="flat" cmpd="sng" algn="ctr">
                       <a:solidFill>
-                        <a:srgbClr val="D1D5DB"/>
-                      </a:solidFill>
-                      <a:prstDash val="solid"/>
-                      <a:round/>
-                      <a:headEnd type="none" w="med" len="med"/>
-                      <a:tailEnd type="none" w="med" len="med"/>
-                    </a:lnB>
-                    <a:solidFill>
-                      <a:srgbClr val="F9FAFB"/>
-                    </a:solidFill>
-                  </a:tcPr>
-                </a:tc>
-                <a:tc>
-                  <a:txBody>
-                    <a:bodyPr/>
-                    <a:lstStyle/>
-                    <a:p>
-                      <a:pPr indent="0" marL="0">
-                        <a:buNone/>
-                      </a:pPr>
-                      <a:r>
-                        <a:rPr lang="en-US" sz="1100" dirty="0">
-                          <a:solidFill>
-                            <a:srgbClr val="374151"/>
-                          </a:solidFill>
-                        </a:rPr>
-                        <a:t>Treatment delayed beyond 24 hours</a:t>
-                      </a:r>
-                      <a:endParaRPr lang="en-US" sz="1100" dirty="0"/>
-                    </a:p>
-                  </a:txBody>
-                  <a:tcPr marL="91440" marR="91440" marT="45720" marB="45720" anchor="t">
-                    <a:lnL w="6350" cap="flat" cmpd="sng" algn="ctr">
-                      <a:solidFill>
-                        <a:srgbClr val="D1D5DB"/>
-                      </a:solidFill>
-                      <a:prstDash val="solid"/>
-                      <a:round/>
-                      <a:headEnd type="none" w="med" len="med"/>
-                      <a:tailEnd type="none" w="med" len="med"/>
-                    </a:lnL>
-                    <a:lnR w="6350" cap="flat" cmpd="sng" algn="ctr">
-                      <a:solidFill>
-                        <a:srgbClr val="D1D5DB"/>
-                      </a:solidFill>
-                      <a:prstDash val="solid"/>
-                      <a:round/>
-                      <a:headEnd type="none" w="med" len="med"/>
-                      <a:tailEnd type="none" w="med" len="med"/>
-                    </a:lnR>
-                    <a:lnT w="6350" cap="flat" cmpd="sng" algn="ctr">
-                      <a:solidFill>
-                        <a:srgbClr val="D1D5DB"/>
-                      </a:solidFill>
-                      <a:prstDash val="solid"/>
-                      <a:round/>
-                      <a:headEnd type="none" w="med" len="med"/>
-                      <a:tailEnd type="none" w="med" len="med"/>
-                    </a:lnT>
-                    <a:lnB w="6350" cap="flat" cmpd="sng" algn="ctr">
-                      <a:solidFill>
-                        <a:srgbClr val="D1D5DB"/>
-                      </a:solidFill>
-                      <a:prstDash val="solid"/>
-                      <a:round/>
-                      <a:headEnd type="none" w="med" len="med"/>
-                      <a:tailEnd type="none" w="med" len="med"/>
-                    </a:lnB>
-                    <a:solidFill>
-                      <a:srgbClr val="F9FAFB"/>
-                    </a:solidFill>
-                  </a:tcPr>
-                </a:tc>
-                <a:tc>
-                  <a:txBody>
-                    <a:bodyPr/>
-                    <a:lstStyle/>
-                    <a:p>
-                      <a:pPr indent="0" marL="0">
-                        <a:buNone/>
-                      </a:pPr>
-                      <a:r>
-                        <a:rPr lang="en-US" sz="1100" dirty="0">
-                          <a:solidFill>
-                            <a:srgbClr val="374151"/>
-                          </a:solidFill>
-                        </a:rPr>
-                        <a:t>How caregivers account for delay</a:t>
-                      </a:r>
-                      <a:endParaRPr lang="en-US" sz="1100" dirty="0"/>
-                    </a:p>
-                  </a:txBody>
-                  <a:tcPr marL="91440" marR="91440" marT="45720" marB="45720" anchor="t">
-                    <a:lnL w="6350" cap="flat" cmpd="sng" algn="ctr">
-                      <a:solidFill>
-                        <a:srgbClr val="D1D5DB"/>
-                      </a:solidFill>
-                      <a:prstDash val="solid"/>
-                      <a:round/>
-                      <a:headEnd type="none" w="med" len="med"/>
-                      <a:tailEnd type="none" w="med" len="med"/>
-                    </a:lnL>
-                    <a:lnR w="6350" cap="flat" cmpd="sng" algn="ctr">
-                      <a:solidFill>
-                        <a:srgbClr val="D1D5DB"/>
-                      </a:solidFill>
-                      <a:prstDash val="solid"/>
-                      <a:round/>
-                      <a:headEnd type="none" w="med" len="med"/>
-                      <a:tailEnd type="none" w="med" len="med"/>
-                    </a:lnR>
-                    <a:lnT w="6350" cap="flat" cmpd="sng" algn="ctr">
-                      <a:solidFill>
-                        <a:srgbClr val="D1D5DB"/>
-                      </a:solidFill>
-                      <a:prstDash val="solid"/>
-                      <a:round/>
-                      <a:headEnd type="none" w="med" len="med"/>
-                      <a:tailEnd type="none" w="med" len="med"/>
-                    </a:lnT>
-                    <a:lnB w="6350" cap="flat" cmpd="sng" algn="ctr">
-                      <a:solidFill>
-                        <a:srgbClr val="D1D5DB"/>
-                      </a:solidFill>
-                      <a:prstDash val="solid"/>
-                      <a:round/>
-                      <a:headEnd type="none" w="med" len="med"/>
-                      <a:tailEnd type="none" w="med" len="med"/>
-                    </a:lnB>
-                    <a:solidFill>
-                      <a:srgbClr val="F9FAFB"/>
-                    </a:solidFill>
-                  </a:tcPr>
-                </a:tc>
-              </a:tr>
-              <a:tr h="0">
-                <a:tc>
-                  <a:txBody>
-                    <a:bodyPr/>
-                    <a:lstStyle/>
-                    <a:p>
-                      <a:pPr indent="0" marL="0">
-                        <a:buNone/>
-                      </a:pPr>
-                      <a:r>
-                        <a:rPr lang="en-US" sz="1100" dirty="0">
-                          <a:solidFill>
-                            <a:srgbClr val="374151"/>
-                          </a:solidFill>
-                        </a:rPr>
-                        <a:t>Analysis implied</a:t>
-                      </a:r>
-                      <a:endParaRPr lang="en-US" sz="1100" dirty="0"/>
-                    </a:p>
-                  </a:txBody>
-                  <a:tcPr marL="91440" marR="91440" marT="45720" marB="45720" anchor="t">
-                    <a:lnL w="6350" cap="flat" cmpd="sng" algn="ctr">
-                      <a:solidFill>
-                        <a:srgbClr val="D1D5DB"/>
-                      </a:solidFill>
-                      <a:prstDash val="solid"/>
-                      <a:round/>
-                      <a:headEnd type="none" w="med" len="med"/>
-                      <a:tailEnd type="none" w="med" len="med"/>
-                    </a:lnL>
-                    <a:lnR w="6350" cap="flat" cmpd="sng" algn="ctr">
-                      <a:solidFill>
-                        <a:srgbClr val="D1D5DB"/>
-                      </a:solidFill>
-                      <a:prstDash val="solid"/>
-                      <a:round/>
-                      <a:headEnd type="none" w="med" len="med"/>
-                      <a:tailEnd type="none" w="med" len="med"/>
-                    </a:lnR>
-                    <a:lnT w="6350" cap="flat" cmpd="sng" algn="ctr">
-                      <a:solidFill>
-                        <a:srgbClr val="D1D5DB"/>
-                      </a:solidFill>
-                      <a:prstDash val="solid"/>
-                      <a:round/>
-                      <a:headEnd type="none" w="med" len="med"/>
-                      <a:tailEnd type="none" w="med" len="med"/>
-                    </a:lnT>
-                    <a:lnB w="6350" cap="flat" cmpd="sng" algn="ctr">
-                      <a:solidFill>
-                        <a:srgbClr val="D1D5DB"/>
+                        <a:srgbClr val="D8D3CB"/>
                       </a:solidFill>
                       <a:prstDash val="solid"/>
                       <a:round/>
@@ -7991,45 +8352,52 @@
                       <a:r>
                         <a:rPr lang="en-US" sz="1100" dirty="0">
                           <a:solidFill>
-                            <a:srgbClr val="374151"/>
+                            <a:srgbClr val="23282E"/>
                           </a:solidFill>
+                          <a:latin typeface="Corbel" pitchFamily="34" charset="0"/>
+                          <a:ea typeface="Corbel" pitchFamily="34" charset="-122"/>
+                          <a:cs typeface="Corbel" pitchFamily="34" charset="-120"/>
                         </a:rPr>
-                        <a:t>Logistic regression, odds ratio</a:t>
+                        <a:t>Distance of 5 km or less</a:t>
                       </a:r>
-                      <a:endParaRPr lang="en-US" sz="1100" dirty="0"/>
+                      <a:endParaRPr lang="en-US" sz="1100" dirty="0">
+                        <a:latin typeface="Corbel" charset="0"/>
+                        <a:ea typeface="Corbel" charset="0"/>
+                        <a:cs typeface="Corbel" charset="0"/>
+                      </a:endParaRPr>
                     </a:p>
                   </a:txBody>
-                  <a:tcPr marL="91440" marR="91440" marT="45720" marB="45720" anchor="t">
-                    <a:lnL w="6350" cap="flat" cmpd="sng" algn="ctr">
+                  <a:tcPr marL="76200" marR="76200" marT="76200" marB="76200" anchor="t">
+                    <a:lnL w="5080" cap="flat" cmpd="sng" algn="ctr">
                       <a:solidFill>
-                        <a:srgbClr val="D1D5DB"/>
+                        <a:srgbClr val="D8D3CB"/>
                       </a:solidFill>
                       <a:prstDash val="solid"/>
                       <a:round/>
                       <a:headEnd type="none" w="med" len="med"/>
                       <a:tailEnd type="none" w="med" len="med"/>
                     </a:lnL>
-                    <a:lnR w="6350" cap="flat" cmpd="sng" algn="ctr">
+                    <a:lnR w="5080" cap="flat" cmpd="sng" algn="ctr">
                       <a:solidFill>
-                        <a:srgbClr val="D1D5DB"/>
+                        <a:srgbClr val="D8D3CB"/>
                       </a:solidFill>
                       <a:prstDash val="solid"/>
                       <a:round/>
                       <a:headEnd type="none" w="med" len="med"/>
                       <a:tailEnd type="none" w="med" len="med"/>
                     </a:lnR>
-                    <a:lnT w="6350" cap="flat" cmpd="sng" algn="ctr">
+                    <a:lnT w="5080" cap="flat" cmpd="sng" algn="ctr">
                       <a:solidFill>
-                        <a:srgbClr val="D1D5DB"/>
+                        <a:srgbClr val="D8D3CB"/>
                       </a:solidFill>
                       <a:prstDash val="solid"/>
                       <a:round/>
                       <a:headEnd type="none" w="med" len="med"/>
                       <a:tailEnd type="none" w="med" len="med"/>
                     </a:lnT>
-                    <a:lnB w="6350" cap="flat" cmpd="sng" algn="ctr">
+                    <a:lnB w="5080" cap="flat" cmpd="sng" algn="ctr">
                       <a:solidFill>
-                        <a:srgbClr val="D1D5DB"/>
+                        <a:srgbClr val="D8D3CB"/>
                       </a:solidFill>
                       <a:prstDash val="solid"/>
                       <a:round/>
@@ -8052,45 +8420,464 @@
                       <a:r>
                         <a:rPr lang="en-US" sz="1100" dirty="0">
                           <a:solidFill>
-                            <a:srgbClr val="374151"/>
+                            <a:srgbClr val="23282E"/>
                           </a:solidFill>
+                          <a:latin typeface="Corbel" pitchFamily="34" charset="0"/>
+                          <a:ea typeface="Corbel" pitchFamily="34" charset="-122"/>
+                          <a:cs typeface="Corbel" pitchFamily="34" charset="-120"/>
                         </a:rPr>
-                        <a:t>Thematic analysis of interviews</a:t>
+                        <a:t>Not applicable</a:t>
                       </a:r>
-                      <a:endParaRPr lang="en-US" sz="1100" dirty="0"/>
+                      <a:endParaRPr lang="en-US" sz="1100" dirty="0">
+                        <a:latin typeface="Corbel" charset="0"/>
+                        <a:ea typeface="Corbel" charset="0"/>
+                        <a:cs typeface="Corbel" charset="0"/>
+                      </a:endParaRPr>
                     </a:p>
                   </a:txBody>
-                  <a:tcPr marL="91440" marR="91440" marT="45720" marB="45720" anchor="t">
-                    <a:lnL w="6350" cap="flat" cmpd="sng" algn="ctr">
+                  <a:tcPr marL="76200" marR="76200" marT="76200" marB="76200" anchor="t">
+                    <a:lnL w="5080" cap="flat" cmpd="sng" algn="ctr">
                       <a:solidFill>
-                        <a:srgbClr val="D1D5DB"/>
+                        <a:srgbClr val="D8D3CB"/>
                       </a:solidFill>
                       <a:prstDash val="solid"/>
                       <a:round/>
                       <a:headEnd type="none" w="med" len="med"/>
                       <a:tailEnd type="none" w="med" len="med"/>
                     </a:lnL>
-                    <a:lnR w="6350" cap="flat" cmpd="sng" algn="ctr">
+                    <a:lnR w="5080" cap="flat" cmpd="sng" algn="ctr">
                       <a:solidFill>
-                        <a:srgbClr val="D1D5DB"/>
+                        <a:srgbClr val="D8D3CB"/>
                       </a:solidFill>
                       <a:prstDash val="solid"/>
                       <a:round/>
                       <a:headEnd type="none" w="med" len="med"/>
                       <a:tailEnd type="none" w="med" len="med"/>
                     </a:lnR>
-                    <a:lnT w="6350" cap="flat" cmpd="sng" algn="ctr">
+                    <a:lnT w="5080" cap="flat" cmpd="sng" algn="ctr">
                       <a:solidFill>
-                        <a:srgbClr val="D1D5DB"/>
+                        <a:srgbClr val="D8D3CB"/>
                       </a:solidFill>
                       <a:prstDash val="solid"/>
                       <a:round/>
                       <a:headEnd type="none" w="med" len="med"/>
                       <a:tailEnd type="none" w="med" len="med"/>
                     </a:lnT>
-                    <a:lnB w="6350" cap="flat" cmpd="sng" algn="ctr">
+                    <a:lnB w="5080" cap="flat" cmpd="sng" algn="ctr">
                       <a:solidFill>
-                        <a:srgbClr val="D1D5DB"/>
+                        <a:srgbClr val="D8D3CB"/>
+                      </a:solidFill>
+                      <a:prstDash val="solid"/>
+                      <a:round/>
+                      <a:headEnd type="none" w="med" len="med"/>
+                      <a:tailEnd type="none" w="med" len="med"/>
+                    </a:lnB>
+                    <a:solidFill>
+                      <a:srgbClr val="FFFFFF"/>
+                    </a:solidFill>
+                  </a:tcPr>
+                </a:tc>
+              </a:tr>
+              <a:tr h="0">
+                <a:tc>
+                  <a:txBody>
+                    <a:bodyPr/>
+                    <a:lstStyle/>
+                    <a:p>
+                      <a:pPr indent="0" marL="0">
+                        <a:buNone/>
+                      </a:pPr>
+                      <a:r>
+                        <a:rPr lang="en-US" sz="1100" dirty="0">
+                          <a:solidFill>
+                            <a:srgbClr val="23282E"/>
+                          </a:solidFill>
+                          <a:latin typeface="Corbel" pitchFamily="34" charset="0"/>
+                          <a:ea typeface="Corbel" pitchFamily="34" charset="-122"/>
+                          <a:cs typeface="Corbel" pitchFamily="34" charset="-120"/>
+                        </a:rPr>
+                        <a:t>Outcome</a:t>
+                      </a:r>
+                      <a:endParaRPr lang="en-US" sz="1100" dirty="0">
+                        <a:latin typeface="Corbel" charset="0"/>
+                        <a:ea typeface="Corbel" charset="0"/>
+                        <a:cs typeface="Corbel" charset="0"/>
+                      </a:endParaRPr>
+                    </a:p>
+                  </a:txBody>
+                  <a:tcPr marL="76200" marR="76200" marT="76200" marB="76200" anchor="t">
+                    <a:lnL w="5080" cap="flat" cmpd="sng" algn="ctr">
+                      <a:solidFill>
+                        <a:srgbClr val="D8D3CB"/>
+                      </a:solidFill>
+                      <a:prstDash val="solid"/>
+                      <a:round/>
+                      <a:headEnd type="none" w="med" len="med"/>
+                      <a:tailEnd type="none" w="med" len="med"/>
+                    </a:lnL>
+                    <a:lnR w="5080" cap="flat" cmpd="sng" algn="ctr">
+                      <a:solidFill>
+                        <a:srgbClr val="D8D3CB"/>
+                      </a:solidFill>
+                      <a:prstDash val="solid"/>
+                      <a:round/>
+                      <a:headEnd type="none" w="med" len="med"/>
+                      <a:tailEnd type="none" w="med" len="med"/>
+                    </a:lnR>
+                    <a:lnT w="5080" cap="flat" cmpd="sng" algn="ctr">
+                      <a:solidFill>
+                        <a:srgbClr val="D8D3CB"/>
+                      </a:solidFill>
+                      <a:prstDash val="solid"/>
+                      <a:round/>
+                      <a:headEnd type="none" w="med" len="med"/>
+                      <a:tailEnd type="none" w="med" len="med"/>
+                    </a:lnT>
+                    <a:lnB w="5080" cap="flat" cmpd="sng" algn="ctr">
+                      <a:solidFill>
+                        <a:srgbClr val="D8D3CB"/>
+                      </a:solidFill>
+                      <a:prstDash val="solid"/>
+                      <a:round/>
+                      <a:headEnd type="none" w="med" len="med"/>
+                      <a:tailEnd type="none" w="med" len="med"/>
+                    </a:lnB>
+                    <a:solidFill>
+                      <a:srgbClr val="FFFFFF"/>
+                    </a:solidFill>
+                  </a:tcPr>
+                </a:tc>
+                <a:tc>
+                  <a:txBody>
+                    <a:bodyPr/>
+                    <a:lstStyle/>
+                    <a:p>
+                      <a:pPr indent="0" marL="0">
+                        <a:buNone/>
+                      </a:pPr>
+                      <a:r>
+                        <a:rPr lang="en-US" sz="1100" dirty="0">
+                          <a:solidFill>
+                            <a:srgbClr val="23282E"/>
+                          </a:solidFill>
+                          <a:latin typeface="Corbel" pitchFamily="34" charset="0"/>
+                          <a:ea typeface="Corbel" pitchFamily="34" charset="-122"/>
+                          <a:cs typeface="Corbel" pitchFamily="34" charset="-120"/>
+                        </a:rPr>
+                        <a:t>Treatment delayed beyond 24 hours</a:t>
+                      </a:r>
+                      <a:endParaRPr lang="en-US" sz="1100" dirty="0">
+                        <a:latin typeface="Corbel" charset="0"/>
+                        <a:ea typeface="Corbel" charset="0"/>
+                        <a:cs typeface="Corbel" charset="0"/>
+                      </a:endParaRPr>
+                    </a:p>
+                  </a:txBody>
+                  <a:tcPr marL="76200" marR="76200" marT="76200" marB="76200" anchor="t">
+                    <a:lnL w="5080" cap="flat" cmpd="sng" algn="ctr">
+                      <a:solidFill>
+                        <a:srgbClr val="D8D3CB"/>
+                      </a:solidFill>
+                      <a:prstDash val="solid"/>
+                      <a:round/>
+                      <a:headEnd type="none" w="med" len="med"/>
+                      <a:tailEnd type="none" w="med" len="med"/>
+                    </a:lnL>
+                    <a:lnR w="5080" cap="flat" cmpd="sng" algn="ctr">
+                      <a:solidFill>
+                        <a:srgbClr val="D8D3CB"/>
+                      </a:solidFill>
+                      <a:prstDash val="solid"/>
+                      <a:round/>
+                      <a:headEnd type="none" w="med" len="med"/>
+                      <a:tailEnd type="none" w="med" len="med"/>
+                    </a:lnR>
+                    <a:lnT w="5080" cap="flat" cmpd="sng" algn="ctr">
+                      <a:solidFill>
+                        <a:srgbClr val="D8D3CB"/>
+                      </a:solidFill>
+                      <a:prstDash val="solid"/>
+                      <a:round/>
+                      <a:headEnd type="none" w="med" len="med"/>
+                      <a:tailEnd type="none" w="med" len="med"/>
+                    </a:lnT>
+                    <a:lnB w="5080" cap="flat" cmpd="sng" algn="ctr">
+                      <a:solidFill>
+                        <a:srgbClr val="D8D3CB"/>
+                      </a:solidFill>
+                      <a:prstDash val="solid"/>
+                      <a:round/>
+                      <a:headEnd type="none" w="med" len="med"/>
+                      <a:tailEnd type="none" w="med" len="med"/>
+                    </a:lnB>
+                    <a:solidFill>
+                      <a:srgbClr val="FFFFFF"/>
+                    </a:solidFill>
+                  </a:tcPr>
+                </a:tc>
+                <a:tc>
+                  <a:txBody>
+                    <a:bodyPr/>
+                    <a:lstStyle/>
+                    <a:p>
+                      <a:pPr indent="0" marL="0">
+                        <a:buNone/>
+                      </a:pPr>
+                      <a:r>
+                        <a:rPr lang="en-US" sz="1100" dirty="0">
+                          <a:solidFill>
+                            <a:srgbClr val="23282E"/>
+                          </a:solidFill>
+                          <a:latin typeface="Corbel" pitchFamily="34" charset="0"/>
+                          <a:ea typeface="Corbel" pitchFamily="34" charset="-122"/>
+                          <a:cs typeface="Corbel" pitchFamily="34" charset="-120"/>
+                        </a:rPr>
+                        <a:t>How caregivers account for delay</a:t>
+                      </a:r>
+                      <a:endParaRPr lang="en-US" sz="1100" dirty="0">
+                        <a:latin typeface="Corbel" charset="0"/>
+                        <a:ea typeface="Corbel" charset="0"/>
+                        <a:cs typeface="Corbel" charset="0"/>
+                      </a:endParaRPr>
+                    </a:p>
+                  </a:txBody>
+                  <a:tcPr marL="76200" marR="76200" marT="76200" marB="76200" anchor="t">
+                    <a:lnL w="5080" cap="flat" cmpd="sng" algn="ctr">
+                      <a:solidFill>
+                        <a:srgbClr val="D8D3CB"/>
+                      </a:solidFill>
+                      <a:prstDash val="solid"/>
+                      <a:round/>
+                      <a:headEnd type="none" w="med" len="med"/>
+                      <a:tailEnd type="none" w="med" len="med"/>
+                    </a:lnL>
+                    <a:lnR w="5080" cap="flat" cmpd="sng" algn="ctr">
+                      <a:solidFill>
+                        <a:srgbClr val="D8D3CB"/>
+                      </a:solidFill>
+                      <a:prstDash val="solid"/>
+                      <a:round/>
+                      <a:headEnd type="none" w="med" len="med"/>
+                      <a:tailEnd type="none" w="med" len="med"/>
+                    </a:lnR>
+                    <a:lnT w="5080" cap="flat" cmpd="sng" algn="ctr">
+                      <a:solidFill>
+                        <a:srgbClr val="D8D3CB"/>
+                      </a:solidFill>
+                      <a:prstDash val="solid"/>
+                      <a:round/>
+                      <a:headEnd type="none" w="med" len="med"/>
+                      <a:tailEnd type="none" w="med" len="med"/>
+                    </a:lnT>
+                    <a:lnB w="5080" cap="flat" cmpd="sng" algn="ctr">
+                      <a:solidFill>
+                        <a:srgbClr val="D8D3CB"/>
+                      </a:solidFill>
+                      <a:prstDash val="solid"/>
+                      <a:round/>
+                      <a:headEnd type="none" w="med" len="med"/>
+                      <a:tailEnd type="none" w="med" len="med"/>
+                    </a:lnB>
+                    <a:solidFill>
+                      <a:srgbClr val="FFFFFF"/>
+                    </a:solidFill>
+                  </a:tcPr>
+                </a:tc>
+              </a:tr>
+              <a:tr h="0">
+                <a:tc>
+                  <a:txBody>
+                    <a:bodyPr/>
+                    <a:lstStyle/>
+                    <a:p>
+                      <a:pPr indent="0" marL="0">
+                        <a:buNone/>
+                      </a:pPr>
+                      <a:r>
+                        <a:rPr lang="en-US" sz="1100" dirty="0">
+                          <a:solidFill>
+                            <a:srgbClr val="23282E"/>
+                          </a:solidFill>
+                          <a:latin typeface="Corbel" pitchFamily="34" charset="0"/>
+                          <a:ea typeface="Corbel" pitchFamily="34" charset="-122"/>
+                          <a:cs typeface="Corbel" pitchFamily="34" charset="-120"/>
+                        </a:rPr>
+                        <a:t>Analysis implied</a:t>
+                      </a:r>
+                      <a:endParaRPr lang="en-US" sz="1100" dirty="0">
+                        <a:latin typeface="Corbel" charset="0"/>
+                        <a:ea typeface="Corbel" charset="0"/>
+                        <a:cs typeface="Corbel" charset="0"/>
+                      </a:endParaRPr>
+                    </a:p>
+                  </a:txBody>
+                  <a:tcPr marL="76200" marR="76200" marT="76200" marB="76200" anchor="t">
+                    <a:lnL w="5080" cap="flat" cmpd="sng" algn="ctr">
+                      <a:solidFill>
+                        <a:srgbClr val="D8D3CB"/>
+                      </a:solidFill>
+                      <a:prstDash val="solid"/>
+                      <a:round/>
+                      <a:headEnd type="none" w="med" len="med"/>
+                      <a:tailEnd type="none" w="med" len="med"/>
+                    </a:lnL>
+                    <a:lnR w="5080" cap="flat" cmpd="sng" algn="ctr">
+                      <a:solidFill>
+                        <a:srgbClr val="D8D3CB"/>
+                      </a:solidFill>
+                      <a:prstDash val="solid"/>
+                      <a:round/>
+                      <a:headEnd type="none" w="med" len="med"/>
+                      <a:tailEnd type="none" w="med" len="med"/>
+                    </a:lnR>
+                    <a:lnT w="5080" cap="flat" cmpd="sng" algn="ctr">
+                      <a:solidFill>
+                        <a:srgbClr val="D8D3CB"/>
+                      </a:solidFill>
+                      <a:prstDash val="solid"/>
+                      <a:round/>
+                      <a:headEnd type="none" w="med" len="med"/>
+                      <a:tailEnd type="none" w="med" len="med"/>
+                    </a:lnT>
+                    <a:lnB w="5080" cap="flat" cmpd="sng" algn="ctr">
+                      <a:solidFill>
+                        <a:srgbClr val="D8D3CB"/>
+                      </a:solidFill>
+                      <a:prstDash val="solid"/>
+                      <a:round/>
+                      <a:headEnd type="none" w="med" len="med"/>
+                      <a:tailEnd type="none" w="med" len="med"/>
+                    </a:lnB>
+                    <a:solidFill>
+                      <a:srgbClr val="FFFFFF"/>
+                    </a:solidFill>
+                  </a:tcPr>
+                </a:tc>
+                <a:tc>
+                  <a:txBody>
+                    <a:bodyPr/>
+                    <a:lstStyle/>
+                    <a:p>
+                      <a:pPr indent="0" marL="0">
+                        <a:buNone/>
+                      </a:pPr>
+                      <a:r>
+                        <a:rPr lang="en-US" sz="1100" dirty="0">
+                          <a:solidFill>
+                            <a:srgbClr val="23282E"/>
+                          </a:solidFill>
+                          <a:latin typeface="Corbel" pitchFamily="34" charset="0"/>
+                          <a:ea typeface="Corbel" pitchFamily="34" charset="-122"/>
+                          <a:cs typeface="Corbel" pitchFamily="34" charset="-120"/>
+                        </a:rPr>
+                        <a:t>Logistic regression, odds ratio</a:t>
+                      </a:r>
+                      <a:endParaRPr lang="en-US" sz="1100" dirty="0">
+                        <a:latin typeface="Corbel" charset="0"/>
+                        <a:ea typeface="Corbel" charset="0"/>
+                        <a:cs typeface="Corbel" charset="0"/>
+                      </a:endParaRPr>
+                    </a:p>
+                  </a:txBody>
+                  <a:tcPr marL="76200" marR="76200" marT="76200" marB="76200" anchor="t">
+                    <a:lnL w="5080" cap="flat" cmpd="sng" algn="ctr">
+                      <a:solidFill>
+                        <a:srgbClr val="D8D3CB"/>
+                      </a:solidFill>
+                      <a:prstDash val="solid"/>
+                      <a:round/>
+                      <a:headEnd type="none" w="med" len="med"/>
+                      <a:tailEnd type="none" w="med" len="med"/>
+                    </a:lnL>
+                    <a:lnR w="5080" cap="flat" cmpd="sng" algn="ctr">
+                      <a:solidFill>
+                        <a:srgbClr val="D8D3CB"/>
+                      </a:solidFill>
+                      <a:prstDash val="solid"/>
+                      <a:round/>
+                      <a:headEnd type="none" w="med" len="med"/>
+                      <a:tailEnd type="none" w="med" len="med"/>
+                    </a:lnR>
+                    <a:lnT w="5080" cap="flat" cmpd="sng" algn="ctr">
+                      <a:solidFill>
+                        <a:srgbClr val="D8D3CB"/>
+                      </a:solidFill>
+                      <a:prstDash val="solid"/>
+                      <a:round/>
+                      <a:headEnd type="none" w="med" len="med"/>
+                      <a:tailEnd type="none" w="med" len="med"/>
+                    </a:lnT>
+                    <a:lnB w="5080" cap="flat" cmpd="sng" algn="ctr">
+                      <a:solidFill>
+                        <a:srgbClr val="D8D3CB"/>
+                      </a:solidFill>
+                      <a:prstDash val="solid"/>
+                      <a:round/>
+                      <a:headEnd type="none" w="med" len="med"/>
+                      <a:tailEnd type="none" w="med" len="med"/>
+                    </a:lnB>
+                    <a:solidFill>
+                      <a:srgbClr val="FFFFFF"/>
+                    </a:solidFill>
+                  </a:tcPr>
+                </a:tc>
+                <a:tc>
+                  <a:txBody>
+                    <a:bodyPr/>
+                    <a:lstStyle/>
+                    <a:p>
+                      <a:pPr indent="0" marL="0">
+                        <a:buNone/>
+                      </a:pPr>
+                      <a:r>
+                        <a:rPr lang="en-US" sz="1100" dirty="0">
+                          <a:solidFill>
+                            <a:srgbClr val="23282E"/>
+                          </a:solidFill>
+                          <a:latin typeface="Corbel" pitchFamily="34" charset="0"/>
+                          <a:ea typeface="Corbel" pitchFamily="34" charset="-122"/>
+                          <a:cs typeface="Corbel" pitchFamily="34" charset="-120"/>
+                        </a:rPr>
+                        <a:t>Thematic analysis of interviews</a:t>
+                      </a:r>
+                      <a:endParaRPr lang="en-US" sz="1100" dirty="0">
+                        <a:latin typeface="Corbel" charset="0"/>
+                        <a:ea typeface="Corbel" charset="0"/>
+                        <a:cs typeface="Corbel" charset="0"/>
+                      </a:endParaRPr>
+                    </a:p>
+                  </a:txBody>
+                  <a:tcPr marL="76200" marR="76200" marT="76200" marB="76200" anchor="t">
+                    <a:lnL w="5080" cap="flat" cmpd="sng" algn="ctr">
+                      <a:solidFill>
+                        <a:srgbClr val="D8D3CB"/>
+                      </a:solidFill>
+                      <a:prstDash val="solid"/>
+                      <a:round/>
+                      <a:headEnd type="none" w="med" len="med"/>
+                      <a:tailEnd type="none" w="med" len="med"/>
+                    </a:lnL>
+                    <a:lnR w="5080" cap="flat" cmpd="sng" algn="ctr">
+                      <a:solidFill>
+                        <a:srgbClr val="D8D3CB"/>
+                      </a:solidFill>
+                      <a:prstDash val="solid"/>
+                      <a:round/>
+                      <a:headEnd type="none" w="med" len="med"/>
+                      <a:tailEnd type="none" w="med" len="med"/>
+                    </a:lnR>
+                    <a:lnT w="5080" cap="flat" cmpd="sng" algn="ctr">
+                      <a:solidFill>
+                        <a:srgbClr val="D8D3CB"/>
+                      </a:solidFill>
+                      <a:prstDash val="solid"/>
+                      <a:round/>
+                      <a:headEnd type="none" w="med" len="med"/>
+                      <a:tailEnd type="none" w="med" len="med"/>
+                    </a:lnT>
+                    <a:lnB w="5080" cap="flat" cmpd="sng" algn="ctr">
+                      <a:solidFill>
+                        <a:srgbClr val="D8D3CB"/>
                       </a:solidFill>
                       <a:prstDash val="solid"/>
                       <a:round/>
@@ -8119,8 +8906,8 @@
         </p:nvSpPr>
         <p:spPr>
           <a:xfrm>
-            <a:off x="8503920" y="4709160"/>
-            <a:ext cx="800000" cy="300000"/>
+            <a:off x="566928" y="4700016"/>
+            <a:ext cx="914400" cy="274320"/>
           </a:xfrm>
           <a:prstGeom prst="rect">
             <a:avLst/>
@@ -8135,10 +8922,13 @@
           <a:bodyPr/>
           <a:lstStyle>
             <a:lvl1pPr>
-              <a:defRPr sz="1000">
-                <a:solidFill>
-                  <a:srgbClr val="6B7280"/>
-                </a:solidFill>
+              <a:defRPr sz="900">
+                <a:solidFill>
+                  <a:srgbClr val="5F6B76"/>
+                </a:solidFill>
+                <a:latin typeface="Corbel"/>
+                <a:ea typeface="Corbel"/>
+                <a:cs typeface="Corbel"/>
               </a:defRPr>
             </a:lvl1pPr>
           </a:lstStyle>
@@ -8203,7 +8993,7 @@
     </a:clrScheme>
     <a:fontScheme name="Office">
       <a:majorFont>
-        <a:latin typeface="Calibri Light" panose="020F0302020204030204"/>
+        <a:latin typeface="Constantia"/>
         <a:ea typeface=""/>
         <a:cs typeface=""/>
         <a:font script="Jpan" typeface="游ゴシック Light"/>
@@ -8255,7 +9045,7 @@
         <a:font script="Tfng" typeface="Ebrima"/>
       </a:majorFont>
       <a:minorFont>
-        <a:latin typeface="Calibri" panose="020F0502020204030204"/>
+        <a:latin typeface="Corbel"/>
         <a:ea typeface=""/>
         <a:cs typeface=""/>
         <a:font script="Jpan" typeface="游ゴシック"/>
